--- a/docs/project-plan/RE_FORM_LIFE_simple.pptx
+++ b/docs/project-plan/RE_FORM_LIFE_simple.pptx
@@ -2,29 +2,29 @@
 <file path=ppt/presentation.xml><?xml version="1.0" encoding="utf-8"?>
 <p:presentation xmlns:p="http://schemas.openxmlformats.org/presentationml/2006/main">
   <p:sldMasterIdLst>
-    <p:sldMasterId xmlns:r="http://schemas.openxmlformats.org/officeDocument/2006/relationships" id="2147483648" r:id="R958b8892ee77453e"/>
+    <p:sldMasterId xmlns:r="http://schemas.openxmlformats.org/officeDocument/2006/relationships" id="2147483648" r:id="R612e97853b584c1a"/>
   </p:sldMasterIdLst>
   <p:notesMasterIdLst>
-    <p:notesMasterId xmlns:r="http://schemas.openxmlformats.org/officeDocument/2006/relationships" r:id="R9001a06c910c4208"/>
+    <p:notesMasterId xmlns:r="http://schemas.openxmlformats.org/officeDocument/2006/relationships" r:id="R5a3676db1d4543b3"/>
   </p:notesMasterIdLst>
   <p:sldIdLst>
-    <p:sldId xmlns:r="http://schemas.openxmlformats.org/officeDocument/2006/relationships" id="256" r:id="R404785034b494dbe"/>
-    <p:sldId xmlns:r="http://schemas.openxmlformats.org/officeDocument/2006/relationships" id="257" r:id="R597e053c329b474c"/>
-    <p:sldId xmlns:r="http://schemas.openxmlformats.org/officeDocument/2006/relationships" id="258" r:id="R519f6f5856824356"/>
-    <p:sldId xmlns:r="http://schemas.openxmlformats.org/officeDocument/2006/relationships" id="259" r:id="R60fb8554c09a492f"/>
-    <p:sldId xmlns:r="http://schemas.openxmlformats.org/officeDocument/2006/relationships" id="260" r:id="Ra4f8787377204ec9"/>
-    <p:sldId xmlns:r="http://schemas.openxmlformats.org/officeDocument/2006/relationships" id="261" r:id="R1a34338d3fec4d1c"/>
-    <p:sldId xmlns:r="http://schemas.openxmlformats.org/officeDocument/2006/relationships" id="262" r:id="R7f7f2041adfe494a"/>
-    <p:sldId xmlns:r="http://schemas.openxmlformats.org/officeDocument/2006/relationships" id="263" r:id="R4f0d10f4a7444ee4"/>
-    <p:sldId xmlns:r="http://schemas.openxmlformats.org/officeDocument/2006/relationships" id="264" r:id="R6a47bb7f75814f37"/>
-    <p:sldId xmlns:r="http://schemas.openxmlformats.org/officeDocument/2006/relationships" id="265" r:id="Rb1d44adeb6504a9a"/>
-    <p:sldId xmlns:r="http://schemas.openxmlformats.org/officeDocument/2006/relationships" id="266" r:id="Rd3830f22cdd9485b"/>
-    <p:sldId xmlns:r="http://schemas.openxmlformats.org/officeDocument/2006/relationships" id="267" r:id="R348e3556ce0d4e62"/>
-    <p:sldId xmlns:r="http://schemas.openxmlformats.org/officeDocument/2006/relationships" id="268" r:id="Rc26a191dfb334a8e"/>
-    <p:sldId xmlns:r="http://schemas.openxmlformats.org/officeDocument/2006/relationships" id="269" r:id="Rc701153310fb41d2"/>
-    <p:sldId xmlns:r="http://schemas.openxmlformats.org/officeDocument/2006/relationships" id="270" r:id="Raee41de5f5a14746"/>
-    <p:sldId xmlns:r="http://schemas.openxmlformats.org/officeDocument/2006/relationships" id="271" r:id="R2d2fa32df57c4b57"/>
-    <p:sldId xmlns:r="http://schemas.openxmlformats.org/officeDocument/2006/relationships" id="272" r:id="R83278f0621f846e3"/>
+    <p:sldId xmlns:r="http://schemas.openxmlformats.org/officeDocument/2006/relationships" id="256" r:id="R147380ca958940b4"/>
+    <p:sldId xmlns:r="http://schemas.openxmlformats.org/officeDocument/2006/relationships" id="257" r:id="R2ac0d7db07c94ea6"/>
+    <p:sldId xmlns:r="http://schemas.openxmlformats.org/officeDocument/2006/relationships" id="258" r:id="R8b55a9291cca433e"/>
+    <p:sldId xmlns:r="http://schemas.openxmlformats.org/officeDocument/2006/relationships" id="259" r:id="Rbb21d053ceff4876"/>
+    <p:sldId xmlns:r="http://schemas.openxmlformats.org/officeDocument/2006/relationships" id="260" r:id="R92d4fc021f7442ab"/>
+    <p:sldId xmlns:r="http://schemas.openxmlformats.org/officeDocument/2006/relationships" id="261" r:id="R625dfd8c92e84702"/>
+    <p:sldId xmlns:r="http://schemas.openxmlformats.org/officeDocument/2006/relationships" id="262" r:id="Rf1ecee871f0c429f"/>
+    <p:sldId xmlns:r="http://schemas.openxmlformats.org/officeDocument/2006/relationships" id="263" r:id="R04b3891195b3494e"/>
+    <p:sldId xmlns:r="http://schemas.openxmlformats.org/officeDocument/2006/relationships" id="264" r:id="R1dbfd8bc2f7e4bec"/>
+    <p:sldId xmlns:r="http://schemas.openxmlformats.org/officeDocument/2006/relationships" id="265" r:id="R0367e1aea6384c6d"/>
+    <p:sldId xmlns:r="http://schemas.openxmlformats.org/officeDocument/2006/relationships" id="266" r:id="R3feb705671a244a0"/>
+    <p:sldId xmlns:r="http://schemas.openxmlformats.org/officeDocument/2006/relationships" id="267" r:id="Radf90ef106374744"/>
+    <p:sldId xmlns:r="http://schemas.openxmlformats.org/officeDocument/2006/relationships" id="268" r:id="R8521f0030378433a"/>
+    <p:sldId xmlns:r="http://schemas.openxmlformats.org/officeDocument/2006/relationships" id="269" r:id="R91491cf592204429"/>
+    <p:sldId xmlns:r="http://schemas.openxmlformats.org/officeDocument/2006/relationships" id="270" r:id="Ra6fd3851f4c54203"/>
+    <p:sldId xmlns:r="http://schemas.openxmlformats.org/officeDocument/2006/relationships" id="271" r:id="Rfca05566c78242fb"/>
+    <p:sldId xmlns:r="http://schemas.openxmlformats.org/officeDocument/2006/relationships" id="272" r:id="Rfba509f8660f4d59"/>
   </p:sldIdLst>
   <p:sldSz cx="15240000" cy="8572500"/>
   <p:notesSz cx="6858000" cy="9144000"/>
@@ -1625,7 +1625,7 @@
           <p:cNvPr id="3" name="Title">
             <a:extLst xmlns:a="http://schemas.openxmlformats.org/drawingml/2006/main">
               <a:ext uri="{FF2B5EF4-FFF2-40B4-BE49-F238E27FC236}">
-                <a16:creationId xmlns:a16="http://schemas.microsoft.com/office/drawing/2014/main" id="{E285ED1C-B12E-4AAB-9A37-E73889D36DBF}"/>
+                <a16:creationId xmlns:a16="http://schemas.microsoft.com/office/drawing/2014/main" id="{F4F2BFF0-65CA-4207-A194-D376669D6FBC}"/>
               </a:ext>
             </a:extLst>
           </p:cNvPr>
@@ -1782,7 +1782,7 @@
           <p:cNvPr id="2" name="Subtitle">
             <a:extLst xmlns:a="http://schemas.openxmlformats.org/drawingml/2006/main">
               <a:ext uri="{FF2B5EF4-FFF2-40B4-BE49-F238E27FC236}">
-                <a16:creationId xmlns:a16="http://schemas.microsoft.com/office/drawing/2014/main" id="{CF3545E8-025E-4D7C-9852-C33D2E847190}"/>
+                <a16:creationId xmlns:a16="http://schemas.microsoft.com/office/drawing/2014/main" id="{C65469C2-9F7F-4FCC-9B0E-1ED63261CE1A}"/>
               </a:ext>
             </a:extLst>
           </p:cNvPr>
@@ -1956,7 +1956,7 @@
           <p:cNvPr id="2" name="Section title">
             <a:extLst xmlns:a="http://schemas.openxmlformats.org/drawingml/2006/main">
               <a:ext uri="{FF2B5EF4-FFF2-40B4-BE49-F238E27FC236}">
-                <a16:creationId xmlns:a16="http://schemas.microsoft.com/office/drawing/2014/main" id="{C5BF9AA3-8A77-4B2B-9E34-800D70BE0DC7}"/>
+                <a16:creationId xmlns:a16="http://schemas.microsoft.com/office/drawing/2014/main" id="{607845E5-B18A-4829-8700-00812F3C3EFF}"/>
               </a:ext>
             </a:extLst>
           </p:cNvPr>
@@ -2130,7 +2130,7 @@
           <p:cNvPr id="3" name="Title">
             <a:extLst xmlns:a="http://schemas.openxmlformats.org/drawingml/2006/main">
               <a:ext uri="{FF2B5EF4-FFF2-40B4-BE49-F238E27FC236}">
-                <a16:creationId xmlns:a16="http://schemas.microsoft.com/office/drawing/2014/main" id="{755322D7-1E07-4833-A195-378F95DAC913}"/>
+                <a16:creationId xmlns:a16="http://schemas.microsoft.com/office/drawing/2014/main" id="{A581B564-2031-454B-A05D-72A1188C6C8B}"/>
               </a:ext>
             </a:extLst>
           </p:cNvPr>
@@ -2287,7 +2287,7 @@
           <p:cNvPr id="2" name="Body">
             <a:extLst xmlns:a="http://schemas.openxmlformats.org/drawingml/2006/main">
               <a:ext uri="{FF2B5EF4-FFF2-40B4-BE49-F238E27FC236}">
-                <a16:creationId xmlns:a16="http://schemas.microsoft.com/office/drawing/2014/main" id="{0A2ABFA7-3497-4C9E-B560-58E14FAE17E8}"/>
+                <a16:creationId xmlns:a16="http://schemas.microsoft.com/office/drawing/2014/main" id="{360BA45F-B220-4EF7-81C6-34C6A429BCAA}"/>
               </a:ext>
             </a:extLst>
           </p:cNvPr>
@@ -2461,7 +2461,7 @@
           <p:cNvPr id="4" name="Title">
             <a:extLst xmlns:a="http://schemas.openxmlformats.org/drawingml/2006/main">
               <a:ext uri="{FF2B5EF4-FFF2-40B4-BE49-F238E27FC236}">
-                <a16:creationId xmlns:a16="http://schemas.microsoft.com/office/drawing/2014/main" id="{F51EB729-6149-4F89-816A-0FD6AE2F483D}"/>
+                <a16:creationId xmlns:a16="http://schemas.microsoft.com/office/drawing/2014/main" id="{2F90600B-7B06-4C82-B623-64EA44EE80F1}"/>
               </a:ext>
             </a:extLst>
           </p:cNvPr>
@@ -2618,7 +2618,7 @@
           <p:cNvPr id="2" name="Left column">
             <a:extLst xmlns:a="http://schemas.openxmlformats.org/drawingml/2006/main">
               <a:ext uri="{FF2B5EF4-FFF2-40B4-BE49-F238E27FC236}">
-                <a16:creationId xmlns:a16="http://schemas.microsoft.com/office/drawing/2014/main" id="{2E1529AF-AD5D-45C2-91D1-7E20CDA52C89}"/>
+                <a16:creationId xmlns:a16="http://schemas.microsoft.com/office/drawing/2014/main" id="{9A8050DC-9937-4913-88BF-9D20BDBE4280}"/>
               </a:ext>
             </a:extLst>
           </p:cNvPr>
@@ -2775,7 +2775,7 @@
           <p:cNvPr id="3" name="Right column">
             <a:extLst xmlns:a="http://schemas.openxmlformats.org/drawingml/2006/main">
               <a:ext uri="{FF2B5EF4-FFF2-40B4-BE49-F238E27FC236}">
-                <a16:creationId xmlns:a16="http://schemas.microsoft.com/office/drawing/2014/main" id="{2BA4DE0C-22C6-4234-9EC3-63CEE864F929}"/>
+                <a16:creationId xmlns:a16="http://schemas.microsoft.com/office/drawing/2014/main" id="{84CE9658-3297-4842-BCEA-1667B4E0D7A6}"/>
               </a:ext>
             </a:extLst>
           </p:cNvPr>
@@ -2949,7 +2949,7 @@
           <p:cNvPr id="3" name="Title">
             <a:extLst xmlns:a="http://schemas.openxmlformats.org/drawingml/2006/main">
               <a:ext uri="{FF2B5EF4-FFF2-40B4-BE49-F238E27FC236}">
-                <a16:creationId xmlns:a16="http://schemas.microsoft.com/office/drawing/2014/main" id="{54418798-72CB-4979-9BD4-75A6FF725D2E}"/>
+                <a16:creationId xmlns:a16="http://schemas.microsoft.com/office/drawing/2014/main" id="{96364A1B-C70B-4B45-9A1B-4498ABF7EFD0}"/>
               </a:ext>
             </a:extLst>
           </p:cNvPr>
@@ -3106,7 +3106,7 @@
           <p:cNvPr id="2" name="Left column">
             <a:extLst xmlns:a="http://schemas.openxmlformats.org/drawingml/2006/main">
               <a:ext uri="{FF2B5EF4-FFF2-40B4-BE49-F238E27FC236}">
-                <a16:creationId xmlns:a16="http://schemas.microsoft.com/office/drawing/2014/main" id="{28F3FE72-8AA0-479C-B641-8D0DCCDF62F0}"/>
+                <a16:creationId xmlns:a16="http://schemas.microsoft.com/office/drawing/2014/main" id="{034A73CD-A392-4CA4-A399-4A72CE7BAAF3}"/>
               </a:ext>
             </a:extLst>
           </p:cNvPr>
@@ -3301,12 +3301,12 @@
   </p:cSld>
   <p:clrMap bg1="lt1" tx1="dk1" bg2="lt2" tx2="dk2" accent1="accent1" accent2="accent2" accent3="accent3" accent4="accent4" accent5="accent5" accent6="accent6" hlink="hlink" folHlink="folHlink"/>
   <p:sldLayoutIdLst>
-    <p:sldLayoutId xmlns:r="http://schemas.openxmlformats.org/officeDocument/2006/relationships" id="2147483649" r:id="R60586e7a8f664c5a"/>
-    <p:sldLayoutId xmlns:r="http://schemas.openxmlformats.org/officeDocument/2006/relationships" id="2147483650" r:id="Rfad1a9aa225a4eb4"/>
-    <p:sldLayoutId xmlns:r="http://schemas.openxmlformats.org/officeDocument/2006/relationships" id="2147483651" r:id="R8925cd41012b43da"/>
-    <p:sldLayoutId xmlns:r="http://schemas.openxmlformats.org/officeDocument/2006/relationships" id="2147483652" r:id="R179e9305266d48c3"/>
-    <p:sldLayoutId xmlns:r="http://schemas.openxmlformats.org/officeDocument/2006/relationships" id="2147483653" r:id="Rb306d3be2f664771"/>
-    <p:sldLayoutId xmlns:r="http://schemas.openxmlformats.org/officeDocument/2006/relationships" id="2147483654" r:id="Rdcc880b46e6a4e7c"/>
+    <p:sldLayoutId xmlns:r="http://schemas.openxmlformats.org/officeDocument/2006/relationships" id="2147483649" r:id="R7bc3b32f0a734e09"/>
+    <p:sldLayoutId xmlns:r="http://schemas.openxmlformats.org/officeDocument/2006/relationships" id="2147483650" r:id="R3302b025879e4e9e"/>
+    <p:sldLayoutId xmlns:r="http://schemas.openxmlformats.org/officeDocument/2006/relationships" id="2147483651" r:id="Rf7de35153d3b4140"/>
+    <p:sldLayoutId xmlns:r="http://schemas.openxmlformats.org/officeDocument/2006/relationships" id="2147483652" r:id="R465a79976a94482b"/>
+    <p:sldLayoutId xmlns:r="http://schemas.openxmlformats.org/officeDocument/2006/relationships" id="2147483653" r:id="R7ada06eb958e4c63"/>
+    <p:sldLayoutId xmlns:r="http://schemas.openxmlformats.org/officeDocument/2006/relationships" id="2147483654" r:id="R7b98b530116a4902"/>
   </p:sldLayoutIdLst>
   <p:txStyles>
     <p:titleStyle>
@@ -3839,7 +3839,7 @@
     <p:bg>
       <p:bgPr>
         <a:solidFill xmlns:a="http://schemas.openxmlformats.org/drawingml/2006/main">
-          <a:srgbClr val="BD9A78"/>
+          <a:srgbClr val="C6A27F"/>
         </a:solidFill>
       </p:bgPr>
     </p:bg>
@@ -3857,7 +3857,7 @@
           <p:cNvPr id="8" name="">
             <a:extLst xmlns:a="http://schemas.openxmlformats.org/drawingml/2006/main">
               <a:ext uri="{FF2B5EF4-FFF2-40B4-BE49-F238E27FC236}">
-                <a16:creationId xmlns:a16="http://schemas.microsoft.com/office/drawing/2014/main" id="{ECBB14E1-840B-4035-89CB-255CB762E026}"/>
+                <a16:creationId xmlns:a16="http://schemas.microsoft.com/office/drawing/2014/main" id="{8098ECE6-644D-4197-8685-84252C3B9BE3}"/>
               </a:ext>
             </a:extLst>
           </p:cNvPr>
@@ -3885,7 +3885,7 @@
             <a:defPPr>
               <a:defRPr sz="6450" b="1">
                 <a:solidFill>
-                  <a:srgbClr val="202433"/>
+                  <a:srgbClr val="222636"/>
                 </a:solidFill>
                 <a:latin typeface="Arial"/>
                 <a:ea typeface="Arial"/>
@@ -3897,7 +3897,7 @@
             <a:pPr>
               <a:defRPr sz="6450" b="1">
                 <a:solidFill>
-                  <a:srgbClr val="202433"/>
+                  <a:srgbClr val="222636"/>
                 </a:solidFill>
                 <a:latin typeface="Arial"/>
                 <a:ea typeface="Arial"/>
@@ -3907,7 +3907,7 @@
             <a:r>
               <a:rPr sz="6450" b="1">
                 <a:solidFill>
-                  <a:srgbClr val="202433"/>
+                  <a:srgbClr val="222636"/>
                 </a:solidFill>
                 <a:latin typeface="Arial"/>
                 <a:ea typeface="Arial"/>
@@ -3923,7 +3923,7 @@
           <p:cNvPr id="2" name="">
             <a:extLst xmlns:a="http://schemas.openxmlformats.org/drawingml/2006/main">
               <a:ext uri="{FF2B5EF4-FFF2-40B4-BE49-F238E27FC236}">
-                <a16:creationId xmlns:a16="http://schemas.microsoft.com/office/drawing/2014/main" id="{1B0BB117-1C39-4ED9-BF2B-652D0B7C2103}"/>
+                <a16:creationId xmlns:a16="http://schemas.microsoft.com/office/drawing/2014/main" id="{236DF83B-772B-4A44-9588-52A6F25A94AF}"/>
               </a:ext>
             </a:extLst>
           </p:cNvPr>
@@ -3951,7 +3951,7 @@
             <a:defPPr>
               <a:defRPr sz="2700" b="0">
                 <a:solidFill>
-                  <a:srgbClr val="202433"/>
+                  <a:srgbClr val="222636"/>
                 </a:solidFill>
                 <a:latin typeface="Arial"/>
                 <a:ea typeface="Arial"/>
@@ -3963,7 +3963,7 @@
             <a:pPr>
               <a:defRPr sz="2700" b="0">
                 <a:solidFill>
-                  <a:srgbClr val="202433"/>
+                  <a:srgbClr val="222636"/>
                 </a:solidFill>
                 <a:latin typeface="Arial"/>
                 <a:ea typeface="Arial"/>
@@ -3973,7 +3973,7 @@
             <a:r>
               <a:rPr sz="2700" b="0">
                 <a:solidFill>
-                  <a:srgbClr val="202433"/>
+                  <a:srgbClr val="222636"/>
                 </a:solidFill>
                 <a:latin typeface="Arial"/>
                 <a:ea typeface="Arial"/>
@@ -3989,7 +3989,7 @@
           <p:cNvPr id="3" name="">
             <a:extLst xmlns:a="http://schemas.openxmlformats.org/drawingml/2006/main">
               <a:ext uri="{FF2B5EF4-FFF2-40B4-BE49-F238E27FC236}">
-                <a16:creationId xmlns:a16="http://schemas.microsoft.com/office/drawing/2014/main" id="{0836ED1A-E5C4-4D8E-A70D-5C82997F528F}"/>
+                <a16:creationId xmlns:a16="http://schemas.microsoft.com/office/drawing/2014/main" id="{A330E97E-502A-4103-8092-A397AFECBABB}"/>
               </a:ext>
             </a:extLst>
           </p:cNvPr>
@@ -4017,7 +4017,7 @@
             <a:defPPr>
               <a:defRPr sz="2400" b="1">
                 <a:solidFill>
-                  <a:srgbClr val="435063"/>
+                  <a:srgbClr val="434F61"/>
                 </a:solidFill>
                 <a:latin typeface="Arial"/>
                 <a:ea typeface="Arial"/>
@@ -4029,7 +4029,7 @@
             <a:pPr>
               <a:defRPr sz="2400" b="1">
                 <a:solidFill>
-                  <a:srgbClr val="435063"/>
+                  <a:srgbClr val="434F61"/>
                 </a:solidFill>
                 <a:latin typeface="Arial"/>
                 <a:ea typeface="Arial"/>
@@ -4039,7 +4039,7 @@
             <a:r>
               <a:rPr sz="2400" b="1">
                 <a:solidFill>
-                  <a:srgbClr val="435063"/>
+                  <a:srgbClr val="434F61"/>
                 </a:solidFill>
                 <a:latin typeface="Arial"/>
                 <a:ea typeface="Arial"/>
@@ -4055,7 +4055,7 @@
           <p:cNvPr id="4" name="">
             <a:extLst xmlns:a="http://schemas.openxmlformats.org/drawingml/2006/main">
               <a:ext uri="{FF2B5EF4-FFF2-40B4-BE49-F238E27FC236}">
-                <a16:creationId xmlns:a16="http://schemas.microsoft.com/office/drawing/2014/main" id="{EB080C56-CC88-4F4E-9C33-A804FDB6CCA6}"/>
+                <a16:creationId xmlns:a16="http://schemas.microsoft.com/office/drawing/2014/main" id="{3377F67F-5BEC-480F-A57A-C4E954FA7941}"/>
               </a:ext>
             </a:extLst>
           </p:cNvPr>
@@ -4083,7 +4083,7 @@
             <a:defPPr>
               <a:defRPr sz="2400" b="0">
                 <a:solidFill>
-                  <a:srgbClr val="202433"/>
+                  <a:srgbClr val="222636"/>
                 </a:solidFill>
                 <a:latin typeface="Arial"/>
                 <a:ea typeface="Arial"/>
@@ -4095,7 +4095,7 @@
             <a:pPr>
               <a:defRPr sz="2400" b="0">
                 <a:solidFill>
-                  <a:srgbClr val="202433"/>
+                  <a:srgbClr val="222636"/>
                 </a:solidFill>
                 <a:latin typeface="Arial"/>
                 <a:ea typeface="Arial"/>
@@ -4105,7 +4105,7 @@
             <a:r>
               <a:rPr sz="2400" b="0">
                 <a:solidFill>
-                  <a:srgbClr val="202433"/>
+                  <a:srgbClr val="222636"/>
                 </a:solidFill>
                 <a:latin typeface="Arial"/>
                 <a:ea typeface="Arial"/>
@@ -4121,7 +4121,7 @@
           <p:cNvPr id="5" name="">
             <a:extLst xmlns:a="http://schemas.openxmlformats.org/drawingml/2006/main">
               <a:ext uri="{FF2B5EF4-FFF2-40B4-BE49-F238E27FC236}">
-                <a16:creationId xmlns:a16="http://schemas.microsoft.com/office/drawing/2014/main" id="{C9948396-9235-4320-8AB1-385BEA10D48D}"/>
+                <a16:creationId xmlns:a16="http://schemas.microsoft.com/office/drawing/2014/main" id="{660DA4BE-8357-4694-B6EE-42C66988BC8A}"/>
               </a:ext>
             </a:extLst>
           </p:cNvPr>
@@ -4149,7 +4149,7 @@
             <a:defPPr>
               <a:defRPr sz="2400" b="1">
                 <a:solidFill>
-                  <a:srgbClr val="435063"/>
+                  <a:srgbClr val="434F61"/>
                 </a:solidFill>
                 <a:latin typeface="Arial"/>
                 <a:ea typeface="Arial"/>
@@ -4161,7 +4161,7 @@
             <a:pPr>
               <a:defRPr sz="2400" b="1">
                 <a:solidFill>
-                  <a:srgbClr val="435063"/>
+                  <a:srgbClr val="434F61"/>
                 </a:solidFill>
                 <a:latin typeface="Arial"/>
                 <a:ea typeface="Arial"/>
@@ -4171,7 +4171,7 @@
             <a:r>
               <a:rPr sz="2400" b="1">
                 <a:solidFill>
-                  <a:srgbClr val="435063"/>
+                  <a:srgbClr val="434F61"/>
                 </a:solidFill>
                 <a:latin typeface="Arial"/>
                 <a:ea typeface="Arial"/>
@@ -4187,7 +4187,7 @@
           <p:cNvPr id="6" name="">
             <a:extLst xmlns:a="http://schemas.openxmlformats.org/drawingml/2006/main">
               <a:ext uri="{FF2B5EF4-FFF2-40B4-BE49-F238E27FC236}">
-                <a16:creationId xmlns:a16="http://schemas.microsoft.com/office/drawing/2014/main" id="{0E86421A-CE97-40C5-8969-6C7BF05D0557}"/>
+                <a16:creationId xmlns:a16="http://schemas.microsoft.com/office/drawing/2014/main" id="{CD77920B-A880-4673-AF2C-9F6730A42926}"/>
               </a:ext>
             </a:extLst>
           </p:cNvPr>
@@ -4215,7 +4215,7 @@
             <a:defPPr>
               <a:defRPr sz="2400" b="0">
                 <a:solidFill>
-                  <a:srgbClr val="202433"/>
+                  <a:srgbClr val="222636"/>
                 </a:solidFill>
                 <a:latin typeface="Arial"/>
                 <a:ea typeface="Arial"/>
@@ -4227,7 +4227,7 @@
             <a:pPr>
               <a:defRPr sz="2400" b="0">
                 <a:solidFill>
-                  <a:srgbClr val="202433"/>
+                  <a:srgbClr val="222636"/>
                 </a:solidFill>
                 <a:latin typeface="Arial"/>
                 <a:ea typeface="Arial"/>
@@ -4237,7 +4237,7 @@
             <a:r>
               <a:rPr sz="2400" b="0">
                 <a:solidFill>
-                  <a:srgbClr val="202433"/>
+                  <a:srgbClr val="222636"/>
                 </a:solidFill>
                 <a:latin typeface="Arial"/>
                 <a:ea typeface="Arial"/>
@@ -4253,7 +4253,7 @@
           <p:cNvPr id="7" name="">
             <a:extLst xmlns:a="http://schemas.openxmlformats.org/drawingml/2006/main">
               <a:ext uri="{FF2B5EF4-FFF2-40B4-BE49-F238E27FC236}">
-                <a16:creationId xmlns:a16="http://schemas.microsoft.com/office/drawing/2014/main" id="{66750493-3EA4-4C1C-B03F-131C95DDCE44}"/>
+                <a16:creationId xmlns:a16="http://schemas.microsoft.com/office/drawing/2014/main" id="{197AF3B9-A84D-4B03-943F-81A4A255D9F6}"/>
               </a:ext>
             </a:extLst>
           </p:cNvPr>
@@ -4281,7 +4281,7 @@
             <a:defPPr>
               <a:defRPr sz="1425" b="0">
                 <a:solidFill>
-                  <a:srgbClr val="435063"/>
+                  <a:srgbClr val="434F61"/>
                 </a:solidFill>
                 <a:latin typeface="Arial"/>
                 <a:ea typeface="Arial"/>
@@ -4293,7 +4293,7 @@
             <a:pPr>
               <a:defRPr sz="1425" b="0">
                 <a:solidFill>
-                  <a:srgbClr val="435063"/>
+                  <a:srgbClr val="434F61"/>
                 </a:solidFill>
                 <a:latin typeface="Arial"/>
                 <a:ea typeface="Arial"/>
@@ -4303,7 +4303,7 @@
             <a:r>
               <a:rPr sz="1425" b="0">
                 <a:solidFill>
-                  <a:srgbClr val="435063"/>
+                  <a:srgbClr val="434F61"/>
                 </a:solidFill>
                 <a:latin typeface="Arial"/>
                 <a:ea typeface="Arial"/>
@@ -4317,7 +4317,7 @@
     </p:spTree>
     <p:extLst>
       <p:ext uri="{BB962C8B-B14F-4D97-AF65-F5344CB8AC3E}">
-        <p14:creationId xmlns:p14="http://schemas.microsoft.com/office/powerpoint/2010/main" val="908139712"/>
+        <p14:creationId xmlns:p14="http://schemas.microsoft.com/office/powerpoint/2010/main" val="929305029"/>
       </p:ext>
     </p:extLst>
   </p:cSld>
@@ -4330,7 +4330,7 @@
     <p:bg>
       <p:bgPr>
         <a:solidFill xmlns:a="http://schemas.openxmlformats.org/drawingml/2006/main">
-          <a:srgbClr val="202433"/>
+          <a:srgbClr val="222636"/>
         </a:solidFill>
       </p:bgPr>
     </p:bg>
@@ -4348,7 +4348,7 @@
           <p:cNvPr id="5" name="">
             <a:extLst xmlns:a="http://schemas.openxmlformats.org/drawingml/2006/main">
               <a:ext uri="{FF2B5EF4-FFF2-40B4-BE49-F238E27FC236}">
-                <a16:creationId xmlns:a16="http://schemas.microsoft.com/office/drawing/2014/main" id="{5E3D2467-20FB-4AB1-B633-A2BE358B4F94}"/>
+                <a16:creationId xmlns:a16="http://schemas.microsoft.com/office/drawing/2014/main" id="{AF4DE956-3674-4012-BEB6-567159AC01EF}"/>
               </a:ext>
             </a:extLst>
           </p:cNvPr>
@@ -4376,7 +4376,7 @@
             <a:defPPr>
               <a:defRPr sz="4350" b="1">
                 <a:solidFill>
-                  <a:srgbClr val="BD9A78"/>
+                  <a:srgbClr val="C6A27F"/>
                 </a:solidFill>
                 <a:latin typeface="Arial"/>
                 <a:ea typeface="Arial"/>
@@ -4388,7 +4388,7 @@
             <a:pPr>
               <a:defRPr sz="4350" b="1">
                 <a:solidFill>
-                  <a:srgbClr val="BD9A78"/>
+                  <a:srgbClr val="C6A27F"/>
                 </a:solidFill>
                 <a:latin typeface="Arial"/>
                 <a:ea typeface="Arial"/>
@@ -4398,7 +4398,7 @@
             <a:r>
               <a:rPr sz="4350" b="1">
                 <a:solidFill>
-                  <a:srgbClr val="BD9A78"/>
+                  <a:srgbClr val="C6A27F"/>
                 </a:solidFill>
                 <a:latin typeface="Arial"/>
                 <a:ea typeface="Arial"/>
@@ -4414,7 +4414,7 @@
           <p:cNvPr id="2" name="">
             <a:extLst xmlns:a="http://schemas.openxmlformats.org/drawingml/2006/main">
               <a:ext uri="{FF2B5EF4-FFF2-40B4-BE49-F238E27FC236}">
-                <a16:creationId xmlns:a16="http://schemas.microsoft.com/office/drawing/2014/main" id="{B1CA4073-4A1E-45FC-8E3E-D69BC58CBFB8}"/>
+                <a16:creationId xmlns:a16="http://schemas.microsoft.com/office/drawing/2014/main" id="{113B450C-01CA-47B0-941D-69209FAF1035}"/>
               </a:ext>
             </a:extLst>
           </p:cNvPr>
@@ -4443,7 +4443,7 @@
                       <a:r>
                         <a:rPr sz="2175" b="1">
                           <a:solidFill>
-                            <a:srgbClr val="F3EEE8"/>
+                            <a:srgbClr val="F1EEE8"/>
                           </a:solidFill>
                           <a:latin typeface="Arial"/>
                           <a:ea typeface="Arial"/>
@@ -4456,30 +4456,30 @@
                   <a:tcPr marL="91440" marR="91440" marT="45720" marB="45720">
                     <a:lnL w="4763">
                       <a:solidFill>
-                        <a:srgbClr val="435063"/>
+                        <a:srgbClr val="434F61"/>
                       </a:solidFill>
                       <a:prstDash val="solid"/>
                     </a:lnL>
                     <a:lnR w="4763">
                       <a:solidFill>
-                        <a:srgbClr val="435063"/>
+                        <a:srgbClr val="434F61"/>
                       </a:solidFill>
                       <a:prstDash val="solid"/>
                     </a:lnR>
                     <a:lnT w="4763">
                       <a:solidFill>
-                        <a:srgbClr val="435063"/>
+                        <a:srgbClr val="434F61"/>
                       </a:solidFill>
                       <a:prstDash val="solid"/>
                     </a:lnT>
                     <a:lnB w="4763">
                       <a:solidFill>
-                        <a:srgbClr val="435063"/>
+                        <a:srgbClr val="434F61"/>
                       </a:solidFill>
                       <a:prstDash val="solid"/>
                     </a:lnB>
                     <a:solidFill>
-                      <a:srgbClr val="435063"/>
+                      <a:srgbClr val="434F61"/>
                     </a:solidFill>
                   </a:tcPr>
                 </a:tc>
@@ -4491,7 +4491,7 @@
                       <a:r>
                         <a:rPr sz="2175" b="1">
                           <a:solidFill>
-                            <a:srgbClr val="F3EEE8"/>
+                            <a:srgbClr val="F1EEE8"/>
                           </a:solidFill>
                           <a:latin typeface="Arial"/>
                           <a:ea typeface="Arial"/>
@@ -4504,24 +4504,24 @@
                   <a:tcPr marL="91440" marR="91440" marT="45720" marB="45720">
                     <a:lnR w="4763">
                       <a:solidFill>
-                        <a:srgbClr val="435063"/>
+                        <a:srgbClr val="434F61"/>
                       </a:solidFill>
                       <a:prstDash val="solid"/>
                     </a:lnR>
                     <a:lnT w="4763">
                       <a:solidFill>
-                        <a:srgbClr val="435063"/>
+                        <a:srgbClr val="434F61"/>
                       </a:solidFill>
                       <a:prstDash val="solid"/>
                     </a:lnT>
                     <a:lnB w="4763">
                       <a:solidFill>
-                        <a:srgbClr val="435063"/>
+                        <a:srgbClr val="434F61"/>
                       </a:solidFill>
                       <a:prstDash val="solid"/>
                     </a:lnB>
                     <a:solidFill>
-                      <a:srgbClr val="435063"/>
+                      <a:srgbClr val="434F61"/>
                     </a:solidFill>
                   </a:tcPr>
                 </a:tc>
@@ -4533,7 +4533,7 @@
                       <a:r>
                         <a:rPr sz="2175" b="1">
                           <a:solidFill>
-                            <a:srgbClr val="F3EEE8"/>
+                            <a:srgbClr val="F1EEE8"/>
                           </a:solidFill>
                           <a:latin typeface="Arial"/>
                           <a:ea typeface="Arial"/>
@@ -4546,24 +4546,24 @@
                   <a:tcPr marL="91440" marR="91440" marT="45720" marB="45720">
                     <a:lnR w="4763">
                       <a:solidFill>
-                        <a:srgbClr val="435063"/>
+                        <a:srgbClr val="434F61"/>
                       </a:solidFill>
                       <a:prstDash val="solid"/>
                     </a:lnR>
                     <a:lnT w="4763">
                       <a:solidFill>
-                        <a:srgbClr val="435063"/>
+                        <a:srgbClr val="434F61"/>
                       </a:solidFill>
                       <a:prstDash val="solid"/>
                     </a:lnT>
                     <a:lnB w="4763">
                       <a:solidFill>
-                        <a:srgbClr val="435063"/>
+                        <a:srgbClr val="434F61"/>
                       </a:solidFill>
                       <a:prstDash val="solid"/>
                     </a:lnB>
                     <a:solidFill>
-                      <a:srgbClr val="435063"/>
+                      <a:srgbClr val="434F61"/>
                     </a:solidFill>
                   </a:tcPr>
                 </a:tc>
@@ -4577,7 +4577,7 @@
                       <a:r>
                         <a:rPr sz="2175" b="0">
                           <a:solidFill>
-                            <a:srgbClr val="BD9A78"/>
+                            <a:srgbClr val="C6A27F"/>
                           </a:solidFill>
                           <a:latin typeface="Arial"/>
                           <a:ea typeface="Arial"/>
@@ -4590,24 +4590,24 @@
                   <a:tcPr marL="91440" marR="91440" marT="45720" marB="45720">
                     <a:lnL w="4763">
                       <a:solidFill>
-                        <a:srgbClr val="435063"/>
+                        <a:srgbClr val="434F61"/>
                       </a:solidFill>
                       <a:prstDash val="solid"/>
                     </a:lnL>
                     <a:lnR w="4763">
                       <a:solidFill>
-                        <a:srgbClr val="435063"/>
+                        <a:srgbClr val="434F61"/>
                       </a:solidFill>
                       <a:prstDash val="solid"/>
                     </a:lnR>
                     <a:lnB w="4763">
                       <a:solidFill>
-                        <a:srgbClr val="435063"/>
+                        <a:srgbClr val="434F61"/>
                       </a:solidFill>
                       <a:prstDash val="solid"/>
                     </a:lnB>
                     <a:solidFill>
-                      <a:srgbClr val="202433"/>
+                      <a:srgbClr val="222636"/>
                     </a:solidFill>
                   </a:tcPr>
                 </a:tc>
@@ -4619,7 +4619,7 @@
                       <a:r>
                         <a:rPr sz="2175" b="0">
                           <a:solidFill>
-                            <a:srgbClr val="F3EEE8"/>
+                            <a:srgbClr val="F1EEE8"/>
                           </a:solidFill>
                           <a:latin typeface="Arial"/>
                           <a:ea typeface="Arial"/>
@@ -4632,18 +4632,18 @@
                   <a:tcPr marL="91440" marR="91440" marT="45720" marB="45720">
                     <a:lnR w="4763">
                       <a:solidFill>
-                        <a:srgbClr val="435063"/>
+                        <a:srgbClr val="434F61"/>
                       </a:solidFill>
                       <a:prstDash val="solid"/>
                     </a:lnR>
                     <a:lnB w="4763">
                       <a:solidFill>
-                        <a:srgbClr val="435063"/>
+                        <a:srgbClr val="434F61"/>
                       </a:solidFill>
                       <a:prstDash val="solid"/>
                     </a:lnB>
                     <a:solidFill>
-                      <a:srgbClr val="202433"/>
+                      <a:srgbClr val="222636"/>
                     </a:solidFill>
                   </a:tcPr>
                 </a:tc>
@@ -4655,7 +4655,7 @@
                       <a:r>
                         <a:rPr sz="2175" b="0">
                           <a:solidFill>
-                            <a:srgbClr val="F3EEE8"/>
+                            <a:srgbClr val="F1EEE8"/>
                           </a:solidFill>
                           <a:latin typeface="Arial"/>
                           <a:ea typeface="Arial"/>
@@ -4668,18 +4668,18 @@
                   <a:tcPr marL="91440" marR="91440" marT="45720" marB="45720">
                     <a:lnR w="4763">
                       <a:solidFill>
-                        <a:srgbClr val="435063"/>
+                        <a:srgbClr val="434F61"/>
                       </a:solidFill>
                       <a:prstDash val="solid"/>
                     </a:lnR>
                     <a:lnB w="4763">
                       <a:solidFill>
-                        <a:srgbClr val="435063"/>
+                        <a:srgbClr val="434F61"/>
                       </a:solidFill>
                       <a:prstDash val="solid"/>
                     </a:lnB>
                     <a:solidFill>
-                      <a:srgbClr val="202433"/>
+                      <a:srgbClr val="222636"/>
                     </a:solidFill>
                   </a:tcPr>
                 </a:tc>
@@ -4693,7 +4693,7 @@
                       <a:r>
                         <a:rPr sz="2175" b="0">
                           <a:solidFill>
-                            <a:srgbClr val="BD9A78"/>
+                            <a:srgbClr val="C6A27F"/>
                           </a:solidFill>
                           <a:latin typeface="Arial"/>
                           <a:ea typeface="Arial"/>
@@ -4706,24 +4706,24 @@
                   <a:tcPr marL="91440" marR="91440" marT="45720" marB="45720">
                     <a:lnL w="4763">
                       <a:solidFill>
-                        <a:srgbClr val="435063"/>
+                        <a:srgbClr val="434F61"/>
                       </a:solidFill>
                       <a:prstDash val="solid"/>
                     </a:lnL>
                     <a:lnR w="4763">
                       <a:solidFill>
-                        <a:srgbClr val="435063"/>
+                        <a:srgbClr val="434F61"/>
                       </a:solidFill>
                       <a:prstDash val="solid"/>
                     </a:lnR>
                     <a:lnB w="4763">
                       <a:solidFill>
-                        <a:srgbClr val="435063"/>
+                        <a:srgbClr val="434F61"/>
                       </a:solidFill>
                       <a:prstDash val="solid"/>
                     </a:lnB>
                     <a:solidFill>
-                      <a:srgbClr val="202433"/>
+                      <a:srgbClr val="222636"/>
                     </a:solidFill>
                   </a:tcPr>
                 </a:tc>
@@ -4735,7 +4735,7 @@
                       <a:r>
                         <a:rPr sz="2175" b="0">
                           <a:solidFill>
-                            <a:srgbClr val="F3EEE8"/>
+                            <a:srgbClr val="F1EEE8"/>
                           </a:solidFill>
                           <a:latin typeface="Arial"/>
                           <a:ea typeface="Arial"/>
@@ -4748,18 +4748,18 @@
                   <a:tcPr marL="91440" marR="91440" marT="45720" marB="45720">
                     <a:lnR w="4763">
                       <a:solidFill>
-                        <a:srgbClr val="435063"/>
+                        <a:srgbClr val="434F61"/>
                       </a:solidFill>
                       <a:prstDash val="solid"/>
                     </a:lnR>
                     <a:lnB w="4763">
                       <a:solidFill>
-                        <a:srgbClr val="435063"/>
+                        <a:srgbClr val="434F61"/>
                       </a:solidFill>
                       <a:prstDash val="solid"/>
                     </a:lnB>
                     <a:solidFill>
-                      <a:srgbClr val="202433"/>
+                      <a:srgbClr val="222636"/>
                     </a:solidFill>
                   </a:tcPr>
                 </a:tc>
@@ -4771,7 +4771,7 @@
                       <a:r>
                         <a:rPr sz="2175" b="0">
                           <a:solidFill>
-                            <a:srgbClr val="F3EEE8"/>
+                            <a:srgbClr val="F1EEE8"/>
                           </a:solidFill>
                           <a:latin typeface="Arial"/>
                           <a:ea typeface="Arial"/>
@@ -4784,18 +4784,18 @@
                   <a:tcPr marL="91440" marR="91440" marT="45720" marB="45720">
                     <a:lnR w="4763">
                       <a:solidFill>
-                        <a:srgbClr val="435063"/>
+                        <a:srgbClr val="434F61"/>
                       </a:solidFill>
                       <a:prstDash val="solid"/>
                     </a:lnR>
                     <a:lnB w="4763">
                       <a:solidFill>
-                        <a:srgbClr val="435063"/>
+                        <a:srgbClr val="434F61"/>
                       </a:solidFill>
                       <a:prstDash val="solid"/>
                     </a:lnB>
                     <a:solidFill>
-                      <a:srgbClr val="202433"/>
+                      <a:srgbClr val="222636"/>
                     </a:solidFill>
                   </a:tcPr>
                 </a:tc>
@@ -4809,7 +4809,7 @@
                       <a:r>
                         <a:rPr sz="2175" b="0">
                           <a:solidFill>
-                            <a:srgbClr val="BD9A78"/>
+                            <a:srgbClr val="C6A27F"/>
                           </a:solidFill>
                           <a:latin typeface="Arial"/>
                           <a:ea typeface="Arial"/>
@@ -4822,24 +4822,24 @@
                   <a:tcPr marL="91440" marR="91440" marT="45720" marB="45720">
                     <a:lnL w="4763">
                       <a:solidFill>
-                        <a:srgbClr val="435063"/>
+                        <a:srgbClr val="434F61"/>
                       </a:solidFill>
                       <a:prstDash val="solid"/>
                     </a:lnL>
                     <a:lnR w="4763">
                       <a:solidFill>
-                        <a:srgbClr val="435063"/>
+                        <a:srgbClr val="434F61"/>
                       </a:solidFill>
                       <a:prstDash val="solid"/>
                     </a:lnR>
                     <a:lnB w="4763">
                       <a:solidFill>
-                        <a:srgbClr val="435063"/>
+                        <a:srgbClr val="434F61"/>
                       </a:solidFill>
                       <a:prstDash val="solid"/>
                     </a:lnB>
                     <a:solidFill>
-                      <a:srgbClr val="202433"/>
+                      <a:srgbClr val="222636"/>
                     </a:solidFill>
                   </a:tcPr>
                 </a:tc>
@@ -4851,7 +4851,7 @@
                       <a:r>
                         <a:rPr sz="2175" b="0">
                           <a:solidFill>
-                            <a:srgbClr val="F3EEE8"/>
+                            <a:srgbClr val="F1EEE8"/>
                           </a:solidFill>
                           <a:latin typeface="Arial"/>
                           <a:ea typeface="Arial"/>
@@ -4864,18 +4864,18 @@
                   <a:tcPr marL="91440" marR="91440" marT="45720" marB="45720">
                     <a:lnR w="4763">
                       <a:solidFill>
-                        <a:srgbClr val="435063"/>
+                        <a:srgbClr val="434F61"/>
                       </a:solidFill>
                       <a:prstDash val="solid"/>
                     </a:lnR>
                     <a:lnB w="4763">
                       <a:solidFill>
-                        <a:srgbClr val="435063"/>
+                        <a:srgbClr val="434F61"/>
                       </a:solidFill>
                       <a:prstDash val="solid"/>
                     </a:lnB>
                     <a:solidFill>
-                      <a:srgbClr val="202433"/>
+                      <a:srgbClr val="222636"/>
                     </a:solidFill>
                   </a:tcPr>
                 </a:tc>
@@ -4887,7 +4887,7 @@
                       <a:r>
                         <a:rPr sz="2175" b="0">
                           <a:solidFill>
-                            <a:srgbClr val="F3EEE8"/>
+                            <a:srgbClr val="F1EEE8"/>
                           </a:solidFill>
                           <a:latin typeface="Arial"/>
                           <a:ea typeface="Arial"/>
@@ -4900,18 +4900,18 @@
                   <a:tcPr marL="91440" marR="91440" marT="45720" marB="45720">
                     <a:lnR w="4763">
                       <a:solidFill>
-                        <a:srgbClr val="435063"/>
+                        <a:srgbClr val="434F61"/>
                       </a:solidFill>
                       <a:prstDash val="solid"/>
                     </a:lnR>
                     <a:lnB w="4763">
                       <a:solidFill>
-                        <a:srgbClr val="435063"/>
+                        <a:srgbClr val="434F61"/>
                       </a:solidFill>
                       <a:prstDash val="solid"/>
                     </a:lnB>
                     <a:solidFill>
-                      <a:srgbClr val="202433"/>
+                      <a:srgbClr val="222636"/>
                     </a:solidFill>
                   </a:tcPr>
                 </a:tc>
@@ -4925,7 +4925,7 @@
                       <a:r>
                         <a:rPr sz="2175" b="0">
                           <a:solidFill>
-                            <a:srgbClr val="BD9A78"/>
+                            <a:srgbClr val="C6A27F"/>
                           </a:solidFill>
                           <a:latin typeface="Arial"/>
                           <a:ea typeface="Arial"/>
@@ -4938,24 +4938,24 @@
                   <a:tcPr marL="91440" marR="91440" marT="45720" marB="45720">
                     <a:lnL w="4763">
                       <a:solidFill>
-                        <a:srgbClr val="435063"/>
+                        <a:srgbClr val="434F61"/>
                       </a:solidFill>
                       <a:prstDash val="solid"/>
                     </a:lnL>
                     <a:lnR w="4763">
                       <a:solidFill>
-                        <a:srgbClr val="435063"/>
+                        <a:srgbClr val="434F61"/>
                       </a:solidFill>
                       <a:prstDash val="solid"/>
                     </a:lnR>
                     <a:lnB w="4763">
                       <a:solidFill>
-                        <a:srgbClr val="435063"/>
+                        <a:srgbClr val="434F61"/>
                       </a:solidFill>
                       <a:prstDash val="solid"/>
                     </a:lnB>
                     <a:solidFill>
-                      <a:srgbClr val="202433"/>
+                      <a:srgbClr val="222636"/>
                     </a:solidFill>
                   </a:tcPr>
                 </a:tc>
@@ -4967,7 +4967,7 @@
                       <a:r>
                         <a:rPr sz="2175" b="0">
                           <a:solidFill>
-                            <a:srgbClr val="F3EEE8"/>
+                            <a:srgbClr val="F1EEE8"/>
                           </a:solidFill>
                           <a:latin typeface="Arial"/>
                           <a:ea typeface="Arial"/>
@@ -4980,18 +4980,18 @@
                   <a:tcPr marL="91440" marR="91440" marT="45720" marB="45720">
                     <a:lnR w="4763">
                       <a:solidFill>
-                        <a:srgbClr val="435063"/>
+                        <a:srgbClr val="434F61"/>
                       </a:solidFill>
                       <a:prstDash val="solid"/>
                     </a:lnR>
                     <a:lnB w="4763">
                       <a:solidFill>
-                        <a:srgbClr val="435063"/>
+                        <a:srgbClr val="434F61"/>
                       </a:solidFill>
                       <a:prstDash val="solid"/>
                     </a:lnB>
                     <a:solidFill>
-                      <a:srgbClr val="202433"/>
+                      <a:srgbClr val="222636"/>
                     </a:solidFill>
                   </a:tcPr>
                 </a:tc>
@@ -5003,7 +5003,7 @@
                       <a:r>
                         <a:rPr sz="2175" b="0">
                           <a:solidFill>
-                            <a:srgbClr val="F3EEE8"/>
+                            <a:srgbClr val="F1EEE8"/>
                           </a:solidFill>
                           <a:latin typeface="Arial"/>
                           <a:ea typeface="Arial"/>
@@ -5016,18 +5016,18 @@
                   <a:tcPr marL="91440" marR="91440" marT="45720" marB="45720">
                     <a:lnR w="4763">
                       <a:solidFill>
-                        <a:srgbClr val="435063"/>
+                        <a:srgbClr val="434F61"/>
                       </a:solidFill>
                       <a:prstDash val="solid"/>
                     </a:lnR>
                     <a:lnB w="4763">
                       <a:solidFill>
-                        <a:srgbClr val="435063"/>
+                        <a:srgbClr val="434F61"/>
                       </a:solidFill>
                       <a:prstDash val="solid"/>
                     </a:lnB>
                     <a:solidFill>
-                      <a:srgbClr val="202433"/>
+                      <a:srgbClr val="222636"/>
                     </a:solidFill>
                   </a:tcPr>
                 </a:tc>
@@ -5041,7 +5041,7 @@
                       <a:r>
                         <a:rPr sz="2175" b="0">
                           <a:solidFill>
-                            <a:srgbClr val="BD9A78"/>
+                            <a:srgbClr val="C6A27F"/>
                           </a:solidFill>
                           <a:latin typeface="Arial"/>
                           <a:ea typeface="Arial"/>
@@ -5054,24 +5054,24 @@
                   <a:tcPr marL="91440" marR="91440" marT="45720" marB="45720">
                     <a:lnL w="4763">
                       <a:solidFill>
-                        <a:srgbClr val="435063"/>
+                        <a:srgbClr val="434F61"/>
                       </a:solidFill>
                       <a:prstDash val="solid"/>
                     </a:lnL>
                     <a:lnR w="4763">
                       <a:solidFill>
-                        <a:srgbClr val="435063"/>
+                        <a:srgbClr val="434F61"/>
                       </a:solidFill>
                       <a:prstDash val="solid"/>
                     </a:lnR>
                     <a:lnB w="4763">
                       <a:solidFill>
-                        <a:srgbClr val="435063"/>
+                        <a:srgbClr val="434F61"/>
                       </a:solidFill>
                       <a:prstDash val="solid"/>
                     </a:lnB>
                     <a:solidFill>
-                      <a:srgbClr val="202433"/>
+                      <a:srgbClr val="222636"/>
                     </a:solidFill>
                   </a:tcPr>
                 </a:tc>
@@ -5083,7 +5083,7 @@
                       <a:r>
                         <a:rPr sz="2175" b="0">
                           <a:solidFill>
-                            <a:srgbClr val="F3EEE8"/>
+                            <a:srgbClr val="F1EEE8"/>
                           </a:solidFill>
                           <a:latin typeface="Arial"/>
                           <a:ea typeface="Arial"/>
@@ -5096,18 +5096,18 @@
                   <a:tcPr marL="91440" marR="91440" marT="45720" marB="45720">
                     <a:lnR w="4763">
                       <a:solidFill>
-                        <a:srgbClr val="435063"/>
+                        <a:srgbClr val="434F61"/>
                       </a:solidFill>
                       <a:prstDash val="solid"/>
                     </a:lnR>
                     <a:lnB w="4763">
                       <a:solidFill>
-                        <a:srgbClr val="435063"/>
+                        <a:srgbClr val="434F61"/>
                       </a:solidFill>
                       <a:prstDash val="solid"/>
                     </a:lnB>
                     <a:solidFill>
-                      <a:srgbClr val="202433"/>
+                      <a:srgbClr val="222636"/>
                     </a:solidFill>
                   </a:tcPr>
                 </a:tc>
@@ -5119,7 +5119,7 @@
                       <a:r>
                         <a:rPr sz="2175" b="0">
                           <a:solidFill>
-                            <a:srgbClr val="F3EEE8"/>
+                            <a:srgbClr val="F1EEE8"/>
                           </a:solidFill>
                           <a:latin typeface="Arial"/>
                           <a:ea typeface="Arial"/>
@@ -5132,18 +5132,18 @@
                   <a:tcPr marL="91440" marR="91440" marT="45720" marB="45720">
                     <a:lnR w="4763">
                       <a:solidFill>
-                        <a:srgbClr val="435063"/>
+                        <a:srgbClr val="434F61"/>
                       </a:solidFill>
                       <a:prstDash val="solid"/>
                     </a:lnR>
                     <a:lnB w="4763">
                       <a:solidFill>
-                        <a:srgbClr val="435063"/>
+                        <a:srgbClr val="434F61"/>
                       </a:solidFill>
                       <a:prstDash val="solid"/>
                     </a:lnB>
                     <a:solidFill>
-                      <a:srgbClr val="202433"/>
+                      <a:srgbClr val="222636"/>
                     </a:solidFill>
                   </a:tcPr>
                 </a:tc>
@@ -5157,7 +5157,7 @@
           <p:cNvPr id="3" name="">
             <a:extLst xmlns:a="http://schemas.openxmlformats.org/drawingml/2006/main">
               <a:ext uri="{FF2B5EF4-FFF2-40B4-BE49-F238E27FC236}">
-                <a16:creationId xmlns:a16="http://schemas.microsoft.com/office/drawing/2014/main" id="{C91C201E-631A-4BCE-B48C-AB4E565AF94D}"/>
+                <a16:creationId xmlns:a16="http://schemas.microsoft.com/office/drawing/2014/main" id="{90710F63-BD72-4726-A260-F06F469C421C}"/>
               </a:ext>
             </a:extLst>
           </p:cNvPr>
@@ -5185,7 +5185,7 @@
             <a:defPPr>
               <a:defRPr sz="1875" b="0">
                 <a:solidFill>
-                  <a:srgbClr val="93A4AA"/>
+                  <a:srgbClr val="A9B8BC"/>
                 </a:solidFill>
                 <a:latin typeface="Arial"/>
                 <a:ea typeface="Arial"/>
@@ -5197,7 +5197,7 @@
             <a:pPr>
               <a:defRPr sz="1875" b="0">
                 <a:solidFill>
-                  <a:srgbClr val="93A4AA"/>
+                  <a:srgbClr val="A9B8BC"/>
                 </a:solidFill>
                 <a:latin typeface="Arial"/>
                 <a:ea typeface="Arial"/>
@@ -5207,7 +5207,7 @@
             <a:r>
               <a:rPr sz="1875" b="0">
                 <a:solidFill>
-                  <a:srgbClr val="93A4AA"/>
+                  <a:srgbClr val="A9B8BC"/>
                 </a:solidFill>
                 <a:latin typeface="Arial"/>
                 <a:ea typeface="Arial"/>
@@ -5223,7 +5223,7 @@
           <p:cNvPr id="4" name="">
             <a:extLst xmlns:a="http://schemas.openxmlformats.org/drawingml/2006/main">
               <a:ext uri="{FF2B5EF4-FFF2-40B4-BE49-F238E27FC236}">
-                <a16:creationId xmlns:a16="http://schemas.microsoft.com/office/drawing/2014/main" id="{0996B162-E925-4154-B32E-A7D5874416CA}"/>
+                <a16:creationId xmlns:a16="http://schemas.microsoft.com/office/drawing/2014/main" id="{7A2748B6-FEFA-477A-B69A-C25463CD60D0}"/>
               </a:ext>
             </a:extLst>
           </p:cNvPr>
@@ -5251,7 +5251,7 @@
             <a:defPPr>
               <a:defRPr sz="1425" b="0">
                 <a:solidFill>
-                  <a:srgbClr val="93A4AA"/>
+                  <a:srgbClr val="A9B8BC"/>
                 </a:solidFill>
                 <a:latin typeface="Arial"/>
                 <a:ea typeface="Arial"/>
@@ -5263,7 +5263,7 @@
             <a:pPr>
               <a:defRPr sz="1425" b="0">
                 <a:solidFill>
-                  <a:srgbClr val="93A4AA"/>
+                  <a:srgbClr val="A9B8BC"/>
                 </a:solidFill>
                 <a:latin typeface="Arial"/>
                 <a:ea typeface="Arial"/>
@@ -5273,7 +5273,7 @@
             <a:r>
               <a:rPr sz="1425" b="0">
                 <a:solidFill>
-                  <a:srgbClr val="93A4AA"/>
+                  <a:srgbClr val="A9B8BC"/>
                 </a:solidFill>
                 <a:latin typeface="Arial"/>
                 <a:ea typeface="Arial"/>
@@ -5287,7 +5287,7 @@
     </p:spTree>
     <p:extLst>
       <p:ext uri="{BB962C8B-B14F-4D97-AF65-F5344CB8AC3E}">
-        <p14:creationId xmlns:p14="http://schemas.microsoft.com/office/powerpoint/2010/main" val="372591755"/>
+        <p14:creationId xmlns:p14="http://schemas.microsoft.com/office/powerpoint/2010/main" val="1595494775"/>
       </p:ext>
     </p:extLst>
   </p:cSld>
@@ -5300,7 +5300,7 @@
     <p:bg>
       <p:bgPr>
         <a:solidFill xmlns:a="http://schemas.openxmlformats.org/drawingml/2006/main">
-          <a:srgbClr val="202433"/>
+          <a:srgbClr val="222636"/>
         </a:solidFill>
       </p:bgPr>
     </p:bg>
@@ -5318,7 +5318,7 @@
           <p:cNvPr id="5" name="">
             <a:extLst xmlns:a="http://schemas.openxmlformats.org/drawingml/2006/main">
               <a:ext uri="{FF2B5EF4-FFF2-40B4-BE49-F238E27FC236}">
-                <a16:creationId xmlns:a16="http://schemas.microsoft.com/office/drawing/2014/main" id="{8C19A865-822D-414F-97E0-CA6170F54C98}"/>
+                <a16:creationId xmlns:a16="http://schemas.microsoft.com/office/drawing/2014/main" id="{5EF87DAB-F5EE-4333-B7BF-5D8F21F47206}"/>
               </a:ext>
             </a:extLst>
           </p:cNvPr>
@@ -5346,7 +5346,7 @@
             <a:defPPr>
               <a:defRPr sz="4350" b="1">
                 <a:solidFill>
-                  <a:srgbClr val="BD9A78"/>
+                  <a:srgbClr val="C6A27F"/>
                 </a:solidFill>
                 <a:latin typeface="Arial"/>
                 <a:ea typeface="Arial"/>
@@ -5358,7 +5358,7 @@
             <a:pPr>
               <a:defRPr sz="4350" b="1">
                 <a:solidFill>
-                  <a:srgbClr val="BD9A78"/>
+                  <a:srgbClr val="C6A27F"/>
                 </a:solidFill>
                 <a:latin typeface="Arial"/>
                 <a:ea typeface="Arial"/>
@@ -5368,7 +5368,7 @@
             <a:r>
               <a:rPr sz="4350" b="1">
                 <a:solidFill>
-                  <a:srgbClr val="BD9A78"/>
+                  <a:srgbClr val="C6A27F"/>
                 </a:solidFill>
                 <a:latin typeface="Arial"/>
                 <a:ea typeface="Arial"/>
@@ -5384,7 +5384,7 @@
           <p:cNvPr id="2" name="">
             <a:extLst xmlns:a="http://schemas.openxmlformats.org/drawingml/2006/main">
               <a:ext uri="{FF2B5EF4-FFF2-40B4-BE49-F238E27FC236}">
-                <a16:creationId xmlns:a16="http://schemas.microsoft.com/office/drawing/2014/main" id="{965BBDA0-032B-4B4B-8DAE-916097776C36}"/>
+                <a16:creationId xmlns:a16="http://schemas.microsoft.com/office/drawing/2014/main" id="{712CD93A-0D6B-4574-BF54-3E16438BA188}"/>
               </a:ext>
             </a:extLst>
           </p:cNvPr>
@@ -5412,7 +5412,7 @@
                       <a:r>
                         <a:rPr sz="2175" b="1">
                           <a:solidFill>
-                            <a:srgbClr val="F3EEE8"/>
+                            <a:srgbClr val="F1EEE8"/>
                           </a:solidFill>
                           <a:latin typeface="Arial"/>
                           <a:ea typeface="Arial"/>
@@ -5425,30 +5425,30 @@
                   <a:tcPr marL="91440" marR="91440" marT="45720" marB="45720">
                     <a:lnL w="4763">
                       <a:solidFill>
-                        <a:srgbClr val="435063"/>
+                        <a:srgbClr val="434F61"/>
                       </a:solidFill>
                       <a:prstDash val="solid"/>
                     </a:lnL>
                     <a:lnR w="4763">
                       <a:solidFill>
-                        <a:srgbClr val="435063"/>
+                        <a:srgbClr val="434F61"/>
                       </a:solidFill>
                       <a:prstDash val="solid"/>
                     </a:lnR>
                     <a:lnT w="4763">
                       <a:solidFill>
-                        <a:srgbClr val="435063"/>
+                        <a:srgbClr val="434F61"/>
                       </a:solidFill>
                       <a:prstDash val="solid"/>
                     </a:lnT>
                     <a:lnB w="4763">
                       <a:solidFill>
-                        <a:srgbClr val="435063"/>
+                        <a:srgbClr val="434F61"/>
                       </a:solidFill>
                       <a:prstDash val="solid"/>
                     </a:lnB>
                     <a:solidFill>
-                      <a:srgbClr val="435063"/>
+                      <a:srgbClr val="434F61"/>
                     </a:solidFill>
                   </a:tcPr>
                 </a:tc>
@@ -5460,7 +5460,7 @@
                       <a:r>
                         <a:rPr sz="2175" b="1">
                           <a:solidFill>
-                            <a:srgbClr val="F3EEE8"/>
+                            <a:srgbClr val="F1EEE8"/>
                           </a:solidFill>
                           <a:latin typeface="Arial"/>
                           <a:ea typeface="Arial"/>
@@ -5473,24 +5473,24 @@
                   <a:tcPr marL="91440" marR="91440" marT="45720" marB="45720">
                     <a:lnR w="4763">
                       <a:solidFill>
-                        <a:srgbClr val="435063"/>
+                        <a:srgbClr val="434F61"/>
                       </a:solidFill>
                       <a:prstDash val="solid"/>
                     </a:lnR>
                     <a:lnT w="4763">
                       <a:solidFill>
-                        <a:srgbClr val="435063"/>
+                        <a:srgbClr val="434F61"/>
                       </a:solidFill>
                       <a:prstDash val="solid"/>
                     </a:lnT>
                     <a:lnB w="4763">
                       <a:solidFill>
-                        <a:srgbClr val="435063"/>
+                        <a:srgbClr val="434F61"/>
                       </a:solidFill>
                       <a:prstDash val="solid"/>
                     </a:lnB>
                     <a:solidFill>
-                      <a:srgbClr val="435063"/>
+                      <a:srgbClr val="434F61"/>
                     </a:solidFill>
                   </a:tcPr>
                 </a:tc>
@@ -5504,7 +5504,7 @@
                       <a:r>
                         <a:rPr sz="2175" b="0">
                           <a:solidFill>
-                            <a:srgbClr val="BD9A78"/>
+                            <a:srgbClr val="C6A27F"/>
                           </a:solidFill>
                           <a:latin typeface="Arial"/>
                           <a:ea typeface="Arial"/>
@@ -5517,24 +5517,24 @@
                   <a:tcPr marL="91440" marR="91440" marT="45720" marB="45720">
                     <a:lnL w="4763">
                       <a:solidFill>
-                        <a:srgbClr val="435063"/>
+                        <a:srgbClr val="434F61"/>
                       </a:solidFill>
                       <a:prstDash val="solid"/>
                     </a:lnL>
                     <a:lnR w="4763">
                       <a:solidFill>
-                        <a:srgbClr val="435063"/>
+                        <a:srgbClr val="434F61"/>
                       </a:solidFill>
                       <a:prstDash val="solid"/>
                     </a:lnR>
                     <a:lnB w="4763">
                       <a:solidFill>
-                        <a:srgbClr val="435063"/>
+                        <a:srgbClr val="434F61"/>
                       </a:solidFill>
                       <a:prstDash val="solid"/>
                     </a:lnB>
                     <a:solidFill>
-                      <a:srgbClr val="202433"/>
+                      <a:srgbClr val="222636"/>
                     </a:solidFill>
                   </a:tcPr>
                 </a:tc>
@@ -5546,7 +5546,7 @@
                       <a:r>
                         <a:rPr sz="2175" b="0">
                           <a:solidFill>
-                            <a:srgbClr val="F3EEE8"/>
+                            <a:srgbClr val="F1EEE8"/>
                           </a:solidFill>
                           <a:latin typeface="Arial"/>
                           <a:ea typeface="Arial"/>
@@ -5559,18 +5559,18 @@
                   <a:tcPr marL="91440" marR="91440" marT="45720" marB="45720">
                     <a:lnR w="4763">
                       <a:solidFill>
-                        <a:srgbClr val="435063"/>
+                        <a:srgbClr val="434F61"/>
                       </a:solidFill>
                       <a:prstDash val="solid"/>
                     </a:lnR>
                     <a:lnB w="4763">
                       <a:solidFill>
-                        <a:srgbClr val="435063"/>
+                        <a:srgbClr val="434F61"/>
                       </a:solidFill>
                       <a:prstDash val="solid"/>
                     </a:lnB>
                     <a:solidFill>
-                      <a:srgbClr val="202433"/>
+                      <a:srgbClr val="222636"/>
                     </a:solidFill>
                   </a:tcPr>
                 </a:tc>
@@ -5584,7 +5584,7 @@
                       <a:r>
                         <a:rPr sz="2175" b="0">
                           <a:solidFill>
-                            <a:srgbClr val="BD9A78"/>
+                            <a:srgbClr val="C6A27F"/>
                           </a:solidFill>
                           <a:latin typeface="Arial"/>
                           <a:ea typeface="Arial"/>
@@ -5597,24 +5597,24 @@
                   <a:tcPr marL="91440" marR="91440" marT="45720" marB="45720">
                     <a:lnL w="4763">
                       <a:solidFill>
-                        <a:srgbClr val="435063"/>
+                        <a:srgbClr val="434F61"/>
                       </a:solidFill>
                       <a:prstDash val="solid"/>
                     </a:lnL>
                     <a:lnR w="4763">
                       <a:solidFill>
-                        <a:srgbClr val="435063"/>
+                        <a:srgbClr val="434F61"/>
                       </a:solidFill>
                       <a:prstDash val="solid"/>
                     </a:lnR>
                     <a:lnB w="4763">
                       <a:solidFill>
-                        <a:srgbClr val="435063"/>
+                        <a:srgbClr val="434F61"/>
                       </a:solidFill>
                       <a:prstDash val="solid"/>
                     </a:lnB>
                     <a:solidFill>
-                      <a:srgbClr val="202433"/>
+                      <a:srgbClr val="222636"/>
                     </a:solidFill>
                   </a:tcPr>
                 </a:tc>
@@ -5626,7 +5626,7 @@
                       <a:r>
                         <a:rPr sz="2175" b="0">
                           <a:solidFill>
-                            <a:srgbClr val="F3EEE8"/>
+                            <a:srgbClr val="F1EEE8"/>
                           </a:solidFill>
                           <a:latin typeface="Arial"/>
                           <a:ea typeface="Arial"/>
@@ -5639,18 +5639,18 @@
                   <a:tcPr marL="91440" marR="91440" marT="45720" marB="45720">
                     <a:lnR w="4763">
                       <a:solidFill>
-                        <a:srgbClr val="435063"/>
+                        <a:srgbClr val="434F61"/>
                       </a:solidFill>
                       <a:prstDash val="solid"/>
                     </a:lnR>
                     <a:lnB w="4763">
                       <a:solidFill>
-                        <a:srgbClr val="435063"/>
+                        <a:srgbClr val="434F61"/>
                       </a:solidFill>
                       <a:prstDash val="solid"/>
                     </a:lnB>
                     <a:solidFill>
-                      <a:srgbClr val="202433"/>
+                      <a:srgbClr val="222636"/>
                     </a:solidFill>
                   </a:tcPr>
                 </a:tc>
@@ -5664,7 +5664,7 @@
                       <a:r>
                         <a:rPr sz="2175" b="0">
                           <a:solidFill>
-                            <a:srgbClr val="BD9A78"/>
+                            <a:srgbClr val="C6A27F"/>
                           </a:solidFill>
                           <a:latin typeface="Arial"/>
                           <a:ea typeface="Arial"/>
@@ -5677,24 +5677,24 @@
                   <a:tcPr marL="91440" marR="91440" marT="45720" marB="45720">
                     <a:lnL w="4763">
                       <a:solidFill>
-                        <a:srgbClr val="435063"/>
+                        <a:srgbClr val="434F61"/>
                       </a:solidFill>
                       <a:prstDash val="solid"/>
                     </a:lnL>
                     <a:lnR w="4763">
                       <a:solidFill>
-                        <a:srgbClr val="435063"/>
+                        <a:srgbClr val="434F61"/>
                       </a:solidFill>
                       <a:prstDash val="solid"/>
                     </a:lnR>
                     <a:lnB w="4763">
                       <a:solidFill>
-                        <a:srgbClr val="435063"/>
+                        <a:srgbClr val="434F61"/>
                       </a:solidFill>
                       <a:prstDash val="solid"/>
                     </a:lnB>
                     <a:solidFill>
-                      <a:srgbClr val="202433"/>
+                      <a:srgbClr val="222636"/>
                     </a:solidFill>
                   </a:tcPr>
                 </a:tc>
@@ -5706,7 +5706,7 @@
                       <a:r>
                         <a:rPr sz="2175" b="0">
                           <a:solidFill>
-                            <a:srgbClr val="F3EEE8"/>
+                            <a:srgbClr val="F1EEE8"/>
                           </a:solidFill>
                           <a:latin typeface="Arial"/>
                           <a:ea typeface="Arial"/>
@@ -5719,18 +5719,18 @@
                   <a:tcPr marL="91440" marR="91440" marT="45720" marB="45720">
                     <a:lnR w="4763">
                       <a:solidFill>
-                        <a:srgbClr val="435063"/>
+                        <a:srgbClr val="434F61"/>
                       </a:solidFill>
                       <a:prstDash val="solid"/>
                     </a:lnR>
                     <a:lnB w="4763">
                       <a:solidFill>
-                        <a:srgbClr val="435063"/>
+                        <a:srgbClr val="434F61"/>
                       </a:solidFill>
                       <a:prstDash val="solid"/>
                     </a:lnB>
                     <a:solidFill>
-                      <a:srgbClr val="202433"/>
+                      <a:srgbClr val="222636"/>
                     </a:solidFill>
                   </a:tcPr>
                 </a:tc>
@@ -5744,7 +5744,7 @@
                       <a:r>
                         <a:rPr sz="2175" b="0">
                           <a:solidFill>
-                            <a:srgbClr val="BD9A78"/>
+                            <a:srgbClr val="C6A27F"/>
                           </a:solidFill>
                           <a:latin typeface="Arial"/>
                           <a:ea typeface="Arial"/>
@@ -5757,24 +5757,24 @@
                   <a:tcPr marL="91440" marR="91440" marT="45720" marB="45720">
                     <a:lnL w="4763">
                       <a:solidFill>
-                        <a:srgbClr val="435063"/>
+                        <a:srgbClr val="434F61"/>
                       </a:solidFill>
                       <a:prstDash val="solid"/>
                     </a:lnL>
                     <a:lnR w="4763">
                       <a:solidFill>
-                        <a:srgbClr val="435063"/>
+                        <a:srgbClr val="434F61"/>
                       </a:solidFill>
                       <a:prstDash val="solid"/>
                     </a:lnR>
                     <a:lnB w="4763">
                       <a:solidFill>
-                        <a:srgbClr val="435063"/>
+                        <a:srgbClr val="434F61"/>
                       </a:solidFill>
                       <a:prstDash val="solid"/>
                     </a:lnB>
                     <a:solidFill>
-                      <a:srgbClr val="202433"/>
+                      <a:srgbClr val="222636"/>
                     </a:solidFill>
                   </a:tcPr>
                 </a:tc>
@@ -5786,7 +5786,7 @@
                       <a:r>
                         <a:rPr sz="2175" b="0">
                           <a:solidFill>
-                            <a:srgbClr val="F3EEE8"/>
+                            <a:srgbClr val="F1EEE8"/>
                           </a:solidFill>
                           <a:latin typeface="Arial"/>
                           <a:ea typeface="Arial"/>
@@ -5799,18 +5799,18 @@
                   <a:tcPr marL="91440" marR="91440" marT="45720" marB="45720">
                     <a:lnR w="4763">
                       <a:solidFill>
-                        <a:srgbClr val="435063"/>
+                        <a:srgbClr val="434F61"/>
                       </a:solidFill>
                       <a:prstDash val="solid"/>
                     </a:lnR>
                     <a:lnB w="4763">
                       <a:solidFill>
-                        <a:srgbClr val="435063"/>
+                        <a:srgbClr val="434F61"/>
                       </a:solidFill>
                       <a:prstDash val="solid"/>
                     </a:lnB>
                     <a:solidFill>
-                      <a:srgbClr val="202433"/>
+                      <a:srgbClr val="222636"/>
                     </a:solidFill>
                   </a:tcPr>
                 </a:tc>
@@ -5824,7 +5824,7 @@
                       <a:r>
                         <a:rPr sz="2175" b="0">
                           <a:solidFill>
-                            <a:srgbClr val="BD9A78"/>
+                            <a:srgbClr val="C6A27F"/>
                           </a:solidFill>
                           <a:latin typeface="Arial"/>
                           <a:ea typeface="Arial"/>
@@ -5837,24 +5837,24 @@
                   <a:tcPr marL="91440" marR="91440" marT="45720" marB="45720">
                     <a:lnL w="4763">
                       <a:solidFill>
-                        <a:srgbClr val="435063"/>
+                        <a:srgbClr val="434F61"/>
                       </a:solidFill>
                       <a:prstDash val="solid"/>
                     </a:lnL>
                     <a:lnR w="4763">
                       <a:solidFill>
-                        <a:srgbClr val="435063"/>
+                        <a:srgbClr val="434F61"/>
                       </a:solidFill>
                       <a:prstDash val="solid"/>
                     </a:lnR>
                     <a:lnB w="4763">
                       <a:solidFill>
-                        <a:srgbClr val="435063"/>
+                        <a:srgbClr val="434F61"/>
                       </a:solidFill>
                       <a:prstDash val="solid"/>
                     </a:lnB>
                     <a:solidFill>
-                      <a:srgbClr val="202433"/>
+                      <a:srgbClr val="222636"/>
                     </a:solidFill>
                   </a:tcPr>
                 </a:tc>
@@ -5866,7 +5866,7 @@
                       <a:r>
                         <a:rPr sz="2175" b="0">
                           <a:solidFill>
-                            <a:srgbClr val="F3EEE8"/>
+                            <a:srgbClr val="F1EEE8"/>
                           </a:solidFill>
                           <a:latin typeface="Arial"/>
                           <a:ea typeface="Arial"/>
@@ -5879,18 +5879,18 @@
                   <a:tcPr marL="91440" marR="91440" marT="45720" marB="45720">
                     <a:lnR w="4763">
                       <a:solidFill>
-                        <a:srgbClr val="435063"/>
+                        <a:srgbClr val="434F61"/>
                       </a:solidFill>
                       <a:prstDash val="solid"/>
                     </a:lnR>
                     <a:lnB w="4763">
                       <a:solidFill>
-                        <a:srgbClr val="435063"/>
+                        <a:srgbClr val="434F61"/>
                       </a:solidFill>
                       <a:prstDash val="solid"/>
                     </a:lnB>
                     <a:solidFill>
-                      <a:srgbClr val="202433"/>
+                      <a:srgbClr val="222636"/>
                     </a:solidFill>
                   </a:tcPr>
                 </a:tc>
@@ -5904,7 +5904,7 @@
                       <a:r>
                         <a:rPr sz="2175" b="0">
                           <a:solidFill>
-                            <a:srgbClr val="BD9A78"/>
+                            <a:srgbClr val="C6A27F"/>
                           </a:solidFill>
                           <a:latin typeface="Arial"/>
                           <a:ea typeface="Arial"/>
@@ -5917,24 +5917,24 @@
                   <a:tcPr marL="91440" marR="91440" marT="45720" marB="45720">
                     <a:lnL w="4763">
                       <a:solidFill>
-                        <a:srgbClr val="435063"/>
+                        <a:srgbClr val="434F61"/>
                       </a:solidFill>
                       <a:prstDash val="solid"/>
                     </a:lnL>
                     <a:lnR w="4763">
                       <a:solidFill>
-                        <a:srgbClr val="435063"/>
+                        <a:srgbClr val="434F61"/>
                       </a:solidFill>
                       <a:prstDash val="solid"/>
                     </a:lnR>
                     <a:lnB w="4763">
                       <a:solidFill>
-                        <a:srgbClr val="435063"/>
+                        <a:srgbClr val="434F61"/>
                       </a:solidFill>
                       <a:prstDash val="solid"/>
                     </a:lnB>
                     <a:solidFill>
-                      <a:srgbClr val="202433"/>
+                      <a:srgbClr val="222636"/>
                     </a:solidFill>
                   </a:tcPr>
                 </a:tc>
@@ -5946,7 +5946,7 @@
                       <a:r>
                         <a:rPr sz="2175" b="0">
                           <a:solidFill>
-                            <a:srgbClr val="F3EEE8"/>
+                            <a:srgbClr val="F1EEE8"/>
                           </a:solidFill>
                           <a:latin typeface="Arial"/>
                           <a:ea typeface="Arial"/>
@@ -5959,18 +5959,18 @@
                   <a:tcPr marL="91440" marR="91440" marT="45720" marB="45720">
                     <a:lnR w="4763">
                       <a:solidFill>
-                        <a:srgbClr val="435063"/>
+                        <a:srgbClr val="434F61"/>
                       </a:solidFill>
                       <a:prstDash val="solid"/>
                     </a:lnR>
                     <a:lnB w="4763">
                       <a:solidFill>
-                        <a:srgbClr val="435063"/>
+                        <a:srgbClr val="434F61"/>
                       </a:solidFill>
                       <a:prstDash val="solid"/>
                     </a:lnB>
                     <a:solidFill>
-                      <a:srgbClr val="202433"/>
+                      <a:srgbClr val="222636"/>
                     </a:solidFill>
                   </a:tcPr>
                 </a:tc>
@@ -5984,7 +5984,7 @@
           <p:cNvPr id="3" name="">
             <a:extLst xmlns:a="http://schemas.openxmlformats.org/drawingml/2006/main">
               <a:ext uri="{FF2B5EF4-FFF2-40B4-BE49-F238E27FC236}">
-                <a16:creationId xmlns:a16="http://schemas.microsoft.com/office/drawing/2014/main" id="{E274A7AD-5672-43F0-8372-EFFB4ED52465}"/>
+                <a16:creationId xmlns:a16="http://schemas.microsoft.com/office/drawing/2014/main" id="{41561939-0078-4634-9E45-702F20E6C826}"/>
               </a:ext>
             </a:extLst>
           </p:cNvPr>
@@ -6012,7 +6012,7 @@
             <a:defPPr>
               <a:defRPr sz="1875" b="0">
                 <a:solidFill>
-                  <a:srgbClr val="93A4AA"/>
+                  <a:srgbClr val="A9B8BC"/>
                 </a:solidFill>
                 <a:latin typeface="Arial"/>
                 <a:ea typeface="Arial"/>
@@ -6024,7 +6024,7 @@
             <a:pPr>
               <a:defRPr sz="1875" b="0">
                 <a:solidFill>
-                  <a:srgbClr val="93A4AA"/>
+                  <a:srgbClr val="A9B8BC"/>
                 </a:solidFill>
                 <a:latin typeface="Arial"/>
                 <a:ea typeface="Arial"/>
@@ -6034,7 +6034,7 @@
             <a:r>
               <a:rPr sz="1875" b="0">
                 <a:solidFill>
-                  <a:srgbClr val="93A4AA"/>
+                  <a:srgbClr val="A9B8BC"/>
                 </a:solidFill>
                 <a:latin typeface="Arial"/>
                 <a:ea typeface="Arial"/>
@@ -6050,7 +6050,7 @@
           <p:cNvPr id="4" name="">
             <a:extLst xmlns:a="http://schemas.openxmlformats.org/drawingml/2006/main">
               <a:ext uri="{FF2B5EF4-FFF2-40B4-BE49-F238E27FC236}">
-                <a16:creationId xmlns:a16="http://schemas.microsoft.com/office/drawing/2014/main" id="{7292C9BA-F5FF-4E41-BD3B-12947AF68058}"/>
+                <a16:creationId xmlns:a16="http://schemas.microsoft.com/office/drawing/2014/main" id="{578A0FF9-17CE-4E55-8C38-8239E5525E41}"/>
               </a:ext>
             </a:extLst>
           </p:cNvPr>
@@ -6078,7 +6078,7 @@
             <a:defPPr>
               <a:defRPr sz="1425" b="0">
                 <a:solidFill>
-                  <a:srgbClr val="93A4AA"/>
+                  <a:srgbClr val="A9B8BC"/>
                 </a:solidFill>
                 <a:latin typeface="Arial"/>
                 <a:ea typeface="Arial"/>
@@ -6090,7 +6090,7 @@
             <a:pPr>
               <a:defRPr sz="1425" b="0">
                 <a:solidFill>
-                  <a:srgbClr val="93A4AA"/>
+                  <a:srgbClr val="A9B8BC"/>
                 </a:solidFill>
                 <a:latin typeface="Arial"/>
                 <a:ea typeface="Arial"/>
@@ -6100,7 +6100,7 @@
             <a:r>
               <a:rPr sz="1425" b="0">
                 <a:solidFill>
-                  <a:srgbClr val="93A4AA"/>
+                  <a:srgbClr val="A9B8BC"/>
                 </a:solidFill>
                 <a:latin typeface="Arial"/>
                 <a:ea typeface="Arial"/>
@@ -6114,7 +6114,7 @@
     </p:spTree>
     <p:extLst>
       <p:ext uri="{BB962C8B-B14F-4D97-AF65-F5344CB8AC3E}">
-        <p14:creationId xmlns:p14="http://schemas.microsoft.com/office/powerpoint/2010/main" val="163172298"/>
+        <p14:creationId xmlns:p14="http://schemas.microsoft.com/office/powerpoint/2010/main" val="1619955128"/>
       </p:ext>
     </p:extLst>
   </p:cSld>
@@ -6127,7 +6127,7 @@
     <p:bg>
       <p:bgPr>
         <a:solidFill xmlns:a="http://schemas.openxmlformats.org/drawingml/2006/main">
-          <a:srgbClr val="202433"/>
+          <a:srgbClr val="222636"/>
         </a:solidFill>
       </p:bgPr>
     </p:bg>
@@ -6145,7 +6145,7 @@
           <p:cNvPr id="11" name="">
             <a:extLst xmlns:a="http://schemas.openxmlformats.org/drawingml/2006/main">
               <a:ext uri="{FF2B5EF4-FFF2-40B4-BE49-F238E27FC236}">
-                <a16:creationId xmlns:a16="http://schemas.microsoft.com/office/drawing/2014/main" id="{B91212F1-4968-48B2-812A-ECA7C3C58FDC}"/>
+                <a16:creationId xmlns:a16="http://schemas.microsoft.com/office/drawing/2014/main" id="{172183F9-72B7-4B81-BB4E-DC25A5B5AB2E}"/>
               </a:ext>
             </a:extLst>
           </p:cNvPr>
@@ -6173,7 +6173,7 @@
             <a:defPPr>
               <a:defRPr sz="4350" b="1">
                 <a:solidFill>
-                  <a:srgbClr val="BD9A78"/>
+                  <a:srgbClr val="C6A27F"/>
                 </a:solidFill>
                 <a:latin typeface="Arial"/>
                 <a:ea typeface="Arial"/>
@@ -6185,7 +6185,7 @@
             <a:pPr>
               <a:defRPr sz="4350" b="1">
                 <a:solidFill>
-                  <a:srgbClr val="BD9A78"/>
+                  <a:srgbClr val="C6A27F"/>
                 </a:solidFill>
                 <a:latin typeface="Arial"/>
                 <a:ea typeface="Arial"/>
@@ -6195,7 +6195,7 @@
             <a:r>
               <a:rPr sz="4350" b="1">
                 <a:solidFill>
-                  <a:srgbClr val="BD9A78"/>
+                  <a:srgbClr val="C6A27F"/>
                 </a:solidFill>
                 <a:latin typeface="Arial"/>
                 <a:ea typeface="Arial"/>
@@ -6211,7 +6211,7 @@
           <p:cNvPr id="2" name="">
             <a:extLst xmlns:a="http://schemas.openxmlformats.org/drawingml/2006/main">
               <a:ext uri="{FF2B5EF4-FFF2-40B4-BE49-F238E27FC236}">
-                <a16:creationId xmlns:a16="http://schemas.microsoft.com/office/drawing/2014/main" id="{4BE23494-1877-4B0D-A819-1BA96A266A9A}"/>
+                <a16:creationId xmlns:a16="http://schemas.microsoft.com/office/drawing/2014/main" id="{CFEF1545-6685-453C-AE0D-65575793CF05}"/>
               </a:ext>
             </a:extLst>
           </p:cNvPr>
@@ -6239,7 +6239,7 @@
             <a:defPPr>
               <a:defRPr sz="2400" b="1">
                 <a:solidFill>
-                  <a:srgbClr val="BD9A78"/>
+                  <a:srgbClr val="C6A27F"/>
                 </a:solidFill>
                 <a:latin typeface="Arial"/>
                 <a:ea typeface="Arial"/>
@@ -6251,7 +6251,7 @@
             <a:pPr>
               <a:defRPr sz="2400" b="1">
                 <a:solidFill>
-                  <a:srgbClr val="BD9A78"/>
+                  <a:srgbClr val="C6A27F"/>
                 </a:solidFill>
                 <a:latin typeface="Arial"/>
                 <a:ea typeface="Arial"/>
@@ -6261,7 +6261,7 @@
             <a:r>
               <a:rPr sz="2400" b="1">
                 <a:solidFill>
-                  <a:srgbClr val="BD9A78"/>
+                  <a:srgbClr val="C6A27F"/>
                 </a:solidFill>
                 <a:latin typeface="Arial"/>
                 <a:ea typeface="Arial"/>
@@ -6277,7 +6277,7 @@
           <p:cNvPr id="3" name="">
             <a:extLst xmlns:a="http://schemas.openxmlformats.org/drawingml/2006/main">
               <a:ext uri="{FF2B5EF4-FFF2-40B4-BE49-F238E27FC236}">
-                <a16:creationId xmlns:a16="http://schemas.microsoft.com/office/drawing/2014/main" id="{07FD118E-8514-4E97-A228-AEBEB16AF055}"/>
+                <a16:creationId xmlns:a16="http://schemas.microsoft.com/office/drawing/2014/main" id="{E22C59FA-AD06-472C-8466-DB1E785731D5}"/>
               </a:ext>
             </a:extLst>
           </p:cNvPr>
@@ -6305,7 +6305,7 @@
             <a:defPPr>
               <a:defRPr sz="2400" b="0">
                 <a:solidFill>
-                  <a:srgbClr val="F3EEE8"/>
+                  <a:srgbClr val="F1EEE8"/>
                 </a:solidFill>
                 <a:latin typeface="Arial"/>
                 <a:ea typeface="Arial"/>
@@ -6317,7 +6317,7 @@
             <a:pPr>
               <a:defRPr sz="2400" b="0">
                 <a:solidFill>
-                  <a:srgbClr val="F3EEE8"/>
+                  <a:srgbClr val="F1EEE8"/>
                 </a:solidFill>
                 <a:latin typeface="Arial"/>
                 <a:ea typeface="Arial"/>
@@ -6327,7 +6327,7 @@
             <a:r>
               <a:rPr sz="2400" b="0">
                 <a:solidFill>
-                  <a:srgbClr val="F3EEE8"/>
+                  <a:srgbClr val="F1EEE8"/>
                 </a:solidFill>
                 <a:latin typeface="Arial"/>
                 <a:ea typeface="Arial"/>
@@ -6343,7 +6343,7 @@
           <p:cNvPr id="4" name="">
             <a:extLst xmlns:a="http://schemas.openxmlformats.org/drawingml/2006/main">
               <a:ext uri="{FF2B5EF4-FFF2-40B4-BE49-F238E27FC236}">
-                <a16:creationId xmlns:a16="http://schemas.microsoft.com/office/drawing/2014/main" id="{74BA4385-54B1-4B40-B2F3-272A6CAFC34E}"/>
+                <a16:creationId xmlns:a16="http://schemas.microsoft.com/office/drawing/2014/main" id="{429CA497-E7D0-4E4E-9B31-1B7DD37637C9}"/>
               </a:ext>
             </a:extLst>
           </p:cNvPr>
@@ -6371,7 +6371,7 @@
             <a:defPPr>
               <a:defRPr sz="2400" b="1">
                 <a:solidFill>
-                  <a:srgbClr val="BD9A78"/>
+                  <a:srgbClr val="C6A27F"/>
                 </a:solidFill>
                 <a:latin typeface="Arial"/>
                 <a:ea typeface="Arial"/>
@@ -6383,7 +6383,7 @@
             <a:pPr>
               <a:defRPr sz="2400" b="1">
                 <a:solidFill>
-                  <a:srgbClr val="BD9A78"/>
+                  <a:srgbClr val="C6A27F"/>
                 </a:solidFill>
                 <a:latin typeface="Arial"/>
                 <a:ea typeface="Arial"/>
@@ -6393,7 +6393,7 @@
             <a:r>
               <a:rPr sz="2400" b="1">
                 <a:solidFill>
-                  <a:srgbClr val="BD9A78"/>
+                  <a:srgbClr val="C6A27F"/>
                 </a:solidFill>
                 <a:latin typeface="Arial"/>
                 <a:ea typeface="Arial"/>
@@ -6409,7 +6409,7 @@
           <p:cNvPr id="5" name="">
             <a:extLst xmlns:a="http://schemas.openxmlformats.org/drawingml/2006/main">
               <a:ext uri="{FF2B5EF4-FFF2-40B4-BE49-F238E27FC236}">
-                <a16:creationId xmlns:a16="http://schemas.microsoft.com/office/drawing/2014/main" id="{04A41452-6628-46F1-9C22-01E8503F4D68}"/>
+                <a16:creationId xmlns:a16="http://schemas.microsoft.com/office/drawing/2014/main" id="{A90E6B51-C8CF-447D-A271-65AE6F436D70}"/>
               </a:ext>
             </a:extLst>
           </p:cNvPr>
@@ -6437,7 +6437,7 @@
             <a:defPPr>
               <a:defRPr sz="2400" b="0">
                 <a:solidFill>
-                  <a:srgbClr val="F3EEE8"/>
+                  <a:srgbClr val="F1EEE8"/>
                 </a:solidFill>
                 <a:latin typeface="Arial"/>
                 <a:ea typeface="Arial"/>
@@ -6449,7 +6449,7 @@
             <a:pPr>
               <a:defRPr sz="2400" b="0">
                 <a:solidFill>
-                  <a:srgbClr val="F3EEE8"/>
+                  <a:srgbClr val="F1EEE8"/>
                 </a:solidFill>
                 <a:latin typeface="Arial"/>
                 <a:ea typeface="Arial"/>
@@ -6459,7 +6459,7 @@
             <a:r>
               <a:rPr sz="2400" b="0">
                 <a:solidFill>
-                  <a:srgbClr val="F3EEE8"/>
+                  <a:srgbClr val="F1EEE8"/>
                 </a:solidFill>
                 <a:latin typeface="Arial"/>
                 <a:ea typeface="Arial"/>
@@ -6475,7 +6475,7 @@
           <p:cNvPr id="6" name="">
             <a:extLst xmlns:a="http://schemas.openxmlformats.org/drawingml/2006/main">
               <a:ext uri="{FF2B5EF4-FFF2-40B4-BE49-F238E27FC236}">
-                <a16:creationId xmlns:a16="http://schemas.microsoft.com/office/drawing/2014/main" id="{B5D9669C-7CDF-4D74-B25D-D269A5095DC2}"/>
+                <a16:creationId xmlns:a16="http://schemas.microsoft.com/office/drawing/2014/main" id="{22E5EB56-F3C5-425A-AE26-D77DAD16D266}"/>
               </a:ext>
             </a:extLst>
           </p:cNvPr>
@@ -6503,7 +6503,7 @@
             <a:defPPr>
               <a:defRPr sz="2400" b="1">
                 <a:solidFill>
-                  <a:srgbClr val="BD9A78"/>
+                  <a:srgbClr val="C6A27F"/>
                 </a:solidFill>
                 <a:latin typeface="Arial"/>
                 <a:ea typeface="Arial"/>
@@ -6515,7 +6515,7 @@
             <a:pPr>
               <a:defRPr sz="2400" b="1">
                 <a:solidFill>
-                  <a:srgbClr val="BD9A78"/>
+                  <a:srgbClr val="C6A27F"/>
                 </a:solidFill>
                 <a:latin typeface="Arial"/>
                 <a:ea typeface="Arial"/>
@@ -6525,7 +6525,7 @@
             <a:r>
               <a:rPr sz="2400" b="1">
                 <a:solidFill>
-                  <a:srgbClr val="BD9A78"/>
+                  <a:srgbClr val="C6A27F"/>
                 </a:solidFill>
                 <a:latin typeface="Arial"/>
                 <a:ea typeface="Arial"/>
@@ -6541,7 +6541,7 @@
           <p:cNvPr id="7" name="">
             <a:extLst xmlns:a="http://schemas.openxmlformats.org/drawingml/2006/main">
               <a:ext uri="{FF2B5EF4-FFF2-40B4-BE49-F238E27FC236}">
-                <a16:creationId xmlns:a16="http://schemas.microsoft.com/office/drawing/2014/main" id="{99D50BF8-B178-49F2-A0AE-5DEF4CE21135}"/>
+                <a16:creationId xmlns:a16="http://schemas.microsoft.com/office/drawing/2014/main" id="{23283115-59DE-4B0B-B44C-F624DCC4B3FD}"/>
               </a:ext>
             </a:extLst>
           </p:cNvPr>
@@ -6569,7 +6569,7 @@
             <a:defPPr>
               <a:defRPr sz="2400" b="0">
                 <a:solidFill>
-                  <a:srgbClr val="F3EEE8"/>
+                  <a:srgbClr val="F1EEE8"/>
                 </a:solidFill>
                 <a:latin typeface="Arial"/>
                 <a:ea typeface="Arial"/>
@@ -6581,7 +6581,7 @@
             <a:pPr>
               <a:defRPr sz="2400" b="0">
                 <a:solidFill>
-                  <a:srgbClr val="F3EEE8"/>
+                  <a:srgbClr val="F1EEE8"/>
                 </a:solidFill>
                 <a:latin typeface="Arial"/>
                 <a:ea typeface="Arial"/>
@@ -6591,7 +6591,7 @@
             <a:r>
               <a:rPr sz="2400" b="0">
                 <a:solidFill>
-                  <a:srgbClr val="F3EEE8"/>
+                  <a:srgbClr val="F1EEE8"/>
                 </a:solidFill>
                 <a:latin typeface="Arial"/>
                 <a:ea typeface="Arial"/>
@@ -6607,7 +6607,7 @@
           <p:cNvPr id="8" name="">
             <a:extLst xmlns:a="http://schemas.openxmlformats.org/drawingml/2006/main">
               <a:ext uri="{FF2B5EF4-FFF2-40B4-BE49-F238E27FC236}">
-                <a16:creationId xmlns:a16="http://schemas.microsoft.com/office/drawing/2014/main" id="{94D5342D-4D86-46E5-BF28-7C8FA2A7FC11}"/>
+                <a16:creationId xmlns:a16="http://schemas.microsoft.com/office/drawing/2014/main" id="{D811A6AC-5F01-4FCA-AB7B-A7DD5E9A2BEC}"/>
               </a:ext>
             </a:extLst>
           </p:cNvPr>
@@ -6635,7 +6635,7 @@
             <a:defPPr>
               <a:defRPr sz="2400" b="1">
                 <a:solidFill>
-                  <a:srgbClr val="BD9A78"/>
+                  <a:srgbClr val="C6A27F"/>
                 </a:solidFill>
                 <a:latin typeface="Arial"/>
                 <a:ea typeface="Arial"/>
@@ -6647,7 +6647,7 @@
             <a:pPr>
               <a:defRPr sz="2400" b="1">
                 <a:solidFill>
-                  <a:srgbClr val="BD9A78"/>
+                  <a:srgbClr val="C6A27F"/>
                 </a:solidFill>
                 <a:latin typeface="Arial"/>
                 <a:ea typeface="Arial"/>
@@ -6657,7 +6657,7 @@
             <a:r>
               <a:rPr sz="2400" b="1">
                 <a:solidFill>
-                  <a:srgbClr val="BD9A78"/>
+                  <a:srgbClr val="C6A27F"/>
                 </a:solidFill>
                 <a:latin typeface="Arial"/>
                 <a:ea typeface="Arial"/>
@@ -6673,7 +6673,7 @@
           <p:cNvPr id="9" name="">
             <a:extLst xmlns:a="http://schemas.openxmlformats.org/drawingml/2006/main">
               <a:ext uri="{FF2B5EF4-FFF2-40B4-BE49-F238E27FC236}">
-                <a16:creationId xmlns:a16="http://schemas.microsoft.com/office/drawing/2014/main" id="{873B249D-A02C-4634-B410-808300061536}"/>
+                <a16:creationId xmlns:a16="http://schemas.microsoft.com/office/drawing/2014/main" id="{C1C19942-7C70-4504-AC71-4A9609275B8C}"/>
               </a:ext>
             </a:extLst>
           </p:cNvPr>
@@ -6701,7 +6701,7 @@
             <a:defPPr>
               <a:defRPr sz="2400" b="0">
                 <a:solidFill>
-                  <a:srgbClr val="F3EEE8"/>
+                  <a:srgbClr val="F1EEE8"/>
                 </a:solidFill>
                 <a:latin typeface="Arial"/>
                 <a:ea typeface="Arial"/>
@@ -6713,7 +6713,7 @@
             <a:pPr>
               <a:defRPr sz="2400" b="0">
                 <a:solidFill>
-                  <a:srgbClr val="F3EEE8"/>
+                  <a:srgbClr val="F1EEE8"/>
                 </a:solidFill>
                 <a:latin typeface="Arial"/>
                 <a:ea typeface="Arial"/>
@@ -6723,7 +6723,7 @@
             <a:r>
               <a:rPr sz="2400" b="0">
                 <a:solidFill>
-                  <a:srgbClr val="F3EEE8"/>
+                  <a:srgbClr val="F1EEE8"/>
                 </a:solidFill>
                 <a:latin typeface="Arial"/>
                 <a:ea typeface="Arial"/>
@@ -6736,7 +6736,7 @@
             <a:pPr>
               <a:defRPr sz="2400" b="0">
                 <a:solidFill>
-                  <a:srgbClr val="F3EEE8"/>
+                  <a:srgbClr val="F1EEE8"/>
                 </a:solidFill>
                 <a:latin typeface="Arial"/>
                 <a:ea typeface="Arial"/>
@@ -6746,7 +6746,7 @@
             <a:r>
               <a:rPr sz="2400" b="0">
                 <a:solidFill>
-                  <a:srgbClr val="F3EEE8"/>
+                  <a:srgbClr val="F1EEE8"/>
                 </a:solidFill>
                 <a:latin typeface="Arial"/>
                 <a:ea typeface="Arial"/>
@@ -6762,7 +6762,7 @@
           <p:cNvPr id="10" name="">
             <a:extLst xmlns:a="http://schemas.openxmlformats.org/drawingml/2006/main">
               <a:ext uri="{FF2B5EF4-FFF2-40B4-BE49-F238E27FC236}">
-                <a16:creationId xmlns:a16="http://schemas.microsoft.com/office/drawing/2014/main" id="{E73EC17E-9195-4554-90C5-E34755D2EDCA}"/>
+                <a16:creationId xmlns:a16="http://schemas.microsoft.com/office/drawing/2014/main" id="{2CC1F011-F5DC-4F95-8122-8EB56D71EF90}"/>
               </a:ext>
             </a:extLst>
           </p:cNvPr>
@@ -6790,7 +6790,7 @@
             <a:defPPr>
               <a:defRPr sz="1425" b="0">
                 <a:solidFill>
-                  <a:srgbClr val="93A4AA"/>
+                  <a:srgbClr val="A9B8BC"/>
                 </a:solidFill>
                 <a:latin typeface="Arial"/>
                 <a:ea typeface="Arial"/>
@@ -6802,7 +6802,7 @@
             <a:pPr>
               <a:defRPr sz="1425" b="0">
                 <a:solidFill>
-                  <a:srgbClr val="93A4AA"/>
+                  <a:srgbClr val="A9B8BC"/>
                 </a:solidFill>
                 <a:latin typeface="Arial"/>
                 <a:ea typeface="Arial"/>
@@ -6812,7 +6812,7 @@
             <a:r>
               <a:rPr sz="1425" b="0">
                 <a:solidFill>
-                  <a:srgbClr val="93A4AA"/>
+                  <a:srgbClr val="A9B8BC"/>
                 </a:solidFill>
                 <a:latin typeface="Arial"/>
                 <a:ea typeface="Arial"/>
@@ -6826,7 +6826,7 @@
     </p:spTree>
     <p:extLst>
       <p:ext uri="{BB962C8B-B14F-4D97-AF65-F5344CB8AC3E}">
-        <p14:creationId xmlns:p14="http://schemas.microsoft.com/office/powerpoint/2010/main" val="1913195226"/>
+        <p14:creationId xmlns:p14="http://schemas.microsoft.com/office/powerpoint/2010/main" val="1808561319"/>
       </p:ext>
     </p:extLst>
   </p:cSld>
@@ -6839,7 +6839,7 @@
     <p:bg>
       <p:bgPr>
         <a:solidFill xmlns:a="http://schemas.openxmlformats.org/drawingml/2006/main">
-          <a:srgbClr val="202433"/>
+          <a:srgbClr val="222636"/>
         </a:solidFill>
       </p:bgPr>
     </p:bg>
@@ -6857,7 +6857,7 @@
           <p:cNvPr id="10" name="">
             <a:extLst xmlns:a="http://schemas.openxmlformats.org/drawingml/2006/main">
               <a:ext uri="{FF2B5EF4-FFF2-40B4-BE49-F238E27FC236}">
-                <a16:creationId xmlns:a16="http://schemas.microsoft.com/office/drawing/2014/main" id="{CE129119-8BD6-4B5C-9D1F-04C541073F95}"/>
+                <a16:creationId xmlns:a16="http://schemas.microsoft.com/office/drawing/2014/main" id="{C679500C-CD2F-42C0-8587-63CEC52920CE}"/>
               </a:ext>
             </a:extLst>
           </p:cNvPr>
@@ -6885,7 +6885,7 @@
             <a:defPPr>
               <a:defRPr sz="4350" b="1">
                 <a:solidFill>
-                  <a:srgbClr val="BD9A78"/>
+                  <a:srgbClr val="C6A27F"/>
                 </a:solidFill>
                 <a:latin typeface="Arial"/>
                 <a:ea typeface="Arial"/>
@@ -6897,7 +6897,7 @@
             <a:pPr>
               <a:defRPr sz="4350" b="1">
                 <a:solidFill>
-                  <a:srgbClr val="BD9A78"/>
+                  <a:srgbClr val="C6A27F"/>
                 </a:solidFill>
                 <a:latin typeface="Arial"/>
                 <a:ea typeface="Arial"/>
@@ -6907,7 +6907,7 @@
             <a:r>
               <a:rPr sz="4350" b="1">
                 <a:solidFill>
-                  <a:srgbClr val="BD9A78"/>
+                  <a:srgbClr val="C6A27F"/>
                 </a:solidFill>
                 <a:latin typeface="Arial"/>
                 <a:ea typeface="Arial"/>
@@ -6923,7 +6923,7 @@
           <p:cNvPr id="2" name="">
             <a:extLst xmlns:a="http://schemas.openxmlformats.org/drawingml/2006/main">
               <a:ext uri="{FF2B5EF4-FFF2-40B4-BE49-F238E27FC236}">
-                <a16:creationId xmlns:a16="http://schemas.microsoft.com/office/drawing/2014/main" id="{C798596E-053D-47E2-AC21-9B780F45BFF0}"/>
+                <a16:creationId xmlns:a16="http://schemas.microsoft.com/office/drawing/2014/main" id="{0F71A618-B360-46E1-AAC5-AD287212A83F}"/>
               </a:ext>
             </a:extLst>
           </p:cNvPr>
@@ -6951,7 +6951,7 @@
             <a:defPPr>
               <a:defRPr sz="2400" b="1">
                 <a:solidFill>
-                  <a:srgbClr val="BD9A78"/>
+                  <a:srgbClr val="C6A27F"/>
                 </a:solidFill>
                 <a:latin typeface="Arial"/>
                 <a:ea typeface="Arial"/>
@@ -6963,7 +6963,7 @@
             <a:pPr>
               <a:defRPr sz="2400" b="1">
                 <a:solidFill>
-                  <a:srgbClr val="BD9A78"/>
+                  <a:srgbClr val="C6A27F"/>
                 </a:solidFill>
                 <a:latin typeface="Arial"/>
                 <a:ea typeface="Arial"/>
@@ -6973,7 +6973,7 @@
             <a:r>
               <a:rPr sz="2400" b="1">
                 <a:solidFill>
-                  <a:srgbClr val="BD9A78"/>
+                  <a:srgbClr val="C6A27F"/>
                 </a:solidFill>
                 <a:latin typeface="Arial"/>
                 <a:ea typeface="Arial"/>
@@ -6989,7 +6989,7 @@
           <p:cNvPr id="3" name="">
             <a:extLst xmlns:a="http://schemas.openxmlformats.org/drawingml/2006/main">
               <a:ext uri="{FF2B5EF4-FFF2-40B4-BE49-F238E27FC236}">
-                <a16:creationId xmlns:a16="http://schemas.microsoft.com/office/drawing/2014/main" id="{5D1498C9-94BB-45DB-8E3E-A0F9B4083E8D}"/>
+                <a16:creationId xmlns:a16="http://schemas.microsoft.com/office/drawing/2014/main" id="{14D63319-ECD0-46F7-BFCF-62866A1411D5}"/>
               </a:ext>
             </a:extLst>
           </p:cNvPr>
@@ -7017,7 +7017,7 @@
             <a:defPPr>
               <a:defRPr sz="2400" b="0">
                 <a:solidFill>
-                  <a:srgbClr val="F3EEE8"/>
+                  <a:srgbClr val="F1EEE8"/>
                 </a:solidFill>
                 <a:latin typeface="Arial"/>
                 <a:ea typeface="Arial"/>
@@ -7029,7 +7029,7 @@
             <a:pPr>
               <a:defRPr sz="2400" b="0">
                 <a:solidFill>
-                  <a:srgbClr val="F3EEE8"/>
+                  <a:srgbClr val="F1EEE8"/>
                 </a:solidFill>
                 <a:latin typeface="Arial"/>
                 <a:ea typeface="Arial"/>
@@ -7039,7 +7039,7 @@
             <a:r>
               <a:rPr sz="2400" b="0">
                 <a:solidFill>
-                  <a:srgbClr val="F3EEE8"/>
+                  <a:srgbClr val="F1EEE8"/>
                 </a:solidFill>
                 <a:latin typeface="Arial"/>
                 <a:ea typeface="Arial"/>
@@ -7052,7 +7052,7 @@
             <a:pPr>
               <a:defRPr sz="2400" b="0">
                 <a:solidFill>
-                  <a:srgbClr val="F3EEE8"/>
+                  <a:srgbClr val="F1EEE8"/>
                 </a:solidFill>
                 <a:latin typeface="Arial"/>
                 <a:ea typeface="Arial"/>
@@ -7062,7 +7062,7 @@
             <a:r>
               <a:rPr sz="2400" b="0">
                 <a:solidFill>
-                  <a:srgbClr val="F3EEE8"/>
+                  <a:srgbClr val="F1EEE8"/>
                 </a:solidFill>
                 <a:latin typeface="Arial"/>
                 <a:ea typeface="Arial"/>
@@ -7078,7 +7078,7 @@
           <p:cNvPr id="4" name="">
             <a:extLst xmlns:a="http://schemas.openxmlformats.org/drawingml/2006/main">
               <a:ext uri="{FF2B5EF4-FFF2-40B4-BE49-F238E27FC236}">
-                <a16:creationId xmlns:a16="http://schemas.microsoft.com/office/drawing/2014/main" id="{C555A965-E8A0-40BB-8926-8245690A9CF1}"/>
+                <a16:creationId xmlns:a16="http://schemas.microsoft.com/office/drawing/2014/main" id="{536E27C4-85AB-4B68-AA52-C2E197E8CC42}"/>
               </a:ext>
             </a:extLst>
           </p:cNvPr>
@@ -7106,7 +7106,7 @@
             <a:defPPr>
               <a:defRPr sz="2400" b="1">
                 <a:solidFill>
-                  <a:srgbClr val="BD9A78"/>
+                  <a:srgbClr val="C6A27F"/>
                 </a:solidFill>
                 <a:latin typeface="Arial"/>
                 <a:ea typeface="Arial"/>
@@ -7118,7 +7118,7 @@
             <a:pPr>
               <a:defRPr sz="2400" b="1">
                 <a:solidFill>
-                  <a:srgbClr val="BD9A78"/>
+                  <a:srgbClr val="C6A27F"/>
                 </a:solidFill>
                 <a:latin typeface="Arial"/>
                 <a:ea typeface="Arial"/>
@@ -7128,7 +7128,7 @@
             <a:r>
               <a:rPr sz="2400" b="1">
                 <a:solidFill>
-                  <a:srgbClr val="BD9A78"/>
+                  <a:srgbClr val="C6A27F"/>
                 </a:solidFill>
                 <a:latin typeface="Arial"/>
                 <a:ea typeface="Arial"/>
@@ -7144,7 +7144,7 @@
           <p:cNvPr id="5" name="">
             <a:extLst xmlns:a="http://schemas.openxmlformats.org/drawingml/2006/main">
               <a:ext uri="{FF2B5EF4-FFF2-40B4-BE49-F238E27FC236}">
-                <a16:creationId xmlns:a16="http://schemas.microsoft.com/office/drawing/2014/main" id="{2148B726-21DC-44B7-8952-526F39F35437}"/>
+                <a16:creationId xmlns:a16="http://schemas.microsoft.com/office/drawing/2014/main" id="{93291EF4-31FF-4EFB-8985-71959224F54A}"/>
               </a:ext>
             </a:extLst>
           </p:cNvPr>
@@ -7172,7 +7172,7 @@
             <a:defPPr>
               <a:defRPr sz="2400" b="0">
                 <a:solidFill>
-                  <a:srgbClr val="F3EEE8"/>
+                  <a:srgbClr val="F1EEE8"/>
                 </a:solidFill>
                 <a:latin typeface="Arial"/>
                 <a:ea typeface="Arial"/>
@@ -7184,7 +7184,7 @@
             <a:pPr>
               <a:defRPr sz="2400" b="0">
                 <a:solidFill>
-                  <a:srgbClr val="F3EEE8"/>
+                  <a:srgbClr val="F1EEE8"/>
                 </a:solidFill>
                 <a:latin typeface="Arial"/>
                 <a:ea typeface="Arial"/>
@@ -7194,7 +7194,7 @@
             <a:r>
               <a:rPr sz="2400" b="0">
                 <a:solidFill>
-                  <a:srgbClr val="F3EEE8"/>
+                  <a:srgbClr val="F1EEE8"/>
                 </a:solidFill>
                 <a:latin typeface="Arial"/>
                 <a:ea typeface="Arial"/>
@@ -7207,7 +7207,7 @@
             <a:pPr>
               <a:defRPr sz="2400" b="0">
                 <a:solidFill>
-                  <a:srgbClr val="F3EEE8"/>
+                  <a:srgbClr val="F1EEE8"/>
                 </a:solidFill>
                 <a:latin typeface="Arial"/>
                 <a:ea typeface="Arial"/>
@@ -7217,7 +7217,7 @@
             <a:r>
               <a:rPr sz="2400" b="0">
                 <a:solidFill>
-                  <a:srgbClr val="F3EEE8"/>
+                  <a:srgbClr val="F1EEE8"/>
                 </a:solidFill>
                 <a:latin typeface="Arial"/>
                 <a:ea typeface="Arial"/>
@@ -7233,7 +7233,7 @@
           <p:cNvPr id="6" name="">
             <a:extLst xmlns:a="http://schemas.openxmlformats.org/drawingml/2006/main">
               <a:ext uri="{FF2B5EF4-FFF2-40B4-BE49-F238E27FC236}">
-                <a16:creationId xmlns:a16="http://schemas.microsoft.com/office/drawing/2014/main" id="{4D4B31B9-BBEC-4234-BC55-4622EAE4691A}"/>
+                <a16:creationId xmlns:a16="http://schemas.microsoft.com/office/drawing/2014/main" id="{A63370BC-7B6D-4824-9F28-BF332D1B2E4A}"/>
               </a:ext>
             </a:extLst>
           </p:cNvPr>
@@ -7261,7 +7261,7 @@
             <a:defPPr>
               <a:defRPr sz="2400" b="1">
                 <a:solidFill>
-                  <a:srgbClr val="BD9A78"/>
+                  <a:srgbClr val="C6A27F"/>
                 </a:solidFill>
                 <a:latin typeface="Arial"/>
                 <a:ea typeface="Arial"/>
@@ -7273,7 +7273,7 @@
             <a:pPr>
               <a:defRPr sz="2400" b="1">
                 <a:solidFill>
-                  <a:srgbClr val="BD9A78"/>
+                  <a:srgbClr val="C6A27F"/>
                 </a:solidFill>
                 <a:latin typeface="Arial"/>
                 <a:ea typeface="Arial"/>
@@ -7283,7 +7283,7 @@
             <a:r>
               <a:rPr sz="2400" b="1">
                 <a:solidFill>
-                  <a:srgbClr val="BD9A78"/>
+                  <a:srgbClr val="C6A27F"/>
                 </a:solidFill>
                 <a:latin typeface="Arial"/>
                 <a:ea typeface="Arial"/>
@@ -7299,7 +7299,7 @@
           <p:cNvPr id="7" name="">
             <a:extLst xmlns:a="http://schemas.openxmlformats.org/drawingml/2006/main">
               <a:ext uri="{FF2B5EF4-FFF2-40B4-BE49-F238E27FC236}">
-                <a16:creationId xmlns:a16="http://schemas.microsoft.com/office/drawing/2014/main" id="{F3021A82-FDAA-48A5-9FE8-2D8701D3F993}"/>
+                <a16:creationId xmlns:a16="http://schemas.microsoft.com/office/drawing/2014/main" id="{2799FE58-11C8-4E2B-A777-7D6252C7D2FB}"/>
               </a:ext>
             </a:extLst>
           </p:cNvPr>
@@ -7327,7 +7327,7 @@
             <a:defPPr>
               <a:defRPr sz="2400" b="0">
                 <a:solidFill>
-                  <a:srgbClr val="F3EEE8"/>
+                  <a:srgbClr val="F1EEE8"/>
                 </a:solidFill>
                 <a:latin typeface="Arial"/>
                 <a:ea typeface="Arial"/>
@@ -7339,7 +7339,7 @@
             <a:pPr>
               <a:defRPr sz="2400" b="0">
                 <a:solidFill>
-                  <a:srgbClr val="F3EEE8"/>
+                  <a:srgbClr val="F1EEE8"/>
                 </a:solidFill>
                 <a:latin typeface="Arial"/>
                 <a:ea typeface="Arial"/>
@@ -7349,7 +7349,7 @@
             <a:r>
               <a:rPr sz="2400" b="0">
                 <a:solidFill>
-                  <a:srgbClr val="F3EEE8"/>
+                  <a:srgbClr val="F1EEE8"/>
                 </a:solidFill>
                 <a:latin typeface="Arial"/>
                 <a:ea typeface="Arial"/>
@@ -7365,7 +7365,7 @@
           <p:cNvPr id="8" name="">
             <a:extLst xmlns:a="http://schemas.openxmlformats.org/drawingml/2006/main">
               <a:ext uri="{FF2B5EF4-FFF2-40B4-BE49-F238E27FC236}">
-                <a16:creationId xmlns:a16="http://schemas.microsoft.com/office/drawing/2014/main" id="{32252FBD-D927-4B56-81DF-CCB5B9029F7F}"/>
+                <a16:creationId xmlns:a16="http://schemas.microsoft.com/office/drawing/2014/main" id="{F95308D3-613B-4B0F-99FD-5D39B03FF894}"/>
               </a:ext>
             </a:extLst>
           </p:cNvPr>
@@ -7393,7 +7393,7 @@
             <a:defPPr>
               <a:defRPr sz="1875" b="0">
                 <a:solidFill>
-                  <a:srgbClr val="93A4AA"/>
+                  <a:srgbClr val="A9B8BC"/>
                 </a:solidFill>
                 <a:latin typeface="Arial"/>
                 <a:ea typeface="Arial"/>
@@ -7405,7 +7405,7 @@
             <a:pPr>
               <a:defRPr sz="1875" b="0">
                 <a:solidFill>
-                  <a:srgbClr val="93A4AA"/>
+                  <a:srgbClr val="A9B8BC"/>
                 </a:solidFill>
                 <a:latin typeface="Arial"/>
                 <a:ea typeface="Arial"/>
@@ -7415,7 +7415,7 @@
             <a:r>
               <a:rPr sz="1875" b="0">
                 <a:solidFill>
-                  <a:srgbClr val="93A4AA"/>
+                  <a:srgbClr val="A9B8BC"/>
                 </a:solidFill>
                 <a:latin typeface="Arial"/>
                 <a:ea typeface="Arial"/>
@@ -7431,7 +7431,7 @@
           <p:cNvPr id="9" name="">
             <a:extLst xmlns:a="http://schemas.openxmlformats.org/drawingml/2006/main">
               <a:ext uri="{FF2B5EF4-FFF2-40B4-BE49-F238E27FC236}">
-                <a16:creationId xmlns:a16="http://schemas.microsoft.com/office/drawing/2014/main" id="{9CE6F990-000F-486D-9EBF-8C07A9C84D93}"/>
+                <a16:creationId xmlns:a16="http://schemas.microsoft.com/office/drawing/2014/main" id="{5812F804-2686-488F-B2B1-233487619A1B}"/>
               </a:ext>
             </a:extLst>
           </p:cNvPr>
@@ -7459,7 +7459,7 @@
             <a:defPPr>
               <a:defRPr sz="1425" b="0">
                 <a:solidFill>
-                  <a:srgbClr val="93A4AA"/>
+                  <a:srgbClr val="A9B8BC"/>
                 </a:solidFill>
                 <a:latin typeface="Arial"/>
                 <a:ea typeface="Arial"/>
@@ -7471,7 +7471,7 @@
             <a:pPr>
               <a:defRPr sz="1425" b="0">
                 <a:solidFill>
-                  <a:srgbClr val="93A4AA"/>
+                  <a:srgbClr val="A9B8BC"/>
                 </a:solidFill>
                 <a:latin typeface="Arial"/>
                 <a:ea typeface="Arial"/>
@@ -7481,7 +7481,7 @@
             <a:r>
               <a:rPr sz="1425" b="0">
                 <a:solidFill>
-                  <a:srgbClr val="93A4AA"/>
+                  <a:srgbClr val="A9B8BC"/>
                 </a:solidFill>
                 <a:latin typeface="Arial"/>
                 <a:ea typeface="Arial"/>
@@ -7495,7 +7495,7 @@
     </p:spTree>
     <p:extLst>
       <p:ext uri="{BB962C8B-B14F-4D97-AF65-F5344CB8AC3E}">
-        <p14:creationId xmlns:p14="http://schemas.microsoft.com/office/powerpoint/2010/main" val="796710569"/>
+        <p14:creationId xmlns:p14="http://schemas.microsoft.com/office/powerpoint/2010/main" val="93432093"/>
       </p:ext>
     </p:extLst>
   </p:cSld>
@@ -7508,7 +7508,7 @@
     <p:bg>
       <p:bgPr>
         <a:solidFill xmlns:a="http://schemas.openxmlformats.org/drawingml/2006/main">
-          <a:srgbClr val="202433"/>
+          <a:srgbClr val="222636"/>
         </a:solidFill>
       </p:bgPr>
     </p:bg>
@@ -7526,7 +7526,7 @@
           <p:cNvPr id="12" name="">
             <a:extLst xmlns:a="http://schemas.openxmlformats.org/drawingml/2006/main">
               <a:ext uri="{FF2B5EF4-FFF2-40B4-BE49-F238E27FC236}">
-                <a16:creationId xmlns:a16="http://schemas.microsoft.com/office/drawing/2014/main" id="{9490B5BE-3D11-4328-97A1-7B0C28A43264}"/>
+                <a16:creationId xmlns:a16="http://schemas.microsoft.com/office/drawing/2014/main" id="{558DD922-6FE0-4DBF-A964-84543EA1CADE}"/>
               </a:ext>
             </a:extLst>
           </p:cNvPr>
@@ -7554,7 +7554,7 @@
             <a:defPPr>
               <a:defRPr sz="4350" b="1">
                 <a:solidFill>
-                  <a:srgbClr val="BD9A78"/>
+                  <a:srgbClr val="C6A27F"/>
                 </a:solidFill>
                 <a:latin typeface="Arial"/>
                 <a:ea typeface="Arial"/>
@@ -7566,7 +7566,7 @@
             <a:pPr>
               <a:defRPr sz="4350" b="1">
                 <a:solidFill>
-                  <a:srgbClr val="BD9A78"/>
+                  <a:srgbClr val="C6A27F"/>
                 </a:solidFill>
                 <a:latin typeface="Arial"/>
                 <a:ea typeface="Arial"/>
@@ -7576,7 +7576,7 @@
             <a:r>
               <a:rPr sz="4350" b="1">
                 <a:solidFill>
-                  <a:srgbClr val="BD9A78"/>
+                  <a:srgbClr val="C6A27F"/>
                 </a:solidFill>
                 <a:latin typeface="Arial"/>
                 <a:ea typeface="Arial"/>
@@ -7592,7 +7592,7 @@
           <p:cNvPr id="2" name="">
             <a:extLst xmlns:a="http://schemas.openxmlformats.org/drawingml/2006/main">
               <a:ext uri="{FF2B5EF4-FFF2-40B4-BE49-F238E27FC236}">
-                <a16:creationId xmlns:a16="http://schemas.microsoft.com/office/drawing/2014/main" id="{0C51615D-E4FE-435E-BDAA-96C5D04908DE}"/>
+                <a16:creationId xmlns:a16="http://schemas.microsoft.com/office/drawing/2014/main" id="{8D85F01D-461D-4A93-AE7D-89CEF508C9A1}"/>
               </a:ext>
             </a:extLst>
           </p:cNvPr>
@@ -7620,7 +7620,7 @@
             <a:defPPr>
               <a:defRPr sz="2400" b="1">
                 <a:solidFill>
-                  <a:srgbClr val="BD9A78"/>
+                  <a:srgbClr val="C6A27F"/>
                 </a:solidFill>
                 <a:latin typeface="Arial"/>
                 <a:ea typeface="Arial"/>
@@ -7632,7 +7632,7 @@
             <a:pPr>
               <a:defRPr sz="2400" b="1">
                 <a:solidFill>
-                  <a:srgbClr val="BD9A78"/>
+                  <a:srgbClr val="C6A27F"/>
                 </a:solidFill>
                 <a:latin typeface="Arial"/>
                 <a:ea typeface="Arial"/>
@@ -7642,7 +7642,7 @@
             <a:r>
               <a:rPr sz="2400" b="1">
                 <a:solidFill>
-                  <a:srgbClr val="BD9A78"/>
+                  <a:srgbClr val="C6A27F"/>
                 </a:solidFill>
                 <a:latin typeface="Arial"/>
                 <a:ea typeface="Arial"/>
@@ -7658,7 +7658,7 @@
           <p:cNvPr id="3" name="">
             <a:extLst xmlns:a="http://schemas.openxmlformats.org/drawingml/2006/main">
               <a:ext uri="{FF2B5EF4-FFF2-40B4-BE49-F238E27FC236}">
-                <a16:creationId xmlns:a16="http://schemas.microsoft.com/office/drawing/2014/main" id="{9FAAD13B-EF32-452C-BE62-F2567710E406}"/>
+                <a16:creationId xmlns:a16="http://schemas.microsoft.com/office/drawing/2014/main" id="{4A4CDFEB-E521-4888-84AE-61439795B917}"/>
               </a:ext>
             </a:extLst>
           </p:cNvPr>
@@ -7686,7 +7686,7 @@
             <a:defPPr>
               <a:defRPr sz="2400" b="0">
                 <a:solidFill>
-                  <a:srgbClr val="F3EEE8"/>
+                  <a:srgbClr val="F1EEE8"/>
                 </a:solidFill>
                 <a:latin typeface="Arial"/>
                 <a:ea typeface="Arial"/>
@@ -7698,7 +7698,7 @@
             <a:pPr>
               <a:defRPr sz="2400" b="0">
                 <a:solidFill>
-                  <a:srgbClr val="F3EEE8"/>
+                  <a:srgbClr val="F1EEE8"/>
                 </a:solidFill>
                 <a:latin typeface="Arial"/>
                 <a:ea typeface="Arial"/>
@@ -7708,7 +7708,7 @@
             <a:r>
               <a:rPr sz="2400" b="0">
                 <a:solidFill>
-                  <a:srgbClr val="F3EEE8"/>
+                  <a:srgbClr val="F1EEE8"/>
                 </a:solidFill>
                 <a:latin typeface="Arial"/>
                 <a:ea typeface="Arial"/>
@@ -7724,7 +7724,7 @@
           <p:cNvPr id="4" name="">
             <a:extLst xmlns:a="http://schemas.openxmlformats.org/drawingml/2006/main">
               <a:ext uri="{FF2B5EF4-FFF2-40B4-BE49-F238E27FC236}">
-                <a16:creationId xmlns:a16="http://schemas.microsoft.com/office/drawing/2014/main" id="{298114B3-5D43-48C2-9954-8222F7CC436C}"/>
+                <a16:creationId xmlns:a16="http://schemas.microsoft.com/office/drawing/2014/main" id="{E8DE7065-F4C9-4F89-8D1E-D7E100B9E9F8}"/>
               </a:ext>
             </a:extLst>
           </p:cNvPr>
@@ -7752,7 +7752,7 @@
             <a:defPPr>
               <a:defRPr sz="2400" b="1">
                 <a:solidFill>
-                  <a:srgbClr val="BD9A78"/>
+                  <a:srgbClr val="C6A27F"/>
                 </a:solidFill>
                 <a:latin typeface="Arial"/>
                 <a:ea typeface="Arial"/>
@@ -7764,7 +7764,7 @@
             <a:pPr>
               <a:defRPr sz="2400" b="1">
                 <a:solidFill>
-                  <a:srgbClr val="BD9A78"/>
+                  <a:srgbClr val="C6A27F"/>
                 </a:solidFill>
                 <a:latin typeface="Arial"/>
                 <a:ea typeface="Arial"/>
@@ -7774,7 +7774,7 @@
             <a:r>
               <a:rPr sz="2400" b="1">
                 <a:solidFill>
-                  <a:srgbClr val="BD9A78"/>
+                  <a:srgbClr val="C6A27F"/>
                 </a:solidFill>
                 <a:latin typeface="Arial"/>
                 <a:ea typeface="Arial"/>
@@ -7790,7 +7790,7 @@
           <p:cNvPr id="5" name="">
             <a:extLst xmlns:a="http://schemas.openxmlformats.org/drawingml/2006/main">
               <a:ext uri="{FF2B5EF4-FFF2-40B4-BE49-F238E27FC236}">
-                <a16:creationId xmlns:a16="http://schemas.microsoft.com/office/drawing/2014/main" id="{BAADE615-AEAA-4C67-AC4C-ABBBE746C049}"/>
+                <a16:creationId xmlns:a16="http://schemas.microsoft.com/office/drawing/2014/main" id="{24FE6506-E819-427F-A535-D083D77A21F8}"/>
               </a:ext>
             </a:extLst>
           </p:cNvPr>
@@ -7818,7 +7818,7 @@
             <a:defPPr>
               <a:defRPr sz="2400" b="0">
                 <a:solidFill>
-                  <a:srgbClr val="F3EEE8"/>
+                  <a:srgbClr val="F1EEE8"/>
                 </a:solidFill>
                 <a:latin typeface="Arial"/>
                 <a:ea typeface="Arial"/>
@@ -7830,7 +7830,7 @@
             <a:pPr>
               <a:defRPr sz="2400" b="0">
                 <a:solidFill>
-                  <a:srgbClr val="F3EEE8"/>
+                  <a:srgbClr val="F1EEE8"/>
                 </a:solidFill>
                 <a:latin typeface="Arial"/>
                 <a:ea typeface="Arial"/>
@@ -7840,7 +7840,7 @@
             <a:r>
               <a:rPr sz="2400" b="0">
                 <a:solidFill>
-                  <a:srgbClr val="F3EEE8"/>
+                  <a:srgbClr val="F1EEE8"/>
                 </a:solidFill>
                 <a:latin typeface="Arial"/>
                 <a:ea typeface="Arial"/>
@@ -7853,7 +7853,7 @@
             <a:pPr>
               <a:defRPr sz="2400" b="0">
                 <a:solidFill>
-                  <a:srgbClr val="F3EEE8"/>
+                  <a:srgbClr val="F1EEE8"/>
                 </a:solidFill>
                 <a:latin typeface="Arial"/>
                 <a:ea typeface="Arial"/>
@@ -7863,7 +7863,7 @@
             <a:r>
               <a:rPr sz="2400" b="0">
                 <a:solidFill>
-                  <a:srgbClr val="F3EEE8"/>
+                  <a:srgbClr val="F1EEE8"/>
                 </a:solidFill>
                 <a:latin typeface="Arial"/>
                 <a:ea typeface="Arial"/>
@@ -7879,7 +7879,7 @@
           <p:cNvPr id="6" name="">
             <a:extLst xmlns:a="http://schemas.openxmlformats.org/drawingml/2006/main">
               <a:ext uri="{FF2B5EF4-FFF2-40B4-BE49-F238E27FC236}">
-                <a16:creationId xmlns:a16="http://schemas.microsoft.com/office/drawing/2014/main" id="{3F0B38C4-E5C2-4D7E-AE67-7594A899058C}"/>
+                <a16:creationId xmlns:a16="http://schemas.microsoft.com/office/drawing/2014/main" id="{B6D5534C-996C-483C-A9D5-01C8A77AE927}"/>
               </a:ext>
             </a:extLst>
           </p:cNvPr>
@@ -7907,7 +7907,7 @@
             <a:defPPr>
               <a:defRPr sz="2400" b="1">
                 <a:solidFill>
-                  <a:srgbClr val="BD9A78"/>
+                  <a:srgbClr val="C6A27F"/>
                 </a:solidFill>
                 <a:latin typeface="Arial"/>
                 <a:ea typeface="Arial"/>
@@ -7919,7 +7919,7 @@
             <a:pPr>
               <a:defRPr sz="2400" b="1">
                 <a:solidFill>
-                  <a:srgbClr val="BD9A78"/>
+                  <a:srgbClr val="C6A27F"/>
                 </a:solidFill>
                 <a:latin typeface="Arial"/>
                 <a:ea typeface="Arial"/>
@@ -7929,7 +7929,7 @@
             <a:r>
               <a:rPr sz="2400" b="1">
                 <a:solidFill>
-                  <a:srgbClr val="BD9A78"/>
+                  <a:srgbClr val="C6A27F"/>
                 </a:solidFill>
                 <a:latin typeface="Arial"/>
                 <a:ea typeface="Arial"/>
@@ -7945,7 +7945,7 @@
           <p:cNvPr id="7" name="">
             <a:extLst xmlns:a="http://schemas.openxmlformats.org/drawingml/2006/main">
               <a:ext uri="{FF2B5EF4-FFF2-40B4-BE49-F238E27FC236}">
-                <a16:creationId xmlns:a16="http://schemas.microsoft.com/office/drawing/2014/main" id="{9C9A23F9-ECD1-48B1-A823-2C5E01D5392C}"/>
+                <a16:creationId xmlns:a16="http://schemas.microsoft.com/office/drawing/2014/main" id="{1234271A-98DE-4FD6-A4B9-49067BD981C5}"/>
               </a:ext>
             </a:extLst>
           </p:cNvPr>
@@ -7973,7 +7973,7 @@
             <a:defPPr>
               <a:defRPr sz="2400" b="0">
                 <a:solidFill>
-                  <a:srgbClr val="F3EEE8"/>
+                  <a:srgbClr val="F1EEE8"/>
                 </a:solidFill>
                 <a:latin typeface="Arial"/>
                 <a:ea typeface="Arial"/>
@@ -7985,7 +7985,7 @@
             <a:pPr>
               <a:defRPr sz="2400" b="0">
                 <a:solidFill>
-                  <a:srgbClr val="F3EEE8"/>
+                  <a:srgbClr val="F1EEE8"/>
                 </a:solidFill>
                 <a:latin typeface="Arial"/>
                 <a:ea typeface="Arial"/>
@@ -7995,7 +7995,7 @@
             <a:r>
               <a:rPr sz="2400" b="0">
                 <a:solidFill>
-                  <a:srgbClr val="F3EEE8"/>
+                  <a:srgbClr val="F1EEE8"/>
                 </a:solidFill>
                 <a:latin typeface="Arial"/>
                 <a:ea typeface="Arial"/>
@@ -8008,7 +8008,7 @@
             <a:pPr>
               <a:defRPr sz="2400" b="0">
                 <a:solidFill>
-                  <a:srgbClr val="F3EEE8"/>
+                  <a:srgbClr val="F1EEE8"/>
                 </a:solidFill>
                 <a:latin typeface="Arial"/>
                 <a:ea typeface="Arial"/>
@@ -8018,7 +8018,7 @@
             <a:r>
               <a:rPr sz="2400" b="0">
                 <a:solidFill>
-                  <a:srgbClr val="F3EEE8"/>
+                  <a:srgbClr val="F1EEE8"/>
                 </a:solidFill>
                 <a:latin typeface="Arial"/>
                 <a:ea typeface="Arial"/>
@@ -8034,7 +8034,7 @@
           <p:cNvPr id="8" name="">
             <a:extLst xmlns:a="http://schemas.openxmlformats.org/drawingml/2006/main">
               <a:ext uri="{FF2B5EF4-FFF2-40B4-BE49-F238E27FC236}">
-                <a16:creationId xmlns:a16="http://schemas.microsoft.com/office/drawing/2014/main" id="{FFCAEED4-E5B8-42C8-A057-45D90B678EB4}"/>
+                <a16:creationId xmlns:a16="http://schemas.microsoft.com/office/drawing/2014/main" id="{AC832DE7-0850-47D3-A266-958E73E161BC}"/>
               </a:ext>
             </a:extLst>
           </p:cNvPr>
@@ -8062,7 +8062,7 @@
             <a:defPPr>
               <a:defRPr sz="2400" b="1">
                 <a:solidFill>
-                  <a:srgbClr val="BD9A78"/>
+                  <a:srgbClr val="C6A27F"/>
                 </a:solidFill>
                 <a:latin typeface="Arial"/>
                 <a:ea typeface="Arial"/>
@@ -8074,7 +8074,7 @@
             <a:pPr>
               <a:defRPr sz="2400" b="1">
                 <a:solidFill>
-                  <a:srgbClr val="BD9A78"/>
+                  <a:srgbClr val="C6A27F"/>
                 </a:solidFill>
                 <a:latin typeface="Arial"/>
                 <a:ea typeface="Arial"/>
@@ -8084,7 +8084,7 @@
             <a:r>
               <a:rPr sz="2400" b="1">
                 <a:solidFill>
-                  <a:srgbClr val="BD9A78"/>
+                  <a:srgbClr val="C6A27F"/>
                 </a:solidFill>
                 <a:latin typeface="Arial"/>
                 <a:ea typeface="Arial"/>
@@ -8100,7 +8100,7 @@
           <p:cNvPr id="9" name="">
             <a:extLst xmlns:a="http://schemas.openxmlformats.org/drawingml/2006/main">
               <a:ext uri="{FF2B5EF4-FFF2-40B4-BE49-F238E27FC236}">
-                <a16:creationId xmlns:a16="http://schemas.microsoft.com/office/drawing/2014/main" id="{0856A674-3739-47BD-8072-085565D77412}"/>
+                <a16:creationId xmlns:a16="http://schemas.microsoft.com/office/drawing/2014/main" id="{59600768-9A70-4ECF-9092-6B04027D41D9}"/>
               </a:ext>
             </a:extLst>
           </p:cNvPr>
@@ -8128,7 +8128,7 @@
             <a:defPPr>
               <a:defRPr sz="2400" b="0">
                 <a:solidFill>
-                  <a:srgbClr val="F3EEE8"/>
+                  <a:srgbClr val="F1EEE8"/>
                 </a:solidFill>
                 <a:latin typeface="Arial"/>
                 <a:ea typeface="Arial"/>
@@ -8140,7 +8140,7 @@
             <a:pPr>
               <a:defRPr sz="2400" b="0">
                 <a:solidFill>
-                  <a:srgbClr val="F3EEE8"/>
+                  <a:srgbClr val="F1EEE8"/>
                 </a:solidFill>
                 <a:latin typeface="Arial"/>
                 <a:ea typeface="Arial"/>
@@ -8150,7 +8150,7 @@
             <a:r>
               <a:rPr sz="2400" b="0">
                 <a:solidFill>
-                  <a:srgbClr val="F3EEE8"/>
+                  <a:srgbClr val="F1EEE8"/>
                 </a:solidFill>
                 <a:latin typeface="Arial"/>
                 <a:ea typeface="Arial"/>
@@ -8163,7 +8163,7 @@
             <a:pPr>
               <a:defRPr sz="2400" b="0">
                 <a:solidFill>
-                  <a:srgbClr val="F3EEE8"/>
+                  <a:srgbClr val="F1EEE8"/>
                 </a:solidFill>
                 <a:latin typeface="Arial"/>
                 <a:ea typeface="Arial"/>
@@ -8173,7 +8173,7 @@
             <a:r>
               <a:rPr sz="2400" b="0">
                 <a:solidFill>
-                  <a:srgbClr val="F3EEE8"/>
+                  <a:srgbClr val="F1EEE8"/>
                 </a:solidFill>
                 <a:latin typeface="Arial"/>
                 <a:ea typeface="Arial"/>
@@ -8189,7 +8189,7 @@
           <p:cNvPr id="10" name="">
             <a:extLst xmlns:a="http://schemas.openxmlformats.org/drawingml/2006/main">
               <a:ext uri="{FF2B5EF4-FFF2-40B4-BE49-F238E27FC236}">
-                <a16:creationId xmlns:a16="http://schemas.microsoft.com/office/drawing/2014/main" id="{2A493EC9-4498-4E92-8957-899AC9F72E21}"/>
+                <a16:creationId xmlns:a16="http://schemas.microsoft.com/office/drawing/2014/main" id="{18C289F4-180E-4D71-B867-88CFCA4B8D44}"/>
               </a:ext>
             </a:extLst>
           </p:cNvPr>
@@ -8217,7 +8217,7 @@
             <a:defPPr>
               <a:defRPr sz="1875" b="0">
                 <a:solidFill>
-                  <a:srgbClr val="93A4AA"/>
+                  <a:srgbClr val="A9B8BC"/>
                 </a:solidFill>
                 <a:latin typeface="Arial"/>
                 <a:ea typeface="Arial"/>
@@ -8229,7 +8229,7 @@
             <a:pPr>
               <a:defRPr sz="1875" b="0">
                 <a:solidFill>
-                  <a:srgbClr val="93A4AA"/>
+                  <a:srgbClr val="A9B8BC"/>
                 </a:solidFill>
                 <a:latin typeface="Arial"/>
                 <a:ea typeface="Arial"/>
@@ -8239,7 +8239,7 @@
             <a:r>
               <a:rPr sz="1875" b="0">
                 <a:solidFill>
-                  <a:srgbClr val="93A4AA"/>
+                  <a:srgbClr val="A9B8BC"/>
                 </a:solidFill>
                 <a:latin typeface="Arial"/>
                 <a:ea typeface="Arial"/>
@@ -8255,7 +8255,7 @@
           <p:cNvPr id="11" name="">
             <a:extLst xmlns:a="http://schemas.openxmlformats.org/drawingml/2006/main">
               <a:ext uri="{FF2B5EF4-FFF2-40B4-BE49-F238E27FC236}">
-                <a16:creationId xmlns:a16="http://schemas.microsoft.com/office/drawing/2014/main" id="{D5BF9C23-755E-4A08-8B6C-0FDEEA5EC01D}"/>
+                <a16:creationId xmlns:a16="http://schemas.microsoft.com/office/drawing/2014/main" id="{16919EA9-D175-492C-885C-521B39C69FE6}"/>
               </a:ext>
             </a:extLst>
           </p:cNvPr>
@@ -8283,7 +8283,7 @@
             <a:defPPr>
               <a:defRPr sz="1425" b="0">
                 <a:solidFill>
-                  <a:srgbClr val="93A4AA"/>
+                  <a:srgbClr val="A9B8BC"/>
                 </a:solidFill>
                 <a:latin typeface="Arial"/>
                 <a:ea typeface="Arial"/>
@@ -8295,7 +8295,7 @@
             <a:pPr>
               <a:defRPr sz="1425" b="0">
                 <a:solidFill>
-                  <a:srgbClr val="93A4AA"/>
+                  <a:srgbClr val="A9B8BC"/>
                 </a:solidFill>
                 <a:latin typeface="Arial"/>
                 <a:ea typeface="Arial"/>
@@ -8305,7 +8305,7 @@
             <a:r>
               <a:rPr sz="1425" b="0">
                 <a:solidFill>
-                  <a:srgbClr val="93A4AA"/>
+                  <a:srgbClr val="A9B8BC"/>
                 </a:solidFill>
                 <a:latin typeface="Arial"/>
                 <a:ea typeface="Arial"/>
@@ -8319,7 +8319,7 @@
     </p:spTree>
     <p:extLst>
       <p:ext uri="{BB962C8B-B14F-4D97-AF65-F5344CB8AC3E}">
-        <p14:creationId xmlns:p14="http://schemas.microsoft.com/office/powerpoint/2010/main" val="841027806"/>
+        <p14:creationId xmlns:p14="http://schemas.microsoft.com/office/powerpoint/2010/main" val="1684445971"/>
       </p:ext>
     </p:extLst>
   </p:cSld>
@@ -8332,7 +8332,7 @@
     <p:bg>
       <p:bgPr>
         <a:solidFill xmlns:a="http://schemas.openxmlformats.org/drawingml/2006/main">
-          <a:srgbClr val="202433"/>
+          <a:srgbClr val="222636"/>
         </a:solidFill>
       </p:bgPr>
     </p:bg>
@@ -8350,7 +8350,7 @@
           <p:cNvPr id="12" name="">
             <a:extLst xmlns:a="http://schemas.openxmlformats.org/drawingml/2006/main">
               <a:ext uri="{FF2B5EF4-FFF2-40B4-BE49-F238E27FC236}">
-                <a16:creationId xmlns:a16="http://schemas.microsoft.com/office/drawing/2014/main" id="{BFC24F42-208B-4CBD-883D-47BBDEB2D719}"/>
+                <a16:creationId xmlns:a16="http://schemas.microsoft.com/office/drawing/2014/main" id="{AF494F1D-F7B2-4176-869D-7DA70C5CD84F}"/>
               </a:ext>
             </a:extLst>
           </p:cNvPr>
@@ -8378,7 +8378,7 @@
             <a:defPPr>
               <a:defRPr sz="4350" b="1">
                 <a:solidFill>
-                  <a:srgbClr val="BD9A78"/>
+                  <a:srgbClr val="C6A27F"/>
                 </a:solidFill>
                 <a:latin typeface="Arial"/>
                 <a:ea typeface="Arial"/>
@@ -8390,7 +8390,7 @@
             <a:pPr>
               <a:defRPr sz="4350" b="1">
                 <a:solidFill>
-                  <a:srgbClr val="BD9A78"/>
+                  <a:srgbClr val="C6A27F"/>
                 </a:solidFill>
                 <a:latin typeface="Arial"/>
                 <a:ea typeface="Arial"/>
@@ -8400,7 +8400,7 @@
             <a:r>
               <a:rPr sz="4350" b="1">
                 <a:solidFill>
-                  <a:srgbClr val="BD9A78"/>
+                  <a:srgbClr val="C6A27F"/>
                 </a:solidFill>
                 <a:latin typeface="Arial"/>
                 <a:ea typeface="Arial"/>
@@ -8416,7 +8416,7 @@
           <p:cNvPr id="2" name="">
             <a:extLst xmlns:a="http://schemas.openxmlformats.org/drawingml/2006/main">
               <a:ext uri="{FF2B5EF4-FFF2-40B4-BE49-F238E27FC236}">
-                <a16:creationId xmlns:a16="http://schemas.microsoft.com/office/drawing/2014/main" id="{A974E303-13D8-4D82-A838-6AB502970189}"/>
+                <a16:creationId xmlns:a16="http://schemas.microsoft.com/office/drawing/2014/main" id="{48528DC4-A5E2-466C-ABDA-C8E47BA6F2EE}"/>
               </a:ext>
             </a:extLst>
           </p:cNvPr>
@@ -8444,7 +8444,7 @@
             <a:defPPr>
               <a:defRPr sz="2400" b="1">
                 <a:solidFill>
-                  <a:srgbClr val="BD9A78"/>
+                  <a:srgbClr val="C6A27F"/>
                 </a:solidFill>
                 <a:latin typeface="Arial"/>
                 <a:ea typeface="Arial"/>
@@ -8456,7 +8456,7 @@
             <a:pPr>
               <a:defRPr sz="2400" b="1">
                 <a:solidFill>
-                  <a:srgbClr val="BD9A78"/>
+                  <a:srgbClr val="C6A27F"/>
                 </a:solidFill>
                 <a:latin typeface="Arial"/>
                 <a:ea typeface="Arial"/>
@@ -8466,7 +8466,7 @@
             <a:r>
               <a:rPr sz="2400" b="1">
                 <a:solidFill>
-                  <a:srgbClr val="BD9A78"/>
+                  <a:srgbClr val="C6A27F"/>
                 </a:solidFill>
                 <a:latin typeface="Arial"/>
                 <a:ea typeface="Arial"/>
@@ -8482,7 +8482,7 @@
           <p:cNvPr id="3" name="">
             <a:extLst xmlns:a="http://schemas.openxmlformats.org/drawingml/2006/main">
               <a:ext uri="{FF2B5EF4-FFF2-40B4-BE49-F238E27FC236}">
-                <a16:creationId xmlns:a16="http://schemas.microsoft.com/office/drawing/2014/main" id="{16D2C046-D4B8-4C71-BF16-735A65D03872}"/>
+                <a16:creationId xmlns:a16="http://schemas.microsoft.com/office/drawing/2014/main" id="{CF24E756-6C44-4FC2-AF7D-2AF26E544FE6}"/>
               </a:ext>
             </a:extLst>
           </p:cNvPr>
@@ -8510,7 +8510,7 @@
             <a:defPPr>
               <a:defRPr sz="2400" b="0">
                 <a:solidFill>
-                  <a:srgbClr val="F3EEE8"/>
+                  <a:srgbClr val="F1EEE8"/>
                 </a:solidFill>
                 <a:latin typeface="Arial"/>
                 <a:ea typeface="Arial"/>
@@ -8522,7 +8522,7 @@
             <a:pPr>
               <a:defRPr sz="2400" b="0">
                 <a:solidFill>
-                  <a:srgbClr val="F3EEE8"/>
+                  <a:srgbClr val="F1EEE8"/>
                 </a:solidFill>
                 <a:latin typeface="Arial"/>
                 <a:ea typeface="Arial"/>
@@ -8532,7 +8532,7 @@
             <a:r>
               <a:rPr sz="2400" b="0">
                 <a:solidFill>
-                  <a:srgbClr val="F3EEE8"/>
+                  <a:srgbClr val="F1EEE8"/>
                 </a:solidFill>
                 <a:latin typeface="Arial"/>
                 <a:ea typeface="Arial"/>
@@ -8548,7 +8548,7 @@
           <p:cNvPr id="4" name="">
             <a:extLst xmlns:a="http://schemas.openxmlformats.org/drawingml/2006/main">
               <a:ext uri="{FF2B5EF4-FFF2-40B4-BE49-F238E27FC236}">
-                <a16:creationId xmlns:a16="http://schemas.microsoft.com/office/drawing/2014/main" id="{9D29F39E-85D1-4B36-9E6A-F2BA26665DC6}"/>
+                <a16:creationId xmlns:a16="http://schemas.microsoft.com/office/drawing/2014/main" id="{6E6C68B0-2BE3-4BDB-B364-91FAD538DA49}"/>
               </a:ext>
             </a:extLst>
           </p:cNvPr>
@@ -8576,7 +8576,7 @@
             <a:defPPr>
               <a:defRPr sz="2400" b="1">
                 <a:solidFill>
-                  <a:srgbClr val="BD9A78"/>
+                  <a:srgbClr val="C6A27F"/>
                 </a:solidFill>
                 <a:latin typeface="Arial"/>
                 <a:ea typeface="Arial"/>
@@ -8588,7 +8588,7 @@
             <a:pPr>
               <a:defRPr sz="2400" b="1">
                 <a:solidFill>
-                  <a:srgbClr val="BD9A78"/>
+                  <a:srgbClr val="C6A27F"/>
                 </a:solidFill>
                 <a:latin typeface="Arial"/>
                 <a:ea typeface="Arial"/>
@@ -8598,7 +8598,7 @@
             <a:r>
               <a:rPr sz="2400" b="1">
                 <a:solidFill>
-                  <a:srgbClr val="BD9A78"/>
+                  <a:srgbClr val="C6A27F"/>
                 </a:solidFill>
                 <a:latin typeface="Arial"/>
                 <a:ea typeface="Arial"/>
@@ -8614,7 +8614,7 @@
           <p:cNvPr id="5" name="">
             <a:extLst xmlns:a="http://schemas.openxmlformats.org/drawingml/2006/main">
               <a:ext uri="{FF2B5EF4-FFF2-40B4-BE49-F238E27FC236}">
-                <a16:creationId xmlns:a16="http://schemas.microsoft.com/office/drawing/2014/main" id="{EDF80E21-71CF-49AD-9069-98784E604763}"/>
+                <a16:creationId xmlns:a16="http://schemas.microsoft.com/office/drawing/2014/main" id="{6099DE09-08DE-4E8F-94CC-54B113E22B57}"/>
               </a:ext>
             </a:extLst>
           </p:cNvPr>
@@ -8642,7 +8642,7 @@
             <a:defPPr>
               <a:defRPr sz="2400" b="0">
                 <a:solidFill>
-                  <a:srgbClr val="F3EEE8"/>
+                  <a:srgbClr val="F1EEE8"/>
                 </a:solidFill>
                 <a:latin typeface="Arial"/>
                 <a:ea typeface="Arial"/>
@@ -8654,7 +8654,7 @@
             <a:pPr>
               <a:defRPr sz="2400" b="0">
                 <a:solidFill>
-                  <a:srgbClr val="F3EEE8"/>
+                  <a:srgbClr val="F1EEE8"/>
                 </a:solidFill>
                 <a:latin typeface="Arial"/>
                 <a:ea typeface="Arial"/>
@@ -8664,7 +8664,7 @@
             <a:r>
               <a:rPr sz="2400" b="0">
                 <a:solidFill>
-                  <a:srgbClr val="F3EEE8"/>
+                  <a:srgbClr val="F1EEE8"/>
                 </a:solidFill>
                 <a:latin typeface="Arial"/>
                 <a:ea typeface="Arial"/>
@@ -8680,7 +8680,7 @@
           <p:cNvPr id="6" name="">
             <a:extLst xmlns:a="http://schemas.openxmlformats.org/drawingml/2006/main">
               <a:ext uri="{FF2B5EF4-FFF2-40B4-BE49-F238E27FC236}">
-                <a16:creationId xmlns:a16="http://schemas.microsoft.com/office/drawing/2014/main" id="{C6138284-1A9E-4BD6-9F66-F7325CF3155C}"/>
+                <a16:creationId xmlns:a16="http://schemas.microsoft.com/office/drawing/2014/main" id="{A4242773-83C3-4879-A6E8-AB2A08449B7E}"/>
               </a:ext>
             </a:extLst>
           </p:cNvPr>
@@ -8708,7 +8708,7 @@
             <a:defPPr>
               <a:defRPr sz="2400" b="1">
                 <a:solidFill>
-                  <a:srgbClr val="BD9A78"/>
+                  <a:srgbClr val="C6A27F"/>
                 </a:solidFill>
                 <a:latin typeface="Arial"/>
                 <a:ea typeface="Arial"/>
@@ -8720,7 +8720,7 @@
             <a:pPr>
               <a:defRPr sz="2400" b="1">
                 <a:solidFill>
-                  <a:srgbClr val="BD9A78"/>
+                  <a:srgbClr val="C6A27F"/>
                 </a:solidFill>
                 <a:latin typeface="Arial"/>
                 <a:ea typeface="Arial"/>
@@ -8730,7 +8730,7 @@
             <a:r>
               <a:rPr sz="2400" b="1">
                 <a:solidFill>
-                  <a:srgbClr val="BD9A78"/>
+                  <a:srgbClr val="C6A27F"/>
                 </a:solidFill>
                 <a:latin typeface="Arial"/>
                 <a:ea typeface="Arial"/>
@@ -8746,7 +8746,7 @@
           <p:cNvPr id="7" name="">
             <a:extLst xmlns:a="http://schemas.openxmlformats.org/drawingml/2006/main">
               <a:ext uri="{FF2B5EF4-FFF2-40B4-BE49-F238E27FC236}">
-                <a16:creationId xmlns:a16="http://schemas.microsoft.com/office/drawing/2014/main" id="{A1AECA13-68C9-41D1-9FBD-949535E619C2}"/>
+                <a16:creationId xmlns:a16="http://schemas.microsoft.com/office/drawing/2014/main" id="{7D0B58FD-FF2A-4300-A2B9-6BD1CF153050}"/>
               </a:ext>
             </a:extLst>
           </p:cNvPr>
@@ -8774,7 +8774,7 @@
             <a:defPPr>
               <a:defRPr sz="2400" b="0">
                 <a:solidFill>
-                  <a:srgbClr val="F3EEE8"/>
+                  <a:srgbClr val="F1EEE8"/>
                 </a:solidFill>
                 <a:latin typeface="Arial"/>
                 <a:ea typeface="Arial"/>
@@ -8786,7 +8786,7 @@
             <a:pPr>
               <a:defRPr sz="2400" b="0">
                 <a:solidFill>
-                  <a:srgbClr val="F3EEE8"/>
+                  <a:srgbClr val="F1EEE8"/>
                 </a:solidFill>
                 <a:latin typeface="Arial"/>
                 <a:ea typeface="Arial"/>
@@ -8796,7 +8796,7 @@
             <a:r>
               <a:rPr sz="2400" b="0">
                 <a:solidFill>
-                  <a:srgbClr val="F3EEE8"/>
+                  <a:srgbClr val="F1EEE8"/>
                 </a:solidFill>
                 <a:latin typeface="Arial"/>
                 <a:ea typeface="Arial"/>
@@ -8812,7 +8812,7 @@
           <p:cNvPr id="8" name="">
             <a:extLst xmlns:a="http://schemas.openxmlformats.org/drawingml/2006/main">
               <a:ext uri="{FF2B5EF4-FFF2-40B4-BE49-F238E27FC236}">
-                <a16:creationId xmlns:a16="http://schemas.microsoft.com/office/drawing/2014/main" id="{6EAEF077-2566-483D-88E4-14F8FAEDF129}"/>
+                <a16:creationId xmlns:a16="http://schemas.microsoft.com/office/drawing/2014/main" id="{3BDBDE67-BD3F-463C-B907-ED67E3DA3823}"/>
               </a:ext>
             </a:extLst>
           </p:cNvPr>
@@ -8840,7 +8840,7 @@
             <a:defPPr>
               <a:defRPr sz="2400" b="1">
                 <a:solidFill>
-                  <a:srgbClr val="BD9A78"/>
+                  <a:srgbClr val="C6A27F"/>
                 </a:solidFill>
                 <a:latin typeface="Arial"/>
                 <a:ea typeface="Arial"/>
@@ -8852,7 +8852,7 @@
             <a:pPr>
               <a:defRPr sz="2400" b="1">
                 <a:solidFill>
-                  <a:srgbClr val="BD9A78"/>
+                  <a:srgbClr val="C6A27F"/>
                 </a:solidFill>
                 <a:latin typeface="Arial"/>
                 <a:ea typeface="Arial"/>
@@ -8862,7 +8862,7 @@
             <a:r>
               <a:rPr sz="2400" b="1">
                 <a:solidFill>
-                  <a:srgbClr val="BD9A78"/>
+                  <a:srgbClr val="C6A27F"/>
                 </a:solidFill>
                 <a:latin typeface="Arial"/>
                 <a:ea typeface="Arial"/>
@@ -8878,7 +8878,7 @@
           <p:cNvPr id="9" name="">
             <a:extLst xmlns:a="http://schemas.openxmlformats.org/drawingml/2006/main">
               <a:ext uri="{FF2B5EF4-FFF2-40B4-BE49-F238E27FC236}">
-                <a16:creationId xmlns:a16="http://schemas.microsoft.com/office/drawing/2014/main" id="{3871B500-7820-446F-9C9F-8CA711CF198F}"/>
+                <a16:creationId xmlns:a16="http://schemas.microsoft.com/office/drawing/2014/main" id="{22DFDB45-2CEA-4C00-AAC0-8ED180F08CB6}"/>
               </a:ext>
             </a:extLst>
           </p:cNvPr>
@@ -8906,7 +8906,7 @@
             <a:defPPr>
               <a:defRPr sz="2400" b="0">
                 <a:solidFill>
-                  <a:srgbClr val="F3EEE8"/>
+                  <a:srgbClr val="F1EEE8"/>
                 </a:solidFill>
                 <a:latin typeface="Arial"/>
                 <a:ea typeface="Arial"/>
@@ -8918,7 +8918,7 @@
             <a:pPr>
               <a:defRPr sz="2400" b="0">
                 <a:solidFill>
-                  <a:srgbClr val="F3EEE8"/>
+                  <a:srgbClr val="F1EEE8"/>
                 </a:solidFill>
                 <a:latin typeface="Arial"/>
                 <a:ea typeface="Arial"/>
@@ -8928,7 +8928,7 @@
             <a:r>
               <a:rPr sz="2400" b="0">
                 <a:solidFill>
-                  <a:srgbClr val="F3EEE8"/>
+                  <a:srgbClr val="F1EEE8"/>
                 </a:solidFill>
                 <a:latin typeface="Arial"/>
                 <a:ea typeface="Arial"/>
@@ -8944,7 +8944,7 @@
           <p:cNvPr id="10" name="">
             <a:extLst xmlns:a="http://schemas.openxmlformats.org/drawingml/2006/main">
               <a:ext uri="{FF2B5EF4-FFF2-40B4-BE49-F238E27FC236}">
-                <a16:creationId xmlns:a16="http://schemas.microsoft.com/office/drawing/2014/main" id="{EB93714E-BEA1-4F1D-9531-8279662EDFAF}"/>
+                <a16:creationId xmlns:a16="http://schemas.microsoft.com/office/drawing/2014/main" id="{D10F88C2-D05B-455A-84BE-6D70271EAA2C}"/>
               </a:ext>
             </a:extLst>
           </p:cNvPr>
@@ -8972,7 +8972,7 @@
             <a:defPPr>
               <a:defRPr sz="1875" b="0">
                 <a:solidFill>
-                  <a:srgbClr val="93A4AA"/>
+                  <a:srgbClr val="A9B8BC"/>
                 </a:solidFill>
                 <a:latin typeface="Arial"/>
                 <a:ea typeface="Arial"/>
@@ -8984,7 +8984,7 @@
             <a:pPr>
               <a:defRPr sz="1875" b="0">
                 <a:solidFill>
-                  <a:srgbClr val="93A4AA"/>
+                  <a:srgbClr val="A9B8BC"/>
                 </a:solidFill>
                 <a:latin typeface="Arial"/>
                 <a:ea typeface="Arial"/>
@@ -8994,7 +8994,7 @@
             <a:r>
               <a:rPr sz="1875" b="0">
                 <a:solidFill>
-                  <a:srgbClr val="93A4AA"/>
+                  <a:srgbClr val="A9B8BC"/>
                 </a:solidFill>
                 <a:latin typeface="Arial"/>
                 <a:ea typeface="Arial"/>
@@ -9010,7 +9010,7 @@
           <p:cNvPr id="11" name="">
             <a:extLst xmlns:a="http://schemas.openxmlformats.org/drawingml/2006/main">
               <a:ext uri="{FF2B5EF4-FFF2-40B4-BE49-F238E27FC236}">
-                <a16:creationId xmlns:a16="http://schemas.microsoft.com/office/drawing/2014/main" id="{6C319539-7B2A-4D47-A52E-CBF2E88C8522}"/>
+                <a16:creationId xmlns:a16="http://schemas.microsoft.com/office/drawing/2014/main" id="{3BFE7B7C-7CCF-4206-B678-F658AB3EC7A6}"/>
               </a:ext>
             </a:extLst>
           </p:cNvPr>
@@ -9038,7 +9038,7 @@
             <a:defPPr>
               <a:defRPr sz="1425" b="0">
                 <a:solidFill>
-                  <a:srgbClr val="93A4AA"/>
+                  <a:srgbClr val="A9B8BC"/>
                 </a:solidFill>
                 <a:latin typeface="Arial"/>
                 <a:ea typeface="Arial"/>
@@ -9050,7 +9050,7 @@
             <a:pPr>
               <a:defRPr sz="1425" b="0">
                 <a:solidFill>
-                  <a:srgbClr val="93A4AA"/>
+                  <a:srgbClr val="A9B8BC"/>
                 </a:solidFill>
                 <a:latin typeface="Arial"/>
                 <a:ea typeface="Arial"/>
@@ -9060,7 +9060,7 @@
             <a:r>
               <a:rPr sz="1425" b="0">
                 <a:solidFill>
-                  <a:srgbClr val="93A4AA"/>
+                  <a:srgbClr val="A9B8BC"/>
                 </a:solidFill>
                 <a:latin typeface="Arial"/>
                 <a:ea typeface="Arial"/>
@@ -9074,7 +9074,7 @@
     </p:spTree>
     <p:extLst>
       <p:ext uri="{BB962C8B-B14F-4D97-AF65-F5344CB8AC3E}">
-        <p14:creationId xmlns:p14="http://schemas.microsoft.com/office/powerpoint/2010/main" val="1627902967"/>
+        <p14:creationId xmlns:p14="http://schemas.microsoft.com/office/powerpoint/2010/main" val="1354747745"/>
       </p:ext>
     </p:extLst>
   </p:cSld>
@@ -9087,7 +9087,7 @@
     <p:bg>
       <p:bgPr>
         <a:solidFill xmlns:a="http://schemas.openxmlformats.org/drawingml/2006/main">
-          <a:srgbClr val="202433"/>
+          <a:srgbClr val="222636"/>
         </a:solidFill>
       </p:bgPr>
     </p:bg>
@@ -9105,7 +9105,7 @@
           <p:cNvPr id="10" name="">
             <a:extLst xmlns:a="http://schemas.openxmlformats.org/drawingml/2006/main">
               <a:ext uri="{FF2B5EF4-FFF2-40B4-BE49-F238E27FC236}">
-                <a16:creationId xmlns:a16="http://schemas.microsoft.com/office/drawing/2014/main" id="{671F8C98-C441-4B44-AC31-A52ACB9F92C4}"/>
+                <a16:creationId xmlns:a16="http://schemas.microsoft.com/office/drawing/2014/main" id="{28A538E4-EFD1-44A3-9F6D-F238443DDE2E}"/>
               </a:ext>
             </a:extLst>
           </p:cNvPr>
@@ -9133,7 +9133,7 @@
             <a:defPPr>
               <a:defRPr sz="4350" b="1">
                 <a:solidFill>
-                  <a:srgbClr val="BD9A78"/>
+                  <a:srgbClr val="C6A27F"/>
                 </a:solidFill>
                 <a:latin typeface="Arial"/>
                 <a:ea typeface="Arial"/>
@@ -9145,7 +9145,7 @@
             <a:pPr>
               <a:defRPr sz="4350" b="1">
                 <a:solidFill>
-                  <a:srgbClr val="BD9A78"/>
+                  <a:srgbClr val="C6A27F"/>
                 </a:solidFill>
                 <a:latin typeface="Arial"/>
                 <a:ea typeface="Arial"/>
@@ -9155,7 +9155,7 @@
             <a:r>
               <a:rPr sz="4350" b="1">
                 <a:solidFill>
-                  <a:srgbClr val="BD9A78"/>
+                  <a:srgbClr val="C6A27F"/>
                 </a:solidFill>
                 <a:latin typeface="Arial"/>
                 <a:ea typeface="Arial"/>
@@ -9171,7 +9171,7 @@
           <p:cNvPr id="2" name="">
             <a:extLst xmlns:a="http://schemas.openxmlformats.org/drawingml/2006/main">
               <a:ext uri="{FF2B5EF4-FFF2-40B4-BE49-F238E27FC236}">
-                <a16:creationId xmlns:a16="http://schemas.microsoft.com/office/drawing/2014/main" id="{D38286DF-B22A-4D15-8EB8-03B47E88EEE0}"/>
+                <a16:creationId xmlns:a16="http://schemas.microsoft.com/office/drawing/2014/main" id="{95A4E247-6A2D-4BA6-A296-FE4FA710818F}"/>
               </a:ext>
             </a:extLst>
           </p:cNvPr>
@@ -9199,7 +9199,7 @@
             <a:defPPr>
               <a:defRPr sz="2400" b="1">
                 <a:solidFill>
-                  <a:srgbClr val="BD9A78"/>
+                  <a:srgbClr val="C6A27F"/>
                 </a:solidFill>
                 <a:latin typeface="Arial"/>
                 <a:ea typeface="Arial"/>
@@ -9211,7 +9211,7 @@
             <a:pPr>
               <a:defRPr sz="2400" b="1">
                 <a:solidFill>
-                  <a:srgbClr val="BD9A78"/>
+                  <a:srgbClr val="C6A27F"/>
                 </a:solidFill>
                 <a:latin typeface="Arial"/>
                 <a:ea typeface="Arial"/>
@@ -9221,7 +9221,7 @@
             <a:r>
               <a:rPr sz="2400" b="1">
                 <a:solidFill>
-                  <a:srgbClr val="BD9A78"/>
+                  <a:srgbClr val="C6A27F"/>
                 </a:solidFill>
                 <a:latin typeface="Arial"/>
                 <a:ea typeface="Arial"/>
@@ -9237,7 +9237,7 @@
           <p:cNvPr id="3" name="">
             <a:extLst xmlns:a="http://schemas.openxmlformats.org/drawingml/2006/main">
               <a:ext uri="{FF2B5EF4-FFF2-40B4-BE49-F238E27FC236}">
-                <a16:creationId xmlns:a16="http://schemas.microsoft.com/office/drawing/2014/main" id="{8F358FC6-28EA-43BE-AC9E-C51144200F3D}"/>
+                <a16:creationId xmlns:a16="http://schemas.microsoft.com/office/drawing/2014/main" id="{C7B89401-376F-469E-AC0E-B54D10E4ACB9}"/>
               </a:ext>
             </a:extLst>
           </p:cNvPr>
@@ -9265,7 +9265,7 @@
             <a:defPPr>
               <a:defRPr sz="2400" b="0">
                 <a:solidFill>
-                  <a:srgbClr val="F3EEE8"/>
+                  <a:srgbClr val="F1EEE8"/>
                 </a:solidFill>
                 <a:latin typeface="Arial"/>
                 <a:ea typeface="Arial"/>
@@ -9277,7 +9277,7 @@
             <a:pPr>
               <a:defRPr sz="2400" b="0">
                 <a:solidFill>
-                  <a:srgbClr val="F3EEE8"/>
+                  <a:srgbClr val="F1EEE8"/>
                 </a:solidFill>
                 <a:latin typeface="Arial"/>
                 <a:ea typeface="Arial"/>
@@ -9287,7 +9287,7 @@
             <a:r>
               <a:rPr sz="2400" b="0">
                 <a:solidFill>
-                  <a:srgbClr val="F3EEE8"/>
+                  <a:srgbClr val="F1EEE8"/>
                 </a:solidFill>
                 <a:latin typeface="Arial"/>
                 <a:ea typeface="Arial"/>
@@ -9300,7 +9300,7 @@
             <a:pPr>
               <a:defRPr sz="2400" b="0">
                 <a:solidFill>
-                  <a:srgbClr val="F3EEE8"/>
+                  <a:srgbClr val="F1EEE8"/>
                 </a:solidFill>
                 <a:latin typeface="Arial"/>
                 <a:ea typeface="Arial"/>
@@ -9310,7 +9310,7 @@
             <a:r>
               <a:rPr sz="2400" b="0">
                 <a:solidFill>
-                  <a:srgbClr val="F3EEE8"/>
+                  <a:srgbClr val="F1EEE8"/>
                 </a:solidFill>
                 <a:latin typeface="Arial"/>
                 <a:ea typeface="Arial"/>
@@ -9326,7 +9326,7 @@
           <p:cNvPr id="4" name="">
             <a:extLst xmlns:a="http://schemas.openxmlformats.org/drawingml/2006/main">
               <a:ext uri="{FF2B5EF4-FFF2-40B4-BE49-F238E27FC236}">
-                <a16:creationId xmlns:a16="http://schemas.microsoft.com/office/drawing/2014/main" id="{67EA5742-A607-4202-971A-D0B16B364A05}"/>
+                <a16:creationId xmlns:a16="http://schemas.microsoft.com/office/drawing/2014/main" id="{3ADD4CC3-E6F4-4FE7-9997-D8A153AB1345}"/>
               </a:ext>
             </a:extLst>
           </p:cNvPr>
@@ -9354,7 +9354,7 @@
             <a:defPPr>
               <a:defRPr sz="2400" b="1">
                 <a:solidFill>
-                  <a:srgbClr val="BD9A78"/>
+                  <a:srgbClr val="C6A27F"/>
                 </a:solidFill>
                 <a:latin typeface="Arial"/>
                 <a:ea typeface="Arial"/>
@@ -9366,7 +9366,7 @@
             <a:pPr>
               <a:defRPr sz="2400" b="1">
                 <a:solidFill>
-                  <a:srgbClr val="BD9A78"/>
+                  <a:srgbClr val="C6A27F"/>
                 </a:solidFill>
                 <a:latin typeface="Arial"/>
                 <a:ea typeface="Arial"/>
@@ -9376,7 +9376,7 @@
             <a:r>
               <a:rPr sz="2400" b="1">
                 <a:solidFill>
-                  <a:srgbClr val="BD9A78"/>
+                  <a:srgbClr val="C6A27F"/>
                 </a:solidFill>
                 <a:latin typeface="Arial"/>
                 <a:ea typeface="Arial"/>
@@ -9392,7 +9392,7 @@
           <p:cNvPr id="5" name="">
             <a:extLst xmlns:a="http://schemas.openxmlformats.org/drawingml/2006/main">
               <a:ext uri="{FF2B5EF4-FFF2-40B4-BE49-F238E27FC236}">
-                <a16:creationId xmlns:a16="http://schemas.microsoft.com/office/drawing/2014/main" id="{B1678448-482D-4F6E-8A06-DC29D1BBC3E6}"/>
+                <a16:creationId xmlns:a16="http://schemas.microsoft.com/office/drawing/2014/main" id="{D026D576-0D21-4417-A266-FE38C7C5E540}"/>
               </a:ext>
             </a:extLst>
           </p:cNvPr>
@@ -9420,7 +9420,7 @@
             <a:defPPr>
               <a:defRPr sz="2400" b="0">
                 <a:solidFill>
-                  <a:srgbClr val="F3EEE8"/>
+                  <a:srgbClr val="F1EEE8"/>
                 </a:solidFill>
                 <a:latin typeface="Arial"/>
                 <a:ea typeface="Arial"/>
@@ -9432,7 +9432,7 @@
             <a:pPr>
               <a:defRPr sz="2400" b="0">
                 <a:solidFill>
-                  <a:srgbClr val="F3EEE8"/>
+                  <a:srgbClr val="F1EEE8"/>
                 </a:solidFill>
                 <a:latin typeface="Arial"/>
                 <a:ea typeface="Arial"/>
@@ -9442,7 +9442,7 @@
             <a:r>
               <a:rPr sz="2400" b="0">
                 <a:solidFill>
-                  <a:srgbClr val="F3EEE8"/>
+                  <a:srgbClr val="F1EEE8"/>
                 </a:solidFill>
                 <a:latin typeface="Arial"/>
                 <a:ea typeface="Arial"/>
@@ -9455,7 +9455,7 @@
             <a:pPr>
               <a:defRPr sz="2400" b="0">
                 <a:solidFill>
-                  <a:srgbClr val="F3EEE8"/>
+                  <a:srgbClr val="F1EEE8"/>
                 </a:solidFill>
                 <a:latin typeface="Arial"/>
                 <a:ea typeface="Arial"/>
@@ -9465,7 +9465,7 @@
             <a:r>
               <a:rPr sz="2400" b="0">
                 <a:solidFill>
-                  <a:srgbClr val="F3EEE8"/>
+                  <a:srgbClr val="F1EEE8"/>
                 </a:solidFill>
                 <a:latin typeface="Arial"/>
                 <a:ea typeface="Arial"/>
@@ -9481,7 +9481,7 @@
           <p:cNvPr id="6" name="">
             <a:extLst xmlns:a="http://schemas.openxmlformats.org/drawingml/2006/main">
               <a:ext uri="{FF2B5EF4-FFF2-40B4-BE49-F238E27FC236}">
-                <a16:creationId xmlns:a16="http://schemas.microsoft.com/office/drawing/2014/main" id="{38EC9624-CEED-44D2-B8A5-AE5F0223582C}"/>
+                <a16:creationId xmlns:a16="http://schemas.microsoft.com/office/drawing/2014/main" id="{55DDAA74-978B-4A54-A486-9B9F2385147B}"/>
               </a:ext>
             </a:extLst>
           </p:cNvPr>
@@ -9509,7 +9509,7 @@
             <a:defPPr>
               <a:defRPr sz="2400" b="1">
                 <a:solidFill>
-                  <a:srgbClr val="BD9A78"/>
+                  <a:srgbClr val="C6A27F"/>
                 </a:solidFill>
                 <a:latin typeface="Arial"/>
                 <a:ea typeface="Arial"/>
@@ -9521,7 +9521,7 @@
             <a:pPr>
               <a:defRPr sz="2400" b="1">
                 <a:solidFill>
-                  <a:srgbClr val="BD9A78"/>
+                  <a:srgbClr val="C6A27F"/>
                 </a:solidFill>
                 <a:latin typeface="Arial"/>
                 <a:ea typeface="Arial"/>
@@ -9531,7 +9531,7 @@
             <a:r>
               <a:rPr sz="2400" b="1">
                 <a:solidFill>
-                  <a:srgbClr val="BD9A78"/>
+                  <a:srgbClr val="C6A27F"/>
                 </a:solidFill>
                 <a:latin typeface="Arial"/>
                 <a:ea typeface="Arial"/>
@@ -9547,7 +9547,7 @@
           <p:cNvPr id="7" name="">
             <a:extLst xmlns:a="http://schemas.openxmlformats.org/drawingml/2006/main">
               <a:ext uri="{FF2B5EF4-FFF2-40B4-BE49-F238E27FC236}">
-                <a16:creationId xmlns:a16="http://schemas.microsoft.com/office/drawing/2014/main" id="{78F53929-82B9-48AE-85BF-739C23039454}"/>
+                <a16:creationId xmlns:a16="http://schemas.microsoft.com/office/drawing/2014/main" id="{83DC03FA-4BB2-412F-868A-7DD359D562C0}"/>
               </a:ext>
             </a:extLst>
           </p:cNvPr>
@@ -9575,7 +9575,7 @@
             <a:defPPr>
               <a:defRPr sz="2400" b="0">
                 <a:solidFill>
-                  <a:srgbClr val="F3EEE8"/>
+                  <a:srgbClr val="F1EEE8"/>
                 </a:solidFill>
                 <a:latin typeface="Arial"/>
                 <a:ea typeface="Arial"/>
@@ -9587,7 +9587,7 @@
             <a:pPr>
               <a:defRPr sz="2400" b="0">
                 <a:solidFill>
-                  <a:srgbClr val="F3EEE8"/>
+                  <a:srgbClr val="F1EEE8"/>
                 </a:solidFill>
                 <a:latin typeface="Arial"/>
                 <a:ea typeface="Arial"/>
@@ -9597,7 +9597,7 @@
             <a:r>
               <a:rPr sz="2400" b="0">
                 <a:solidFill>
-                  <a:srgbClr val="F3EEE8"/>
+                  <a:srgbClr val="F1EEE8"/>
                 </a:solidFill>
                 <a:latin typeface="Arial"/>
                 <a:ea typeface="Arial"/>
@@ -9610,7 +9610,7 @@
             <a:pPr>
               <a:defRPr sz="2400" b="0">
                 <a:solidFill>
-                  <a:srgbClr val="F3EEE8"/>
+                  <a:srgbClr val="F1EEE8"/>
                 </a:solidFill>
                 <a:latin typeface="Arial"/>
                 <a:ea typeface="Arial"/>
@@ -9620,7 +9620,7 @@
             <a:r>
               <a:rPr sz="2400" b="0">
                 <a:solidFill>
-                  <a:srgbClr val="F3EEE8"/>
+                  <a:srgbClr val="F1EEE8"/>
                 </a:solidFill>
                 <a:latin typeface="Arial"/>
                 <a:ea typeface="Arial"/>
@@ -9636,7 +9636,7 @@
           <p:cNvPr id="8" name="">
             <a:extLst xmlns:a="http://schemas.openxmlformats.org/drawingml/2006/main">
               <a:ext uri="{FF2B5EF4-FFF2-40B4-BE49-F238E27FC236}">
-                <a16:creationId xmlns:a16="http://schemas.microsoft.com/office/drawing/2014/main" id="{B4FAA3C5-3E9E-4BCA-A577-81AC7AA26D98}"/>
+                <a16:creationId xmlns:a16="http://schemas.microsoft.com/office/drawing/2014/main" id="{71354844-25BF-4807-9DD1-D441A00335DE}"/>
               </a:ext>
             </a:extLst>
           </p:cNvPr>
@@ -9664,7 +9664,7 @@
             <a:defPPr>
               <a:defRPr sz="1875" b="0">
                 <a:solidFill>
-                  <a:srgbClr val="93A4AA"/>
+                  <a:srgbClr val="A9B8BC"/>
                 </a:solidFill>
                 <a:latin typeface="Arial"/>
                 <a:ea typeface="Arial"/>
@@ -9676,7 +9676,7 @@
             <a:pPr>
               <a:defRPr sz="1875" b="0">
                 <a:solidFill>
-                  <a:srgbClr val="93A4AA"/>
+                  <a:srgbClr val="A9B8BC"/>
                 </a:solidFill>
                 <a:latin typeface="Arial"/>
                 <a:ea typeface="Arial"/>
@@ -9686,7 +9686,7 @@
             <a:r>
               <a:rPr sz="1875" b="0">
                 <a:solidFill>
-                  <a:srgbClr val="93A4AA"/>
+                  <a:srgbClr val="A9B8BC"/>
                 </a:solidFill>
                 <a:latin typeface="Arial"/>
                 <a:ea typeface="Arial"/>
@@ -9702,7 +9702,7 @@
           <p:cNvPr id="9" name="">
             <a:extLst xmlns:a="http://schemas.openxmlformats.org/drawingml/2006/main">
               <a:ext uri="{FF2B5EF4-FFF2-40B4-BE49-F238E27FC236}">
-                <a16:creationId xmlns:a16="http://schemas.microsoft.com/office/drawing/2014/main" id="{D93D7246-3334-4764-AA90-F69E76E923DE}"/>
+                <a16:creationId xmlns:a16="http://schemas.microsoft.com/office/drawing/2014/main" id="{36C115D2-8D3C-4F60-90F3-220DDEF399F5}"/>
               </a:ext>
             </a:extLst>
           </p:cNvPr>
@@ -9730,7 +9730,7 @@
             <a:defPPr>
               <a:defRPr sz="1425" b="0">
                 <a:solidFill>
-                  <a:srgbClr val="93A4AA"/>
+                  <a:srgbClr val="A9B8BC"/>
                 </a:solidFill>
                 <a:latin typeface="Arial"/>
                 <a:ea typeface="Arial"/>
@@ -9742,7 +9742,7 @@
             <a:pPr>
               <a:defRPr sz="1425" b="0">
                 <a:solidFill>
-                  <a:srgbClr val="93A4AA"/>
+                  <a:srgbClr val="A9B8BC"/>
                 </a:solidFill>
                 <a:latin typeface="Arial"/>
                 <a:ea typeface="Arial"/>
@@ -9752,7 +9752,7 @@
             <a:r>
               <a:rPr sz="1425" b="0">
                 <a:solidFill>
-                  <a:srgbClr val="93A4AA"/>
+                  <a:srgbClr val="A9B8BC"/>
                 </a:solidFill>
                 <a:latin typeface="Arial"/>
                 <a:ea typeface="Arial"/>
@@ -9766,7 +9766,7 @@
     </p:spTree>
     <p:extLst>
       <p:ext uri="{BB962C8B-B14F-4D97-AF65-F5344CB8AC3E}">
-        <p14:creationId xmlns:p14="http://schemas.microsoft.com/office/powerpoint/2010/main" val="161291150"/>
+        <p14:creationId xmlns:p14="http://schemas.microsoft.com/office/powerpoint/2010/main" val="1390479661"/>
       </p:ext>
     </p:extLst>
   </p:cSld>
@@ -9779,7 +9779,7 @@
     <p:bg>
       <p:bgPr>
         <a:solidFill xmlns:a="http://schemas.openxmlformats.org/drawingml/2006/main">
-          <a:srgbClr val="202433"/>
+          <a:srgbClr val="222636"/>
         </a:solidFill>
       </p:bgPr>
     </p:bg>
@@ -9797,7 +9797,7 @@
           <p:cNvPr id="10" name="">
             <a:extLst xmlns:a="http://schemas.openxmlformats.org/drawingml/2006/main">
               <a:ext uri="{FF2B5EF4-FFF2-40B4-BE49-F238E27FC236}">
-                <a16:creationId xmlns:a16="http://schemas.microsoft.com/office/drawing/2014/main" id="{2185179D-5DF3-461D-B820-810D15454FA2}"/>
+                <a16:creationId xmlns:a16="http://schemas.microsoft.com/office/drawing/2014/main" id="{BE58BDE4-447C-42B0-9189-6082612730D7}"/>
               </a:ext>
             </a:extLst>
           </p:cNvPr>
@@ -9825,7 +9825,7 @@
             <a:defPPr>
               <a:defRPr sz="4350" b="1">
                 <a:solidFill>
-                  <a:srgbClr val="BD9A78"/>
+                  <a:srgbClr val="C6A27F"/>
                 </a:solidFill>
                 <a:latin typeface="Arial"/>
                 <a:ea typeface="Arial"/>
@@ -9837,7 +9837,7 @@
             <a:pPr>
               <a:defRPr sz="4350" b="1">
                 <a:solidFill>
-                  <a:srgbClr val="BD9A78"/>
+                  <a:srgbClr val="C6A27F"/>
                 </a:solidFill>
                 <a:latin typeface="Arial"/>
                 <a:ea typeface="Arial"/>
@@ -9847,7 +9847,7 @@
             <a:r>
               <a:rPr sz="4350" b="1">
                 <a:solidFill>
-                  <a:srgbClr val="BD9A78"/>
+                  <a:srgbClr val="C6A27F"/>
                 </a:solidFill>
                 <a:latin typeface="Arial"/>
                 <a:ea typeface="Arial"/>
@@ -9863,7 +9863,7 @@
           <p:cNvPr id="2" name="">
             <a:extLst xmlns:a="http://schemas.openxmlformats.org/drawingml/2006/main">
               <a:ext uri="{FF2B5EF4-FFF2-40B4-BE49-F238E27FC236}">
-                <a16:creationId xmlns:a16="http://schemas.microsoft.com/office/drawing/2014/main" id="{C1934C5A-DACD-4812-8A2B-F5DDF58290A1}"/>
+                <a16:creationId xmlns:a16="http://schemas.microsoft.com/office/drawing/2014/main" id="{EBE85923-E6AC-47A8-BA52-F214DB58666D}"/>
               </a:ext>
             </a:extLst>
           </p:cNvPr>
@@ -9891,7 +9891,7 @@
             <a:defPPr>
               <a:defRPr sz="2400" b="1">
                 <a:solidFill>
-                  <a:srgbClr val="BD9A78"/>
+                  <a:srgbClr val="C6A27F"/>
                 </a:solidFill>
                 <a:latin typeface="Arial"/>
                 <a:ea typeface="Arial"/>
@@ -9903,7 +9903,7 @@
             <a:pPr>
               <a:defRPr sz="2400" b="1">
                 <a:solidFill>
-                  <a:srgbClr val="BD9A78"/>
+                  <a:srgbClr val="C6A27F"/>
                 </a:solidFill>
                 <a:latin typeface="Arial"/>
                 <a:ea typeface="Arial"/>
@@ -9913,7 +9913,7 @@
             <a:r>
               <a:rPr sz="2400" b="1">
                 <a:solidFill>
-                  <a:srgbClr val="BD9A78"/>
+                  <a:srgbClr val="C6A27F"/>
                 </a:solidFill>
                 <a:latin typeface="Arial"/>
                 <a:ea typeface="Arial"/>
@@ -9929,7 +9929,7 @@
           <p:cNvPr id="3" name="">
             <a:extLst xmlns:a="http://schemas.openxmlformats.org/drawingml/2006/main">
               <a:ext uri="{FF2B5EF4-FFF2-40B4-BE49-F238E27FC236}">
-                <a16:creationId xmlns:a16="http://schemas.microsoft.com/office/drawing/2014/main" id="{89B7F33D-C1DA-44EF-8380-D6F578F65C65}"/>
+                <a16:creationId xmlns:a16="http://schemas.microsoft.com/office/drawing/2014/main" id="{46A87EEF-764C-4F75-B3C2-D50E19D9566A}"/>
               </a:ext>
             </a:extLst>
           </p:cNvPr>
@@ -9957,7 +9957,7 @@
             <a:defPPr>
               <a:defRPr sz="2400" b="0">
                 <a:solidFill>
-                  <a:srgbClr val="F3EEE8"/>
+                  <a:srgbClr val="F1EEE8"/>
                 </a:solidFill>
                 <a:latin typeface="Arial"/>
                 <a:ea typeface="Arial"/>
@@ -9969,7 +9969,7 @@
             <a:pPr>
               <a:defRPr sz="2400" b="0">
                 <a:solidFill>
-                  <a:srgbClr val="F3EEE8"/>
+                  <a:srgbClr val="F1EEE8"/>
                 </a:solidFill>
                 <a:latin typeface="Arial"/>
                 <a:ea typeface="Arial"/>
@@ -9979,7 +9979,7 @@
             <a:r>
               <a:rPr sz="2400" b="0">
                 <a:solidFill>
-                  <a:srgbClr val="F3EEE8"/>
+                  <a:srgbClr val="F1EEE8"/>
                 </a:solidFill>
                 <a:latin typeface="Arial"/>
                 <a:ea typeface="Arial"/>
@@ -9992,7 +9992,7 @@
             <a:pPr>
               <a:defRPr sz="2400" b="0">
                 <a:solidFill>
-                  <a:srgbClr val="F3EEE8"/>
+                  <a:srgbClr val="F1EEE8"/>
                 </a:solidFill>
                 <a:latin typeface="Arial"/>
                 <a:ea typeface="Arial"/>
@@ -10002,7 +10002,7 @@
             <a:r>
               <a:rPr sz="2400" b="0">
                 <a:solidFill>
-                  <a:srgbClr val="F3EEE8"/>
+                  <a:srgbClr val="F1EEE8"/>
                 </a:solidFill>
                 <a:latin typeface="Arial"/>
                 <a:ea typeface="Arial"/>
@@ -10018,7 +10018,7 @@
           <p:cNvPr id="4" name="">
             <a:extLst xmlns:a="http://schemas.openxmlformats.org/drawingml/2006/main">
               <a:ext uri="{FF2B5EF4-FFF2-40B4-BE49-F238E27FC236}">
-                <a16:creationId xmlns:a16="http://schemas.microsoft.com/office/drawing/2014/main" id="{470161F9-83BD-40BB-8C00-A2A88D1DD13A}"/>
+                <a16:creationId xmlns:a16="http://schemas.microsoft.com/office/drawing/2014/main" id="{6F600F33-198F-4329-A5A1-9817B78548BD}"/>
               </a:ext>
             </a:extLst>
           </p:cNvPr>
@@ -10046,7 +10046,7 @@
             <a:defPPr>
               <a:defRPr sz="2400" b="1">
                 <a:solidFill>
-                  <a:srgbClr val="BD9A78"/>
+                  <a:srgbClr val="C6A27F"/>
                 </a:solidFill>
                 <a:latin typeface="Arial"/>
                 <a:ea typeface="Arial"/>
@@ -10058,7 +10058,7 @@
             <a:pPr>
               <a:defRPr sz="2400" b="1">
                 <a:solidFill>
-                  <a:srgbClr val="BD9A78"/>
+                  <a:srgbClr val="C6A27F"/>
                 </a:solidFill>
                 <a:latin typeface="Arial"/>
                 <a:ea typeface="Arial"/>
@@ -10068,7 +10068,7 @@
             <a:r>
               <a:rPr sz="2400" b="1">
                 <a:solidFill>
-                  <a:srgbClr val="BD9A78"/>
+                  <a:srgbClr val="C6A27F"/>
                 </a:solidFill>
                 <a:latin typeface="Arial"/>
                 <a:ea typeface="Arial"/>
@@ -10084,7 +10084,7 @@
           <p:cNvPr id="5" name="">
             <a:extLst xmlns:a="http://schemas.openxmlformats.org/drawingml/2006/main">
               <a:ext uri="{FF2B5EF4-FFF2-40B4-BE49-F238E27FC236}">
-                <a16:creationId xmlns:a16="http://schemas.microsoft.com/office/drawing/2014/main" id="{B09D18DA-5337-460C-B2BA-4292A7BA3FD2}"/>
+                <a16:creationId xmlns:a16="http://schemas.microsoft.com/office/drawing/2014/main" id="{5A5FBEDE-3C4E-4D8B-8CEB-F76AE82A936E}"/>
               </a:ext>
             </a:extLst>
           </p:cNvPr>
@@ -10112,7 +10112,7 @@
             <a:defPPr>
               <a:defRPr sz="2400" b="0">
                 <a:solidFill>
-                  <a:srgbClr val="F3EEE8"/>
+                  <a:srgbClr val="F1EEE8"/>
                 </a:solidFill>
                 <a:latin typeface="Arial"/>
                 <a:ea typeface="Arial"/>
@@ -10124,7 +10124,7 @@
             <a:pPr>
               <a:defRPr sz="2400" b="0">
                 <a:solidFill>
-                  <a:srgbClr val="F3EEE8"/>
+                  <a:srgbClr val="F1EEE8"/>
                 </a:solidFill>
                 <a:latin typeface="Arial"/>
                 <a:ea typeface="Arial"/>
@@ -10134,7 +10134,7 @@
             <a:r>
               <a:rPr sz="2400" b="0">
                 <a:solidFill>
-                  <a:srgbClr val="F3EEE8"/>
+                  <a:srgbClr val="F1EEE8"/>
                 </a:solidFill>
                 <a:latin typeface="Arial"/>
                 <a:ea typeface="Arial"/>
@@ -10147,7 +10147,7 @@
             <a:pPr>
               <a:defRPr sz="2400" b="0">
                 <a:solidFill>
-                  <a:srgbClr val="F3EEE8"/>
+                  <a:srgbClr val="F1EEE8"/>
                 </a:solidFill>
                 <a:latin typeface="Arial"/>
                 <a:ea typeface="Arial"/>
@@ -10157,7 +10157,7 @@
             <a:r>
               <a:rPr sz="2400" b="0">
                 <a:solidFill>
-                  <a:srgbClr val="F3EEE8"/>
+                  <a:srgbClr val="F1EEE8"/>
                 </a:solidFill>
                 <a:latin typeface="Arial"/>
                 <a:ea typeface="Arial"/>
@@ -10173,7 +10173,7 @@
           <p:cNvPr id="6" name="">
             <a:extLst xmlns:a="http://schemas.openxmlformats.org/drawingml/2006/main">
               <a:ext uri="{FF2B5EF4-FFF2-40B4-BE49-F238E27FC236}">
-                <a16:creationId xmlns:a16="http://schemas.microsoft.com/office/drawing/2014/main" id="{C9A76AD0-86D3-49E6-A233-49A86AFF419F}"/>
+                <a16:creationId xmlns:a16="http://schemas.microsoft.com/office/drawing/2014/main" id="{A28207F5-3541-46C2-ABE7-99CCA54A9346}"/>
               </a:ext>
             </a:extLst>
           </p:cNvPr>
@@ -10201,7 +10201,7 @@
             <a:defPPr>
               <a:defRPr sz="2400" b="1">
                 <a:solidFill>
-                  <a:srgbClr val="BD9A78"/>
+                  <a:srgbClr val="C6A27F"/>
                 </a:solidFill>
                 <a:latin typeface="Arial"/>
                 <a:ea typeface="Arial"/>
@@ -10213,7 +10213,7 @@
             <a:pPr>
               <a:defRPr sz="2400" b="1">
                 <a:solidFill>
-                  <a:srgbClr val="BD9A78"/>
+                  <a:srgbClr val="C6A27F"/>
                 </a:solidFill>
                 <a:latin typeface="Arial"/>
                 <a:ea typeface="Arial"/>
@@ -10223,7 +10223,7 @@
             <a:r>
               <a:rPr sz="2400" b="1">
                 <a:solidFill>
-                  <a:srgbClr val="BD9A78"/>
+                  <a:srgbClr val="C6A27F"/>
                 </a:solidFill>
                 <a:latin typeface="Arial"/>
                 <a:ea typeface="Arial"/>
@@ -10239,7 +10239,7 @@
           <p:cNvPr id="7" name="">
             <a:extLst xmlns:a="http://schemas.openxmlformats.org/drawingml/2006/main">
               <a:ext uri="{FF2B5EF4-FFF2-40B4-BE49-F238E27FC236}">
-                <a16:creationId xmlns:a16="http://schemas.microsoft.com/office/drawing/2014/main" id="{9900B911-14F4-44B0-9A45-71378E14EFD4}"/>
+                <a16:creationId xmlns:a16="http://schemas.microsoft.com/office/drawing/2014/main" id="{CE5800EA-2969-4914-B4DA-5408D345070F}"/>
               </a:ext>
             </a:extLst>
           </p:cNvPr>
@@ -10267,7 +10267,7 @@
             <a:defPPr>
               <a:defRPr sz="2400" b="0">
                 <a:solidFill>
-                  <a:srgbClr val="F3EEE8"/>
+                  <a:srgbClr val="F1EEE8"/>
                 </a:solidFill>
                 <a:latin typeface="Arial"/>
                 <a:ea typeface="Arial"/>
@@ -10279,7 +10279,7 @@
             <a:pPr>
               <a:defRPr sz="2400" b="0">
                 <a:solidFill>
-                  <a:srgbClr val="F3EEE8"/>
+                  <a:srgbClr val="F1EEE8"/>
                 </a:solidFill>
                 <a:latin typeface="Arial"/>
                 <a:ea typeface="Arial"/>
@@ -10289,7 +10289,7 @@
             <a:r>
               <a:rPr sz="2400" b="0">
                 <a:solidFill>
-                  <a:srgbClr val="F3EEE8"/>
+                  <a:srgbClr val="F1EEE8"/>
                 </a:solidFill>
                 <a:latin typeface="Arial"/>
                 <a:ea typeface="Arial"/>
@@ -10302,7 +10302,7 @@
             <a:pPr>
               <a:defRPr sz="2400" b="0">
                 <a:solidFill>
-                  <a:srgbClr val="F3EEE8"/>
+                  <a:srgbClr val="F1EEE8"/>
                 </a:solidFill>
                 <a:latin typeface="Arial"/>
                 <a:ea typeface="Arial"/>
@@ -10312,7 +10312,7 @@
             <a:r>
               <a:rPr sz="2400" b="0">
                 <a:solidFill>
-                  <a:srgbClr val="F3EEE8"/>
+                  <a:srgbClr val="F1EEE8"/>
                 </a:solidFill>
                 <a:latin typeface="Arial"/>
                 <a:ea typeface="Arial"/>
@@ -10328,7 +10328,7 @@
           <p:cNvPr id="8" name="">
             <a:extLst xmlns:a="http://schemas.openxmlformats.org/drawingml/2006/main">
               <a:ext uri="{FF2B5EF4-FFF2-40B4-BE49-F238E27FC236}">
-                <a16:creationId xmlns:a16="http://schemas.microsoft.com/office/drawing/2014/main" id="{F8AB41CF-7296-4BCB-A001-6D308D59FF88}"/>
+                <a16:creationId xmlns:a16="http://schemas.microsoft.com/office/drawing/2014/main" id="{FC937B32-C536-48E0-9C75-EB83C499A0CC}"/>
               </a:ext>
             </a:extLst>
           </p:cNvPr>
@@ -10356,7 +10356,7 @@
             <a:defPPr>
               <a:defRPr sz="1875" b="0">
                 <a:solidFill>
-                  <a:srgbClr val="93A4AA"/>
+                  <a:srgbClr val="A9B8BC"/>
                 </a:solidFill>
                 <a:latin typeface="Arial"/>
                 <a:ea typeface="Arial"/>
@@ -10368,7 +10368,7 @@
             <a:pPr>
               <a:defRPr sz="1875" b="0">
                 <a:solidFill>
-                  <a:srgbClr val="93A4AA"/>
+                  <a:srgbClr val="A9B8BC"/>
                 </a:solidFill>
                 <a:latin typeface="Arial"/>
                 <a:ea typeface="Arial"/>
@@ -10378,7 +10378,7 @@
             <a:r>
               <a:rPr sz="1875" b="0">
                 <a:solidFill>
-                  <a:srgbClr val="93A4AA"/>
+                  <a:srgbClr val="A9B8BC"/>
                 </a:solidFill>
                 <a:latin typeface="Arial"/>
                 <a:ea typeface="Arial"/>
@@ -10394,7 +10394,7 @@
           <p:cNvPr id="9" name="">
             <a:extLst xmlns:a="http://schemas.openxmlformats.org/drawingml/2006/main">
               <a:ext uri="{FF2B5EF4-FFF2-40B4-BE49-F238E27FC236}">
-                <a16:creationId xmlns:a16="http://schemas.microsoft.com/office/drawing/2014/main" id="{9A44983F-CD8F-46C0-BC85-3402C2CB0D7B}"/>
+                <a16:creationId xmlns:a16="http://schemas.microsoft.com/office/drawing/2014/main" id="{6AC20220-5619-42C5-95A3-D1D8569A4B96}"/>
               </a:ext>
             </a:extLst>
           </p:cNvPr>
@@ -10422,7 +10422,7 @@
             <a:defPPr>
               <a:defRPr sz="1425" b="0">
                 <a:solidFill>
-                  <a:srgbClr val="93A4AA"/>
+                  <a:srgbClr val="A9B8BC"/>
                 </a:solidFill>
                 <a:latin typeface="Arial"/>
                 <a:ea typeface="Arial"/>
@@ -10434,7 +10434,7 @@
             <a:pPr>
               <a:defRPr sz="1425" b="0">
                 <a:solidFill>
-                  <a:srgbClr val="93A4AA"/>
+                  <a:srgbClr val="A9B8BC"/>
                 </a:solidFill>
                 <a:latin typeface="Arial"/>
                 <a:ea typeface="Arial"/>
@@ -10444,7 +10444,7 @@
             <a:r>
               <a:rPr sz="1425" b="0">
                 <a:solidFill>
-                  <a:srgbClr val="93A4AA"/>
+                  <a:srgbClr val="A9B8BC"/>
                 </a:solidFill>
                 <a:latin typeface="Arial"/>
                 <a:ea typeface="Arial"/>
@@ -10458,7 +10458,7 @@
     </p:spTree>
     <p:extLst>
       <p:ext uri="{BB962C8B-B14F-4D97-AF65-F5344CB8AC3E}">
-        <p14:creationId xmlns:p14="http://schemas.microsoft.com/office/powerpoint/2010/main" val="1231469767"/>
+        <p14:creationId xmlns:p14="http://schemas.microsoft.com/office/powerpoint/2010/main" val="1973368497"/>
       </p:ext>
     </p:extLst>
   </p:cSld>
@@ -10471,7 +10471,7 @@
     <p:bg>
       <p:bgPr>
         <a:solidFill xmlns:a="http://schemas.openxmlformats.org/drawingml/2006/main">
-          <a:srgbClr val="202433"/>
+          <a:srgbClr val="222636"/>
         </a:solidFill>
       </p:bgPr>
     </p:bg>
@@ -10489,7 +10489,7 @@
           <p:cNvPr id="9" name="">
             <a:extLst xmlns:a="http://schemas.openxmlformats.org/drawingml/2006/main">
               <a:ext uri="{FF2B5EF4-FFF2-40B4-BE49-F238E27FC236}">
-                <a16:creationId xmlns:a16="http://schemas.microsoft.com/office/drawing/2014/main" id="{E4DADA00-38FD-4B3B-9BE5-E9124F5868F0}"/>
+                <a16:creationId xmlns:a16="http://schemas.microsoft.com/office/drawing/2014/main" id="{3F050DB4-A7DD-45E8-887E-07800DD85BA5}"/>
               </a:ext>
             </a:extLst>
           </p:cNvPr>
@@ -10517,7 +10517,7 @@
             <a:defPPr>
               <a:defRPr sz="4350" b="1">
                 <a:solidFill>
-                  <a:srgbClr val="BD9A78"/>
+                  <a:srgbClr val="C6A27F"/>
                 </a:solidFill>
                 <a:latin typeface="Arial"/>
                 <a:ea typeface="Arial"/>
@@ -10529,7 +10529,7 @@
             <a:pPr>
               <a:defRPr sz="4350" b="1">
                 <a:solidFill>
-                  <a:srgbClr val="BD9A78"/>
+                  <a:srgbClr val="C6A27F"/>
                 </a:solidFill>
                 <a:latin typeface="Arial"/>
                 <a:ea typeface="Arial"/>
@@ -10539,7 +10539,7 @@
             <a:r>
               <a:rPr sz="4350" b="1">
                 <a:solidFill>
-                  <a:srgbClr val="BD9A78"/>
+                  <a:srgbClr val="C6A27F"/>
                 </a:solidFill>
                 <a:latin typeface="Arial"/>
                 <a:ea typeface="Arial"/>
@@ -10555,7 +10555,7 @@
           <p:cNvPr id="2" name="">
             <a:extLst xmlns:a="http://schemas.openxmlformats.org/drawingml/2006/main">
               <a:ext uri="{FF2B5EF4-FFF2-40B4-BE49-F238E27FC236}">
-                <a16:creationId xmlns:a16="http://schemas.microsoft.com/office/drawing/2014/main" id="{B66D00CF-E3CA-43EC-8F32-9975026F16F0}"/>
+                <a16:creationId xmlns:a16="http://schemas.microsoft.com/office/drawing/2014/main" id="{BDA1EF1A-C09D-454E-8E2D-91A18F35F1AD}"/>
               </a:ext>
             </a:extLst>
           </p:cNvPr>
@@ -10583,7 +10583,7 @@
             <a:defPPr>
               <a:defRPr sz="2400" b="1">
                 <a:solidFill>
-                  <a:srgbClr val="BD9A78"/>
+                  <a:srgbClr val="C6A27F"/>
                 </a:solidFill>
                 <a:latin typeface="Arial"/>
                 <a:ea typeface="Arial"/>
@@ -10595,7 +10595,7 @@
             <a:pPr>
               <a:defRPr sz="2400" b="1">
                 <a:solidFill>
-                  <a:srgbClr val="BD9A78"/>
+                  <a:srgbClr val="C6A27F"/>
                 </a:solidFill>
                 <a:latin typeface="Arial"/>
                 <a:ea typeface="Arial"/>
@@ -10605,7 +10605,7 @@
             <a:r>
               <a:rPr sz="2400" b="1">
                 <a:solidFill>
-                  <a:srgbClr val="BD9A78"/>
+                  <a:srgbClr val="C6A27F"/>
                 </a:solidFill>
                 <a:latin typeface="Arial"/>
                 <a:ea typeface="Arial"/>
@@ -10621,7 +10621,7 @@
           <p:cNvPr id="3" name="">
             <a:extLst xmlns:a="http://schemas.openxmlformats.org/drawingml/2006/main">
               <a:ext uri="{FF2B5EF4-FFF2-40B4-BE49-F238E27FC236}">
-                <a16:creationId xmlns:a16="http://schemas.microsoft.com/office/drawing/2014/main" id="{0D344379-A245-43DE-BD61-1DF14FD9B468}"/>
+                <a16:creationId xmlns:a16="http://schemas.microsoft.com/office/drawing/2014/main" id="{D4012174-9B70-4F7F-AF9B-E2233336F4B9}"/>
               </a:ext>
             </a:extLst>
           </p:cNvPr>
@@ -10649,7 +10649,7 @@
             <a:defPPr>
               <a:defRPr sz="2400" b="0">
                 <a:solidFill>
-                  <a:srgbClr val="F3EEE8"/>
+                  <a:srgbClr val="F1EEE8"/>
                 </a:solidFill>
                 <a:latin typeface="Arial"/>
                 <a:ea typeface="Arial"/>
@@ -10661,7 +10661,7 @@
             <a:pPr>
               <a:defRPr sz="2400" b="0">
                 <a:solidFill>
-                  <a:srgbClr val="F3EEE8"/>
+                  <a:srgbClr val="F1EEE8"/>
                 </a:solidFill>
                 <a:latin typeface="Arial"/>
                 <a:ea typeface="Arial"/>
@@ -10671,7 +10671,7 @@
             <a:r>
               <a:rPr sz="2400" b="0">
                 <a:solidFill>
-                  <a:srgbClr val="F3EEE8"/>
+                  <a:srgbClr val="F1EEE8"/>
                 </a:solidFill>
                 <a:latin typeface="Arial"/>
                 <a:ea typeface="Arial"/>
@@ -10684,7 +10684,7 @@
             <a:pPr>
               <a:defRPr sz="2400" b="0">
                 <a:solidFill>
-                  <a:srgbClr val="F3EEE8"/>
+                  <a:srgbClr val="F1EEE8"/>
                 </a:solidFill>
                 <a:latin typeface="Arial"/>
                 <a:ea typeface="Arial"/>
@@ -10694,7 +10694,7 @@
             <a:r>
               <a:rPr sz="2400" b="0">
                 <a:solidFill>
-                  <a:srgbClr val="F3EEE8"/>
+                  <a:srgbClr val="F1EEE8"/>
                 </a:solidFill>
                 <a:latin typeface="Arial"/>
                 <a:ea typeface="Arial"/>
@@ -10710,7 +10710,7 @@
           <p:cNvPr id="4" name="">
             <a:extLst xmlns:a="http://schemas.openxmlformats.org/drawingml/2006/main">
               <a:ext uri="{FF2B5EF4-FFF2-40B4-BE49-F238E27FC236}">
-                <a16:creationId xmlns:a16="http://schemas.microsoft.com/office/drawing/2014/main" id="{6985B553-DACF-4FB6-955E-2EB84ED795BA}"/>
+                <a16:creationId xmlns:a16="http://schemas.microsoft.com/office/drawing/2014/main" id="{C7C31E08-A4B8-459A-994E-7E53A8A0F1C4}"/>
               </a:ext>
             </a:extLst>
           </p:cNvPr>
@@ -10738,7 +10738,7 @@
             <a:defPPr>
               <a:defRPr sz="2400" b="1">
                 <a:solidFill>
-                  <a:srgbClr val="BD9A78"/>
+                  <a:srgbClr val="C6A27F"/>
                 </a:solidFill>
                 <a:latin typeface="Arial"/>
                 <a:ea typeface="Arial"/>
@@ -10750,7 +10750,7 @@
             <a:pPr>
               <a:defRPr sz="2400" b="1">
                 <a:solidFill>
-                  <a:srgbClr val="BD9A78"/>
+                  <a:srgbClr val="C6A27F"/>
                 </a:solidFill>
                 <a:latin typeface="Arial"/>
                 <a:ea typeface="Arial"/>
@@ -10760,7 +10760,7 @@
             <a:r>
               <a:rPr sz="2400" b="1">
                 <a:solidFill>
-                  <a:srgbClr val="BD9A78"/>
+                  <a:srgbClr val="C6A27F"/>
                 </a:solidFill>
                 <a:latin typeface="Arial"/>
                 <a:ea typeface="Arial"/>
@@ -10776,7 +10776,7 @@
           <p:cNvPr id="5" name="">
             <a:extLst xmlns:a="http://schemas.openxmlformats.org/drawingml/2006/main">
               <a:ext uri="{FF2B5EF4-FFF2-40B4-BE49-F238E27FC236}">
-                <a16:creationId xmlns:a16="http://schemas.microsoft.com/office/drawing/2014/main" id="{405553E9-97E6-4920-B264-D62D2A8E61C6}"/>
+                <a16:creationId xmlns:a16="http://schemas.microsoft.com/office/drawing/2014/main" id="{264368E3-EA5A-460B-BE52-D009C27EADA5}"/>
               </a:ext>
             </a:extLst>
           </p:cNvPr>
@@ -10804,7 +10804,7 @@
             <a:defPPr>
               <a:defRPr sz="2400" b="0">
                 <a:solidFill>
-                  <a:srgbClr val="F3EEE8"/>
+                  <a:srgbClr val="F1EEE8"/>
                 </a:solidFill>
                 <a:latin typeface="Arial"/>
                 <a:ea typeface="Arial"/>
@@ -10816,7 +10816,7 @@
             <a:pPr>
               <a:defRPr sz="2400" b="0">
                 <a:solidFill>
-                  <a:srgbClr val="F3EEE8"/>
+                  <a:srgbClr val="F1EEE8"/>
                 </a:solidFill>
                 <a:latin typeface="Arial"/>
                 <a:ea typeface="Arial"/>
@@ -10826,7 +10826,7 @@
             <a:r>
               <a:rPr sz="2400" b="0">
                 <a:solidFill>
-                  <a:srgbClr val="F3EEE8"/>
+                  <a:srgbClr val="F1EEE8"/>
                 </a:solidFill>
                 <a:latin typeface="Arial"/>
                 <a:ea typeface="Arial"/>
@@ -10839,7 +10839,7 @@
             <a:pPr>
               <a:defRPr sz="2400" b="0">
                 <a:solidFill>
-                  <a:srgbClr val="F3EEE8"/>
+                  <a:srgbClr val="F1EEE8"/>
                 </a:solidFill>
                 <a:latin typeface="Arial"/>
                 <a:ea typeface="Arial"/>
@@ -10849,7 +10849,7 @@
             <a:r>
               <a:rPr sz="2400" b="0">
                 <a:solidFill>
-                  <a:srgbClr val="F3EEE8"/>
+                  <a:srgbClr val="F1EEE8"/>
                 </a:solidFill>
                 <a:latin typeface="Arial"/>
                 <a:ea typeface="Arial"/>
@@ -10865,7 +10865,7 @@
           <p:cNvPr id="6" name="">
             <a:extLst xmlns:a="http://schemas.openxmlformats.org/drawingml/2006/main">
               <a:ext uri="{FF2B5EF4-FFF2-40B4-BE49-F238E27FC236}">
-                <a16:creationId xmlns:a16="http://schemas.microsoft.com/office/drawing/2014/main" id="{FE35840B-72C3-457F-B55B-511D6F7035DE}"/>
+                <a16:creationId xmlns:a16="http://schemas.microsoft.com/office/drawing/2014/main" id="{68128BB4-CFE9-434C-AB9F-7A6DA1CC455D}"/>
               </a:ext>
             </a:extLst>
           </p:cNvPr>
@@ -10893,7 +10893,7 @@
             <a:defPPr>
               <a:defRPr sz="2400" b="1">
                 <a:solidFill>
-                  <a:srgbClr val="BD9A78"/>
+                  <a:srgbClr val="C6A27F"/>
                 </a:solidFill>
                 <a:latin typeface="Arial"/>
                 <a:ea typeface="Arial"/>
@@ -10905,7 +10905,7 @@
             <a:pPr>
               <a:defRPr sz="2400" b="1">
                 <a:solidFill>
-                  <a:srgbClr val="BD9A78"/>
+                  <a:srgbClr val="C6A27F"/>
                 </a:solidFill>
                 <a:latin typeface="Arial"/>
                 <a:ea typeface="Arial"/>
@@ -10915,7 +10915,7 @@
             <a:r>
               <a:rPr sz="2400" b="1">
                 <a:solidFill>
-                  <a:srgbClr val="BD9A78"/>
+                  <a:srgbClr val="C6A27F"/>
                 </a:solidFill>
                 <a:latin typeface="Arial"/>
                 <a:ea typeface="Arial"/>
@@ -10931,7 +10931,7 @@
           <p:cNvPr id="7" name="">
             <a:extLst xmlns:a="http://schemas.openxmlformats.org/drawingml/2006/main">
               <a:ext uri="{FF2B5EF4-FFF2-40B4-BE49-F238E27FC236}">
-                <a16:creationId xmlns:a16="http://schemas.microsoft.com/office/drawing/2014/main" id="{288D3495-C7CA-4F57-B0FB-0F7398DFDF18}"/>
+                <a16:creationId xmlns:a16="http://schemas.microsoft.com/office/drawing/2014/main" id="{91BD0A1A-F015-4463-B944-E44CB6250D97}"/>
               </a:ext>
             </a:extLst>
           </p:cNvPr>
@@ -10959,7 +10959,7 @@
             <a:defPPr>
               <a:defRPr sz="2400" b="0">
                 <a:solidFill>
-                  <a:srgbClr val="F3EEE8"/>
+                  <a:srgbClr val="F1EEE8"/>
                 </a:solidFill>
                 <a:latin typeface="Arial"/>
                 <a:ea typeface="Arial"/>
@@ -10971,7 +10971,7 @@
             <a:pPr>
               <a:defRPr sz="2400" b="0">
                 <a:solidFill>
-                  <a:srgbClr val="F3EEE8"/>
+                  <a:srgbClr val="F1EEE8"/>
                 </a:solidFill>
                 <a:latin typeface="Arial"/>
                 <a:ea typeface="Arial"/>
@@ -10981,7 +10981,7 @@
             <a:r>
               <a:rPr sz="2400" b="0">
                 <a:solidFill>
-                  <a:srgbClr val="F3EEE8"/>
+                  <a:srgbClr val="F1EEE8"/>
                 </a:solidFill>
                 <a:latin typeface="Arial"/>
                 <a:ea typeface="Arial"/>
@@ -10994,7 +10994,7 @@
             <a:pPr>
               <a:defRPr sz="2400" b="0">
                 <a:solidFill>
-                  <a:srgbClr val="F3EEE8"/>
+                  <a:srgbClr val="F1EEE8"/>
                 </a:solidFill>
                 <a:latin typeface="Arial"/>
                 <a:ea typeface="Arial"/>
@@ -11004,7 +11004,7 @@
             <a:r>
               <a:rPr sz="2400" b="0">
                 <a:solidFill>
-                  <a:srgbClr val="F3EEE8"/>
+                  <a:srgbClr val="F1EEE8"/>
                 </a:solidFill>
                 <a:latin typeface="Arial"/>
                 <a:ea typeface="Arial"/>
@@ -11020,7 +11020,7 @@
           <p:cNvPr id="8" name="">
             <a:extLst xmlns:a="http://schemas.openxmlformats.org/drawingml/2006/main">
               <a:ext uri="{FF2B5EF4-FFF2-40B4-BE49-F238E27FC236}">
-                <a16:creationId xmlns:a16="http://schemas.microsoft.com/office/drawing/2014/main" id="{8E28E8F0-C8B9-44AE-9588-34F22EF0CB46}"/>
+                <a16:creationId xmlns:a16="http://schemas.microsoft.com/office/drawing/2014/main" id="{343B29D5-1547-48C7-8F42-F29172D687C5}"/>
               </a:ext>
             </a:extLst>
           </p:cNvPr>
@@ -11048,7 +11048,7 @@
             <a:defPPr>
               <a:defRPr sz="1425" b="0">
                 <a:solidFill>
-                  <a:srgbClr val="93A4AA"/>
+                  <a:srgbClr val="A9B8BC"/>
                 </a:solidFill>
                 <a:latin typeface="Arial"/>
                 <a:ea typeface="Arial"/>
@@ -11060,7 +11060,7 @@
             <a:pPr>
               <a:defRPr sz="1425" b="0">
                 <a:solidFill>
-                  <a:srgbClr val="93A4AA"/>
+                  <a:srgbClr val="A9B8BC"/>
                 </a:solidFill>
                 <a:latin typeface="Arial"/>
                 <a:ea typeface="Arial"/>
@@ -11070,7 +11070,7 @@
             <a:r>
               <a:rPr sz="1425" b="0">
                 <a:solidFill>
-                  <a:srgbClr val="93A4AA"/>
+                  <a:srgbClr val="A9B8BC"/>
                 </a:solidFill>
                 <a:latin typeface="Arial"/>
                 <a:ea typeface="Arial"/>
@@ -11084,7 +11084,7 @@
     </p:spTree>
     <p:extLst>
       <p:ext uri="{BB962C8B-B14F-4D97-AF65-F5344CB8AC3E}">
-        <p14:creationId xmlns:p14="http://schemas.microsoft.com/office/powerpoint/2010/main" val="1765824724"/>
+        <p14:creationId xmlns:p14="http://schemas.microsoft.com/office/powerpoint/2010/main" val="1116942357"/>
       </p:ext>
     </p:extLst>
   </p:cSld>
@@ -11097,7 +11097,7 @@
     <p:bg>
       <p:bgPr>
         <a:solidFill xmlns:a="http://schemas.openxmlformats.org/drawingml/2006/main">
-          <a:srgbClr val="202433"/>
+          <a:srgbClr val="222636"/>
         </a:solidFill>
       </p:bgPr>
     </p:bg>
@@ -11115,7 +11115,7 @@
           <p:cNvPr id="11" name="">
             <a:extLst xmlns:a="http://schemas.openxmlformats.org/drawingml/2006/main">
               <a:ext uri="{FF2B5EF4-FFF2-40B4-BE49-F238E27FC236}">
-                <a16:creationId xmlns:a16="http://schemas.microsoft.com/office/drawing/2014/main" id="{F4A9FBAB-84F1-4982-B2D0-774F975B81A7}"/>
+                <a16:creationId xmlns:a16="http://schemas.microsoft.com/office/drawing/2014/main" id="{AE8254D1-55D2-4065-9D9F-EE63AC1A516E}"/>
               </a:ext>
             </a:extLst>
           </p:cNvPr>
@@ -11143,7 +11143,7 @@
             <a:defPPr>
               <a:defRPr sz="4350" b="1">
                 <a:solidFill>
-                  <a:srgbClr val="BD9A78"/>
+                  <a:srgbClr val="C6A27F"/>
                 </a:solidFill>
                 <a:latin typeface="Arial"/>
                 <a:ea typeface="Arial"/>
@@ -11155,7 +11155,7 @@
             <a:pPr>
               <a:defRPr sz="4350" b="1">
                 <a:solidFill>
-                  <a:srgbClr val="BD9A78"/>
+                  <a:srgbClr val="C6A27F"/>
                 </a:solidFill>
                 <a:latin typeface="Arial"/>
                 <a:ea typeface="Arial"/>
@@ -11165,7 +11165,7 @@
             <a:r>
               <a:rPr sz="4350" b="1">
                 <a:solidFill>
-                  <a:srgbClr val="BD9A78"/>
+                  <a:srgbClr val="C6A27F"/>
                 </a:solidFill>
                 <a:latin typeface="Arial"/>
                 <a:ea typeface="Arial"/>
@@ -11181,7 +11181,7 @@
           <p:cNvPr id="2" name="">
             <a:extLst xmlns:a="http://schemas.openxmlformats.org/drawingml/2006/main">
               <a:ext uri="{FF2B5EF4-FFF2-40B4-BE49-F238E27FC236}">
-                <a16:creationId xmlns:a16="http://schemas.microsoft.com/office/drawing/2014/main" id="{E3D7EF56-C0D3-4CC9-9D42-9C0F86B78698}"/>
+                <a16:creationId xmlns:a16="http://schemas.microsoft.com/office/drawing/2014/main" id="{04C06EF9-0F7B-42C9-A35B-D6F5764D3072}"/>
               </a:ext>
             </a:extLst>
           </p:cNvPr>
@@ -11209,7 +11209,7 @@
             <a:defPPr>
               <a:defRPr sz="2400" b="1">
                 <a:solidFill>
-                  <a:srgbClr val="BD9A78"/>
+                  <a:srgbClr val="C6A27F"/>
                 </a:solidFill>
                 <a:latin typeface="Arial"/>
                 <a:ea typeface="Arial"/>
@@ -11221,7 +11221,7 @@
             <a:pPr>
               <a:defRPr sz="2400" b="1">
                 <a:solidFill>
-                  <a:srgbClr val="BD9A78"/>
+                  <a:srgbClr val="C6A27F"/>
                 </a:solidFill>
                 <a:latin typeface="Arial"/>
                 <a:ea typeface="Arial"/>
@@ -11231,7 +11231,7 @@
             <a:r>
               <a:rPr sz="2400" b="1">
                 <a:solidFill>
-                  <a:srgbClr val="BD9A78"/>
+                  <a:srgbClr val="C6A27F"/>
                 </a:solidFill>
                 <a:latin typeface="Arial"/>
                 <a:ea typeface="Arial"/>
@@ -11247,7 +11247,7 @@
           <p:cNvPr id="3" name="">
             <a:extLst xmlns:a="http://schemas.openxmlformats.org/drawingml/2006/main">
               <a:ext uri="{FF2B5EF4-FFF2-40B4-BE49-F238E27FC236}">
-                <a16:creationId xmlns:a16="http://schemas.microsoft.com/office/drawing/2014/main" id="{FE9A7CFB-DC73-4939-A293-E925A377361F}"/>
+                <a16:creationId xmlns:a16="http://schemas.microsoft.com/office/drawing/2014/main" id="{C595D91D-34D5-4E8C-84BE-7E22751BB8D2}"/>
               </a:ext>
             </a:extLst>
           </p:cNvPr>
@@ -11275,7 +11275,7 @@
             <a:defPPr>
               <a:defRPr sz="2400" b="0">
                 <a:solidFill>
-                  <a:srgbClr val="F3EEE8"/>
+                  <a:srgbClr val="F1EEE8"/>
                 </a:solidFill>
                 <a:latin typeface="Arial"/>
                 <a:ea typeface="Arial"/>
@@ -11287,7 +11287,7 @@
             <a:pPr>
               <a:defRPr sz="2400" b="0">
                 <a:solidFill>
-                  <a:srgbClr val="F3EEE8"/>
+                  <a:srgbClr val="F1EEE8"/>
                 </a:solidFill>
                 <a:latin typeface="Arial"/>
                 <a:ea typeface="Arial"/>
@@ -11297,7 +11297,7 @@
             <a:r>
               <a:rPr sz="2400" b="0">
                 <a:solidFill>
-                  <a:srgbClr val="F3EEE8"/>
+                  <a:srgbClr val="F1EEE8"/>
                 </a:solidFill>
                 <a:latin typeface="Arial"/>
                 <a:ea typeface="Arial"/>
@@ -11313,7 +11313,7 @@
           <p:cNvPr id="4" name="">
             <a:extLst xmlns:a="http://schemas.openxmlformats.org/drawingml/2006/main">
               <a:ext uri="{FF2B5EF4-FFF2-40B4-BE49-F238E27FC236}">
-                <a16:creationId xmlns:a16="http://schemas.microsoft.com/office/drawing/2014/main" id="{A8C9E405-734B-4475-88C8-101AA606D091}"/>
+                <a16:creationId xmlns:a16="http://schemas.microsoft.com/office/drawing/2014/main" id="{38A47830-3C51-4ACB-BE0C-28E65A2C4444}"/>
               </a:ext>
             </a:extLst>
           </p:cNvPr>
@@ -11341,7 +11341,7 @@
             <a:defPPr>
               <a:defRPr sz="2400" b="1">
                 <a:solidFill>
-                  <a:srgbClr val="BD9A78"/>
+                  <a:srgbClr val="C6A27F"/>
                 </a:solidFill>
                 <a:latin typeface="Arial"/>
                 <a:ea typeface="Arial"/>
@@ -11353,7 +11353,7 @@
             <a:pPr>
               <a:defRPr sz="2400" b="1">
                 <a:solidFill>
-                  <a:srgbClr val="BD9A78"/>
+                  <a:srgbClr val="C6A27F"/>
                 </a:solidFill>
                 <a:latin typeface="Arial"/>
                 <a:ea typeface="Arial"/>
@@ -11363,7 +11363,7 @@
             <a:r>
               <a:rPr sz="2400" b="1">
                 <a:solidFill>
-                  <a:srgbClr val="BD9A78"/>
+                  <a:srgbClr val="C6A27F"/>
                 </a:solidFill>
                 <a:latin typeface="Arial"/>
                 <a:ea typeface="Arial"/>
@@ -11379,7 +11379,7 @@
           <p:cNvPr id="5" name="">
             <a:extLst xmlns:a="http://schemas.openxmlformats.org/drawingml/2006/main">
               <a:ext uri="{FF2B5EF4-FFF2-40B4-BE49-F238E27FC236}">
-                <a16:creationId xmlns:a16="http://schemas.microsoft.com/office/drawing/2014/main" id="{32946C5B-E292-45CC-8B3F-6414FF2ACDD9}"/>
+                <a16:creationId xmlns:a16="http://schemas.microsoft.com/office/drawing/2014/main" id="{049E3C6E-F52E-468E-87E0-F10B8A7EF84B}"/>
               </a:ext>
             </a:extLst>
           </p:cNvPr>
@@ -11407,7 +11407,7 @@
             <a:defPPr>
               <a:defRPr sz="2400" b="0">
                 <a:solidFill>
-                  <a:srgbClr val="F3EEE8"/>
+                  <a:srgbClr val="F1EEE8"/>
                 </a:solidFill>
                 <a:latin typeface="Arial"/>
                 <a:ea typeface="Arial"/>
@@ -11419,7 +11419,7 @@
             <a:pPr>
               <a:defRPr sz="2400" b="0">
                 <a:solidFill>
-                  <a:srgbClr val="F3EEE8"/>
+                  <a:srgbClr val="F1EEE8"/>
                 </a:solidFill>
                 <a:latin typeface="Arial"/>
                 <a:ea typeface="Arial"/>
@@ -11429,7 +11429,7 @@
             <a:r>
               <a:rPr sz="2400" b="0">
                 <a:solidFill>
-                  <a:srgbClr val="F3EEE8"/>
+                  <a:srgbClr val="F1EEE8"/>
                 </a:solidFill>
                 <a:latin typeface="Arial"/>
                 <a:ea typeface="Arial"/>
@@ -11445,7 +11445,7 @@
           <p:cNvPr id="6" name="">
             <a:extLst xmlns:a="http://schemas.openxmlformats.org/drawingml/2006/main">
               <a:ext uri="{FF2B5EF4-FFF2-40B4-BE49-F238E27FC236}">
-                <a16:creationId xmlns:a16="http://schemas.microsoft.com/office/drawing/2014/main" id="{031604DF-555D-4A2D-9BF8-EFD784197521}"/>
+                <a16:creationId xmlns:a16="http://schemas.microsoft.com/office/drawing/2014/main" id="{85735DC0-DEED-4384-A38E-D04AE2FBE882}"/>
               </a:ext>
             </a:extLst>
           </p:cNvPr>
@@ -11473,7 +11473,7 @@
             <a:defPPr>
               <a:defRPr sz="2400" b="1">
                 <a:solidFill>
-                  <a:srgbClr val="BD9A78"/>
+                  <a:srgbClr val="C6A27F"/>
                 </a:solidFill>
                 <a:latin typeface="Arial"/>
                 <a:ea typeface="Arial"/>
@@ -11485,7 +11485,7 @@
             <a:pPr>
               <a:defRPr sz="2400" b="1">
                 <a:solidFill>
-                  <a:srgbClr val="BD9A78"/>
+                  <a:srgbClr val="C6A27F"/>
                 </a:solidFill>
                 <a:latin typeface="Arial"/>
                 <a:ea typeface="Arial"/>
@@ -11495,7 +11495,7 @@
             <a:r>
               <a:rPr sz="2400" b="1">
                 <a:solidFill>
-                  <a:srgbClr val="BD9A78"/>
+                  <a:srgbClr val="C6A27F"/>
                 </a:solidFill>
                 <a:latin typeface="Arial"/>
                 <a:ea typeface="Arial"/>
@@ -11511,7 +11511,7 @@
           <p:cNvPr id="7" name="">
             <a:extLst xmlns:a="http://schemas.openxmlformats.org/drawingml/2006/main">
               <a:ext uri="{FF2B5EF4-FFF2-40B4-BE49-F238E27FC236}">
-                <a16:creationId xmlns:a16="http://schemas.microsoft.com/office/drawing/2014/main" id="{B1C08CE3-1CFA-479D-B210-392985AD1CA2}"/>
+                <a16:creationId xmlns:a16="http://schemas.microsoft.com/office/drawing/2014/main" id="{ED69802B-05A9-45CF-AC91-FDB9D105792F}"/>
               </a:ext>
             </a:extLst>
           </p:cNvPr>
@@ -11539,7 +11539,7 @@
             <a:defPPr>
               <a:defRPr sz="2400" b="0">
                 <a:solidFill>
-                  <a:srgbClr val="F3EEE8"/>
+                  <a:srgbClr val="F1EEE8"/>
                 </a:solidFill>
                 <a:latin typeface="Arial"/>
                 <a:ea typeface="Arial"/>
@@ -11551,7 +11551,7 @@
             <a:pPr>
               <a:defRPr sz="2400" b="0">
                 <a:solidFill>
-                  <a:srgbClr val="F3EEE8"/>
+                  <a:srgbClr val="F1EEE8"/>
                 </a:solidFill>
                 <a:latin typeface="Arial"/>
                 <a:ea typeface="Arial"/>
@@ -11561,7 +11561,7 @@
             <a:r>
               <a:rPr sz="2400" b="0">
                 <a:solidFill>
-                  <a:srgbClr val="F3EEE8"/>
+                  <a:srgbClr val="F1EEE8"/>
                 </a:solidFill>
                 <a:latin typeface="Arial"/>
                 <a:ea typeface="Arial"/>
@@ -11577,7 +11577,7 @@
           <p:cNvPr id="8" name="">
             <a:extLst xmlns:a="http://schemas.openxmlformats.org/drawingml/2006/main">
               <a:ext uri="{FF2B5EF4-FFF2-40B4-BE49-F238E27FC236}">
-                <a16:creationId xmlns:a16="http://schemas.microsoft.com/office/drawing/2014/main" id="{9355D01E-8CED-4AFB-9B7D-AA268F4AF909}"/>
+                <a16:creationId xmlns:a16="http://schemas.microsoft.com/office/drawing/2014/main" id="{91C4D900-DC6B-4ACE-8930-33AE9D979BC0}"/>
               </a:ext>
             </a:extLst>
           </p:cNvPr>
@@ -11605,7 +11605,7 @@
             <a:defPPr>
               <a:defRPr sz="2400" b="1">
                 <a:solidFill>
-                  <a:srgbClr val="BD9A78"/>
+                  <a:srgbClr val="C6A27F"/>
                 </a:solidFill>
                 <a:latin typeface="Arial"/>
                 <a:ea typeface="Arial"/>
@@ -11617,7 +11617,7 @@
             <a:pPr>
               <a:defRPr sz="2400" b="1">
                 <a:solidFill>
-                  <a:srgbClr val="BD9A78"/>
+                  <a:srgbClr val="C6A27F"/>
                 </a:solidFill>
                 <a:latin typeface="Arial"/>
                 <a:ea typeface="Arial"/>
@@ -11627,7 +11627,7 @@
             <a:r>
               <a:rPr sz="2400" b="1">
                 <a:solidFill>
-                  <a:srgbClr val="BD9A78"/>
+                  <a:srgbClr val="C6A27F"/>
                 </a:solidFill>
                 <a:latin typeface="Arial"/>
                 <a:ea typeface="Arial"/>
@@ -11643,7 +11643,7 @@
           <p:cNvPr id="9" name="">
             <a:extLst xmlns:a="http://schemas.openxmlformats.org/drawingml/2006/main">
               <a:ext uri="{FF2B5EF4-FFF2-40B4-BE49-F238E27FC236}">
-                <a16:creationId xmlns:a16="http://schemas.microsoft.com/office/drawing/2014/main" id="{597D9E95-9804-41B2-8D4D-300E8C84C9CF}"/>
+                <a16:creationId xmlns:a16="http://schemas.microsoft.com/office/drawing/2014/main" id="{484D7AA4-C3EC-4CBF-A600-1D561085DFF4}"/>
               </a:ext>
             </a:extLst>
           </p:cNvPr>
@@ -11671,7 +11671,7 @@
             <a:defPPr>
               <a:defRPr sz="2400" b="0">
                 <a:solidFill>
-                  <a:srgbClr val="F3EEE8"/>
+                  <a:srgbClr val="F1EEE8"/>
                 </a:solidFill>
                 <a:latin typeface="Arial"/>
                 <a:ea typeface="Arial"/>
@@ -11683,7 +11683,7 @@
             <a:pPr>
               <a:defRPr sz="2400" b="0">
                 <a:solidFill>
-                  <a:srgbClr val="F3EEE8"/>
+                  <a:srgbClr val="F1EEE8"/>
                 </a:solidFill>
                 <a:latin typeface="Arial"/>
                 <a:ea typeface="Arial"/>
@@ -11693,7 +11693,7 @@
             <a:r>
               <a:rPr sz="2400" b="0">
                 <a:solidFill>
-                  <a:srgbClr val="F3EEE8"/>
+                  <a:srgbClr val="F1EEE8"/>
                 </a:solidFill>
                 <a:latin typeface="Arial"/>
                 <a:ea typeface="Arial"/>
@@ -11706,7 +11706,7 @@
             <a:pPr>
               <a:defRPr sz="2400" b="0">
                 <a:solidFill>
-                  <a:srgbClr val="F3EEE8"/>
+                  <a:srgbClr val="F1EEE8"/>
                 </a:solidFill>
                 <a:latin typeface="Arial"/>
                 <a:ea typeface="Arial"/>
@@ -11716,7 +11716,7 @@
             <a:r>
               <a:rPr sz="2400" b="0">
                 <a:solidFill>
-                  <a:srgbClr val="F3EEE8"/>
+                  <a:srgbClr val="F1EEE8"/>
                 </a:solidFill>
                 <a:latin typeface="Arial"/>
                 <a:ea typeface="Arial"/>
@@ -11732,7 +11732,7 @@
           <p:cNvPr id="10" name="">
             <a:extLst xmlns:a="http://schemas.openxmlformats.org/drawingml/2006/main">
               <a:ext uri="{FF2B5EF4-FFF2-40B4-BE49-F238E27FC236}">
-                <a16:creationId xmlns:a16="http://schemas.microsoft.com/office/drawing/2014/main" id="{B7D2A1CC-8309-4BB3-96F6-AE75B53B946F}"/>
+                <a16:creationId xmlns:a16="http://schemas.microsoft.com/office/drawing/2014/main" id="{7D42710C-9C4B-4400-9DAB-69DD5C1BD14A}"/>
               </a:ext>
             </a:extLst>
           </p:cNvPr>
@@ -11760,7 +11760,7 @@
             <a:defPPr>
               <a:defRPr sz="1425" b="0">
                 <a:solidFill>
-                  <a:srgbClr val="93A4AA"/>
+                  <a:srgbClr val="A9B8BC"/>
                 </a:solidFill>
                 <a:latin typeface="Arial"/>
                 <a:ea typeface="Arial"/>
@@ -11772,7 +11772,7 @@
             <a:pPr>
               <a:defRPr sz="1425" b="0">
                 <a:solidFill>
-                  <a:srgbClr val="93A4AA"/>
+                  <a:srgbClr val="A9B8BC"/>
                 </a:solidFill>
                 <a:latin typeface="Arial"/>
                 <a:ea typeface="Arial"/>
@@ -11782,7 +11782,7 @@
             <a:r>
               <a:rPr sz="1425" b="0">
                 <a:solidFill>
-                  <a:srgbClr val="93A4AA"/>
+                  <a:srgbClr val="A9B8BC"/>
                 </a:solidFill>
                 <a:latin typeface="Arial"/>
                 <a:ea typeface="Arial"/>
@@ -11796,7 +11796,7 @@
     </p:spTree>
     <p:extLst>
       <p:ext uri="{BB962C8B-B14F-4D97-AF65-F5344CB8AC3E}">
-        <p14:creationId xmlns:p14="http://schemas.microsoft.com/office/powerpoint/2010/main" val="809043934"/>
+        <p14:creationId xmlns:p14="http://schemas.microsoft.com/office/powerpoint/2010/main" val="602628011"/>
       </p:ext>
     </p:extLst>
   </p:cSld>
@@ -11809,7 +11809,7 @@
     <p:bg>
       <p:bgPr>
         <a:solidFill xmlns:a="http://schemas.openxmlformats.org/drawingml/2006/main">
-          <a:srgbClr val="202433"/>
+          <a:srgbClr val="222636"/>
         </a:solidFill>
       </p:bgPr>
     </p:bg>
@@ -11827,7 +11827,7 @@
           <p:cNvPr id="10" name="">
             <a:extLst xmlns:a="http://schemas.openxmlformats.org/drawingml/2006/main">
               <a:ext uri="{FF2B5EF4-FFF2-40B4-BE49-F238E27FC236}">
-                <a16:creationId xmlns:a16="http://schemas.microsoft.com/office/drawing/2014/main" id="{85EC3DBE-ED51-4C25-B86F-A1690AB9038D}"/>
+                <a16:creationId xmlns:a16="http://schemas.microsoft.com/office/drawing/2014/main" id="{01BD7EA5-BA51-4938-A17B-B94F4B93B546}"/>
               </a:ext>
             </a:extLst>
           </p:cNvPr>
@@ -11855,7 +11855,7 @@
             <a:defPPr>
               <a:defRPr sz="4350" b="1">
                 <a:solidFill>
-                  <a:srgbClr val="BD9A78"/>
+                  <a:srgbClr val="C6A27F"/>
                 </a:solidFill>
                 <a:latin typeface="Arial"/>
                 <a:ea typeface="Arial"/>
@@ -11867,7 +11867,7 @@
             <a:pPr>
               <a:defRPr sz="4350" b="1">
                 <a:solidFill>
-                  <a:srgbClr val="BD9A78"/>
+                  <a:srgbClr val="C6A27F"/>
                 </a:solidFill>
                 <a:latin typeface="Arial"/>
                 <a:ea typeface="Arial"/>
@@ -11877,7 +11877,7 @@
             <a:r>
               <a:rPr sz="4350" b="1">
                 <a:solidFill>
-                  <a:srgbClr val="BD9A78"/>
+                  <a:srgbClr val="C6A27F"/>
                 </a:solidFill>
                 <a:latin typeface="Arial"/>
                 <a:ea typeface="Arial"/>
@@ -11893,7 +11893,7 @@
           <p:cNvPr id="2" name="">
             <a:extLst xmlns:a="http://schemas.openxmlformats.org/drawingml/2006/main">
               <a:ext uri="{FF2B5EF4-FFF2-40B4-BE49-F238E27FC236}">
-                <a16:creationId xmlns:a16="http://schemas.microsoft.com/office/drawing/2014/main" id="{F2CF23CF-31DB-4CED-AD09-0DC62662C8DA}"/>
+                <a16:creationId xmlns:a16="http://schemas.microsoft.com/office/drawing/2014/main" id="{CEE07972-C844-4A2E-BA35-3CF7C044F0B3}"/>
               </a:ext>
             </a:extLst>
           </p:cNvPr>
@@ -11921,7 +11921,7 @@
             <a:defPPr>
               <a:defRPr sz="2400" b="1">
                 <a:solidFill>
-                  <a:srgbClr val="BD9A78"/>
+                  <a:srgbClr val="C6A27F"/>
                 </a:solidFill>
                 <a:latin typeface="Arial"/>
                 <a:ea typeface="Arial"/>
@@ -11933,7 +11933,7 @@
             <a:pPr>
               <a:defRPr sz="2400" b="1">
                 <a:solidFill>
-                  <a:srgbClr val="BD9A78"/>
+                  <a:srgbClr val="C6A27F"/>
                 </a:solidFill>
                 <a:latin typeface="Arial"/>
                 <a:ea typeface="Arial"/>
@@ -11943,7 +11943,7 @@
             <a:r>
               <a:rPr sz="2400" b="1">
                 <a:solidFill>
-                  <a:srgbClr val="BD9A78"/>
+                  <a:srgbClr val="C6A27F"/>
                 </a:solidFill>
                 <a:latin typeface="Arial"/>
                 <a:ea typeface="Arial"/>
@@ -11959,7 +11959,7 @@
           <p:cNvPr id="3" name="">
             <a:extLst xmlns:a="http://schemas.openxmlformats.org/drawingml/2006/main">
               <a:ext uri="{FF2B5EF4-FFF2-40B4-BE49-F238E27FC236}">
-                <a16:creationId xmlns:a16="http://schemas.microsoft.com/office/drawing/2014/main" id="{0E4BC451-B22A-414E-B4F1-B1DD85BAEE89}"/>
+                <a16:creationId xmlns:a16="http://schemas.microsoft.com/office/drawing/2014/main" id="{B0E2689F-3FAC-4CC2-8C39-67FF97593561}"/>
               </a:ext>
             </a:extLst>
           </p:cNvPr>
@@ -11987,7 +11987,7 @@
             <a:defPPr>
               <a:defRPr sz="2400" b="0">
                 <a:solidFill>
-                  <a:srgbClr val="F3EEE8"/>
+                  <a:srgbClr val="F1EEE8"/>
                 </a:solidFill>
                 <a:latin typeface="Arial"/>
                 <a:ea typeface="Arial"/>
@@ -11999,7 +11999,7 @@
             <a:pPr>
               <a:defRPr sz="2400" b="0">
                 <a:solidFill>
-                  <a:srgbClr val="F3EEE8"/>
+                  <a:srgbClr val="F1EEE8"/>
                 </a:solidFill>
                 <a:latin typeface="Arial"/>
                 <a:ea typeface="Arial"/>
@@ -12009,7 +12009,7 @@
             <a:r>
               <a:rPr sz="2400" b="0">
                 <a:solidFill>
-                  <a:srgbClr val="F3EEE8"/>
+                  <a:srgbClr val="F1EEE8"/>
                 </a:solidFill>
                 <a:latin typeface="Arial"/>
                 <a:ea typeface="Arial"/>
@@ -12025,7 +12025,7 @@
           <p:cNvPr id="4" name="">
             <a:extLst xmlns:a="http://schemas.openxmlformats.org/drawingml/2006/main">
               <a:ext uri="{FF2B5EF4-FFF2-40B4-BE49-F238E27FC236}">
-                <a16:creationId xmlns:a16="http://schemas.microsoft.com/office/drawing/2014/main" id="{50402293-46AB-43B4-98AD-FEFB555C3E9E}"/>
+                <a16:creationId xmlns:a16="http://schemas.microsoft.com/office/drawing/2014/main" id="{CDDF3241-8989-44EE-9485-44DD0860BF09}"/>
               </a:ext>
             </a:extLst>
           </p:cNvPr>
@@ -12053,7 +12053,7 @@
             <a:defPPr>
               <a:defRPr sz="2400" b="1">
                 <a:solidFill>
-                  <a:srgbClr val="BD9A78"/>
+                  <a:srgbClr val="C6A27F"/>
                 </a:solidFill>
                 <a:latin typeface="Arial"/>
                 <a:ea typeface="Arial"/>
@@ -12065,7 +12065,7 @@
             <a:pPr>
               <a:defRPr sz="2400" b="1">
                 <a:solidFill>
-                  <a:srgbClr val="BD9A78"/>
+                  <a:srgbClr val="C6A27F"/>
                 </a:solidFill>
                 <a:latin typeface="Arial"/>
                 <a:ea typeface="Arial"/>
@@ -12075,7 +12075,7 @@
             <a:r>
               <a:rPr sz="2400" b="1">
                 <a:solidFill>
-                  <a:srgbClr val="BD9A78"/>
+                  <a:srgbClr val="C6A27F"/>
                 </a:solidFill>
                 <a:latin typeface="Arial"/>
                 <a:ea typeface="Arial"/>
@@ -12091,7 +12091,7 @@
           <p:cNvPr id="5" name="">
             <a:extLst xmlns:a="http://schemas.openxmlformats.org/drawingml/2006/main">
               <a:ext uri="{FF2B5EF4-FFF2-40B4-BE49-F238E27FC236}">
-                <a16:creationId xmlns:a16="http://schemas.microsoft.com/office/drawing/2014/main" id="{54264ED3-0032-4BEE-AD8C-D07B8B9C225F}"/>
+                <a16:creationId xmlns:a16="http://schemas.microsoft.com/office/drawing/2014/main" id="{EC26DDB3-68C1-4EAB-9D82-0F8E356E85D2}"/>
               </a:ext>
             </a:extLst>
           </p:cNvPr>
@@ -12119,7 +12119,7 @@
             <a:defPPr>
               <a:defRPr sz="2400" b="0">
                 <a:solidFill>
-                  <a:srgbClr val="F3EEE8"/>
+                  <a:srgbClr val="F1EEE8"/>
                 </a:solidFill>
                 <a:latin typeface="Arial"/>
                 <a:ea typeface="Arial"/>
@@ -12131,7 +12131,7 @@
             <a:pPr>
               <a:defRPr sz="2400" b="0">
                 <a:solidFill>
-                  <a:srgbClr val="F3EEE8"/>
+                  <a:srgbClr val="F1EEE8"/>
                 </a:solidFill>
                 <a:latin typeface="Arial"/>
                 <a:ea typeface="Arial"/>
@@ -12141,7 +12141,7 @@
             <a:r>
               <a:rPr sz="2400" b="0">
                 <a:solidFill>
-                  <a:srgbClr val="F3EEE8"/>
+                  <a:srgbClr val="F1EEE8"/>
                 </a:solidFill>
                 <a:latin typeface="Arial"/>
                 <a:ea typeface="Arial"/>
@@ -12157,7 +12157,7 @@
           <p:cNvPr id="6" name="">
             <a:extLst xmlns:a="http://schemas.openxmlformats.org/drawingml/2006/main">
               <a:ext uri="{FF2B5EF4-FFF2-40B4-BE49-F238E27FC236}">
-                <a16:creationId xmlns:a16="http://schemas.microsoft.com/office/drawing/2014/main" id="{40CF932E-0CAD-4DC2-B3E6-809573BB8BF2}"/>
+                <a16:creationId xmlns:a16="http://schemas.microsoft.com/office/drawing/2014/main" id="{0114E172-0386-43D9-93C6-FDDF218AA059}"/>
               </a:ext>
             </a:extLst>
           </p:cNvPr>
@@ -12185,7 +12185,7 @@
             <a:defPPr>
               <a:defRPr sz="2400" b="1">
                 <a:solidFill>
-                  <a:srgbClr val="93A4AA"/>
+                  <a:srgbClr val="A9B8BC"/>
                 </a:solidFill>
                 <a:latin typeface="Arial"/>
                 <a:ea typeface="Arial"/>
@@ -12197,7 +12197,7 @@
             <a:pPr>
               <a:defRPr sz="2400" b="1">
                 <a:solidFill>
-                  <a:srgbClr val="93A4AA"/>
+                  <a:srgbClr val="A9B8BC"/>
                 </a:solidFill>
                 <a:latin typeface="Arial"/>
                 <a:ea typeface="Arial"/>
@@ -12207,7 +12207,7 @@
             <a:r>
               <a:rPr sz="2400" b="1">
                 <a:solidFill>
-                  <a:srgbClr val="93A4AA"/>
+                  <a:srgbClr val="A9B8BC"/>
                 </a:solidFill>
                 <a:latin typeface="Arial"/>
                 <a:ea typeface="Arial"/>
@@ -12223,7 +12223,7 @@
           <p:cNvPr id="7" name="">
             <a:extLst xmlns:a="http://schemas.openxmlformats.org/drawingml/2006/main">
               <a:ext uri="{FF2B5EF4-FFF2-40B4-BE49-F238E27FC236}">
-                <a16:creationId xmlns:a16="http://schemas.microsoft.com/office/drawing/2014/main" id="{E551D734-1549-4D6F-97EB-F949C32EC92B}"/>
+                <a16:creationId xmlns:a16="http://schemas.microsoft.com/office/drawing/2014/main" id="{8D621FDC-3393-4F9F-90AC-809BC055C1CB}"/>
               </a:ext>
             </a:extLst>
           </p:cNvPr>
@@ -12251,7 +12251,7 @@
             <a:defPPr>
               <a:defRPr sz="2400" b="0">
                 <a:solidFill>
-                  <a:srgbClr val="F3EEE8"/>
+                  <a:srgbClr val="F1EEE8"/>
                 </a:solidFill>
                 <a:latin typeface="Arial"/>
                 <a:ea typeface="Arial"/>
@@ -12263,7 +12263,7 @@
             <a:pPr>
               <a:defRPr sz="2400" b="0">
                 <a:solidFill>
-                  <a:srgbClr val="F3EEE8"/>
+                  <a:srgbClr val="F1EEE8"/>
                 </a:solidFill>
                 <a:latin typeface="Arial"/>
                 <a:ea typeface="Arial"/>
@@ -12273,7 +12273,7 @@
             <a:r>
               <a:rPr sz="2400" b="0">
                 <a:solidFill>
-                  <a:srgbClr val="F3EEE8"/>
+                  <a:srgbClr val="F1EEE8"/>
                 </a:solidFill>
                 <a:latin typeface="Arial"/>
                 <a:ea typeface="Arial"/>
@@ -12289,7 +12289,7 @@
           <p:cNvPr id="8" name="">
             <a:extLst xmlns:a="http://schemas.openxmlformats.org/drawingml/2006/main">
               <a:ext uri="{FF2B5EF4-FFF2-40B4-BE49-F238E27FC236}">
-                <a16:creationId xmlns:a16="http://schemas.microsoft.com/office/drawing/2014/main" id="{DA5973F0-75EC-4D56-BDDF-0EDBDBB78932}"/>
+                <a16:creationId xmlns:a16="http://schemas.microsoft.com/office/drawing/2014/main" id="{7DE4E8F5-8923-45E9-A546-E97FB3005064}"/>
               </a:ext>
             </a:extLst>
           </p:cNvPr>
@@ -12317,7 +12317,7 @@
             <a:defPPr>
               <a:defRPr sz="1875" b="0">
                 <a:solidFill>
-                  <a:srgbClr val="93A4AA"/>
+                  <a:srgbClr val="A9B8BC"/>
                 </a:solidFill>
                 <a:latin typeface="Arial"/>
                 <a:ea typeface="Arial"/>
@@ -12329,7 +12329,7 @@
             <a:pPr>
               <a:defRPr sz="1875" b="0">
                 <a:solidFill>
-                  <a:srgbClr val="93A4AA"/>
+                  <a:srgbClr val="A9B8BC"/>
                 </a:solidFill>
                 <a:latin typeface="Arial"/>
                 <a:ea typeface="Arial"/>
@@ -12339,7 +12339,7 @@
             <a:r>
               <a:rPr sz="1875" b="0">
                 <a:solidFill>
-                  <a:srgbClr val="93A4AA"/>
+                  <a:srgbClr val="A9B8BC"/>
                 </a:solidFill>
                 <a:latin typeface="Arial"/>
                 <a:ea typeface="Arial"/>
@@ -12355,7 +12355,7 @@
           <p:cNvPr id="9" name="">
             <a:extLst xmlns:a="http://schemas.openxmlformats.org/drawingml/2006/main">
               <a:ext uri="{FF2B5EF4-FFF2-40B4-BE49-F238E27FC236}">
-                <a16:creationId xmlns:a16="http://schemas.microsoft.com/office/drawing/2014/main" id="{71950B4A-9C93-46E1-8415-8FAA7449DA7F}"/>
+                <a16:creationId xmlns:a16="http://schemas.microsoft.com/office/drawing/2014/main" id="{00D183AB-2B4F-4EF5-A2D9-7E36A962A2FD}"/>
               </a:ext>
             </a:extLst>
           </p:cNvPr>
@@ -12383,7 +12383,7 @@
             <a:defPPr>
               <a:defRPr sz="1425" b="0">
                 <a:solidFill>
-                  <a:srgbClr val="93A4AA"/>
+                  <a:srgbClr val="A9B8BC"/>
                 </a:solidFill>
                 <a:latin typeface="Arial"/>
                 <a:ea typeface="Arial"/>
@@ -12395,7 +12395,7 @@
             <a:pPr>
               <a:defRPr sz="1425" b="0">
                 <a:solidFill>
-                  <a:srgbClr val="93A4AA"/>
+                  <a:srgbClr val="A9B8BC"/>
                 </a:solidFill>
                 <a:latin typeface="Arial"/>
                 <a:ea typeface="Arial"/>
@@ -12405,7 +12405,7 @@
             <a:r>
               <a:rPr sz="1425" b="0">
                 <a:solidFill>
-                  <a:srgbClr val="93A4AA"/>
+                  <a:srgbClr val="A9B8BC"/>
                 </a:solidFill>
                 <a:latin typeface="Arial"/>
                 <a:ea typeface="Arial"/>
@@ -12419,7 +12419,7 @@
     </p:spTree>
     <p:extLst>
       <p:ext uri="{BB962C8B-B14F-4D97-AF65-F5344CB8AC3E}">
-        <p14:creationId xmlns:p14="http://schemas.microsoft.com/office/powerpoint/2010/main" val="1362702607"/>
+        <p14:creationId xmlns:p14="http://schemas.microsoft.com/office/powerpoint/2010/main" val="1278276185"/>
       </p:ext>
     </p:extLst>
   </p:cSld>
@@ -12432,7 +12432,7 @@
     <p:bg>
       <p:bgPr>
         <a:solidFill xmlns:a="http://schemas.openxmlformats.org/drawingml/2006/main">
-          <a:srgbClr val="202433"/>
+          <a:srgbClr val="222636"/>
         </a:solidFill>
       </p:bgPr>
     </p:bg>
@@ -12450,7 +12450,7 @@
           <p:cNvPr id="11" name="">
             <a:extLst xmlns:a="http://schemas.openxmlformats.org/drawingml/2006/main">
               <a:ext uri="{FF2B5EF4-FFF2-40B4-BE49-F238E27FC236}">
-                <a16:creationId xmlns:a16="http://schemas.microsoft.com/office/drawing/2014/main" id="{770C4A63-3D6C-4B9F-9030-D2F7A6A23DDC}"/>
+                <a16:creationId xmlns:a16="http://schemas.microsoft.com/office/drawing/2014/main" id="{2E9CAF78-BA9B-47EB-83A6-33926BD47D11}"/>
               </a:ext>
             </a:extLst>
           </p:cNvPr>
@@ -12478,7 +12478,7 @@
             <a:defPPr>
               <a:defRPr sz="4350" b="1">
                 <a:solidFill>
-                  <a:srgbClr val="BD9A78"/>
+                  <a:srgbClr val="C6A27F"/>
                 </a:solidFill>
                 <a:latin typeface="Arial"/>
                 <a:ea typeface="Arial"/>
@@ -12490,7 +12490,7 @@
             <a:pPr>
               <a:defRPr sz="4350" b="1">
                 <a:solidFill>
-                  <a:srgbClr val="BD9A78"/>
+                  <a:srgbClr val="C6A27F"/>
                 </a:solidFill>
                 <a:latin typeface="Arial"/>
                 <a:ea typeface="Arial"/>
@@ -12500,7 +12500,7 @@
             <a:r>
               <a:rPr sz="4350" b="1">
                 <a:solidFill>
-                  <a:srgbClr val="BD9A78"/>
+                  <a:srgbClr val="C6A27F"/>
                 </a:solidFill>
                 <a:latin typeface="Arial"/>
                 <a:ea typeface="Arial"/>
@@ -12516,7 +12516,7 @@
           <p:cNvPr id="2" name="">
             <a:extLst xmlns:a="http://schemas.openxmlformats.org/drawingml/2006/main">
               <a:ext uri="{FF2B5EF4-FFF2-40B4-BE49-F238E27FC236}">
-                <a16:creationId xmlns:a16="http://schemas.microsoft.com/office/drawing/2014/main" id="{71C73F2D-D9F0-41A9-863F-04E8F1B31A02}"/>
+                <a16:creationId xmlns:a16="http://schemas.microsoft.com/office/drawing/2014/main" id="{A39CB026-6DB9-44C5-8DBC-49D6E0E2C321}"/>
               </a:ext>
             </a:extLst>
           </p:cNvPr>
@@ -12544,7 +12544,7 @@
             <a:defPPr>
               <a:defRPr sz="2700" b="0">
                 <a:solidFill>
-                  <a:srgbClr val="F3EEE8"/>
+                  <a:srgbClr val="F1EEE8"/>
                 </a:solidFill>
                 <a:latin typeface="Arial"/>
                 <a:ea typeface="Arial"/>
@@ -12556,7 +12556,7 @@
             <a:pPr>
               <a:defRPr sz="2700" b="0">
                 <a:solidFill>
-                  <a:srgbClr val="F3EEE8"/>
+                  <a:srgbClr val="F1EEE8"/>
                 </a:solidFill>
                 <a:latin typeface="Arial"/>
                 <a:ea typeface="Arial"/>
@@ -12566,7 +12566,7 @@
             <a:r>
               <a:rPr sz="2700" b="0">
                 <a:solidFill>
-                  <a:srgbClr val="F3EEE8"/>
+                  <a:srgbClr val="F1EEE8"/>
                 </a:solidFill>
                 <a:latin typeface="Arial"/>
                 <a:ea typeface="Arial"/>
@@ -12582,7 +12582,7 @@
           <p:cNvPr id="3" name="">
             <a:extLst xmlns:a="http://schemas.openxmlformats.org/drawingml/2006/main">
               <a:ext uri="{FF2B5EF4-FFF2-40B4-BE49-F238E27FC236}">
-                <a16:creationId xmlns:a16="http://schemas.microsoft.com/office/drawing/2014/main" id="{B710F715-0E25-4F98-95C9-16686A403D12}"/>
+                <a16:creationId xmlns:a16="http://schemas.microsoft.com/office/drawing/2014/main" id="{DA3618FB-1AF6-4D43-BEB8-812D8A8C8EE2}"/>
               </a:ext>
             </a:extLst>
           </p:cNvPr>
@@ -12610,7 +12610,7 @@
             <a:defPPr>
               <a:defRPr sz="2400" b="1">
                 <a:solidFill>
-                  <a:srgbClr val="BD9A78"/>
+                  <a:srgbClr val="C6A27F"/>
                 </a:solidFill>
                 <a:latin typeface="Arial"/>
                 <a:ea typeface="Arial"/>
@@ -12622,7 +12622,7 @@
             <a:pPr>
               <a:defRPr sz="2400" b="1">
                 <a:solidFill>
-                  <a:srgbClr val="BD9A78"/>
+                  <a:srgbClr val="C6A27F"/>
                 </a:solidFill>
                 <a:latin typeface="Arial"/>
                 <a:ea typeface="Arial"/>
@@ -12632,7 +12632,7 @@
             <a:r>
               <a:rPr sz="2400" b="1">
                 <a:solidFill>
-                  <a:srgbClr val="BD9A78"/>
+                  <a:srgbClr val="C6A27F"/>
                 </a:solidFill>
                 <a:latin typeface="Arial"/>
                 <a:ea typeface="Arial"/>
@@ -12648,7 +12648,7 @@
           <p:cNvPr id="4" name="">
             <a:extLst xmlns:a="http://schemas.openxmlformats.org/drawingml/2006/main">
               <a:ext uri="{FF2B5EF4-FFF2-40B4-BE49-F238E27FC236}">
-                <a16:creationId xmlns:a16="http://schemas.microsoft.com/office/drawing/2014/main" id="{C2A55595-ED0A-438D-A569-2C734A3FBDBF}"/>
+                <a16:creationId xmlns:a16="http://schemas.microsoft.com/office/drawing/2014/main" id="{81BA9ECA-117D-4A3A-9B9C-D516B5C8912D}"/>
               </a:ext>
             </a:extLst>
           </p:cNvPr>
@@ -12676,7 +12676,7 @@
             <a:defPPr>
               <a:defRPr sz="2400" b="0">
                 <a:solidFill>
-                  <a:srgbClr val="F3EEE8"/>
+                  <a:srgbClr val="F1EEE8"/>
                 </a:solidFill>
                 <a:latin typeface="Arial"/>
                 <a:ea typeface="Arial"/>
@@ -12688,7 +12688,7 @@
             <a:pPr>
               <a:defRPr sz="2400" b="0">
                 <a:solidFill>
-                  <a:srgbClr val="F3EEE8"/>
+                  <a:srgbClr val="F1EEE8"/>
                 </a:solidFill>
                 <a:latin typeface="Arial"/>
                 <a:ea typeface="Arial"/>
@@ -12698,7 +12698,7 @@
             <a:r>
               <a:rPr sz="2400" b="0">
                 <a:solidFill>
-                  <a:srgbClr val="F3EEE8"/>
+                  <a:srgbClr val="F1EEE8"/>
                 </a:solidFill>
                 <a:latin typeface="Arial"/>
                 <a:ea typeface="Arial"/>
@@ -12711,7 +12711,7 @@
             <a:pPr>
               <a:defRPr sz="2400" b="0">
                 <a:solidFill>
-                  <a:srgbClr val="F3EEE8"/>
+                  <a:srgbClr val="F1EEE8"/>
                 </a:solidFill>
                 <a:latin typeface="Arial"/>
                 <a:ea typeface="Arial"/>
@@ -12721,7 +12721,7 @@
             <a:r>
               <a:rPr sz="2400" b="0">
                 <a:solidFill>
-                  <a:srgbClr val="F3EEE8"/>
+                  <a:srgbClr val="F1EEE8"/>
                 </a:solidFill>
                 <a:latin typeface="Arial"/>
                 <a:ea typeface="Arial"/>
@@ -12737,7 +12737,7 @@
           <p:cNvPr id="5" name="">
             <a:extLst xmlns:a="http://schemas.openxmlformats.org/drawingml/2006/main">
               <a:ext uri="{FF2B5EF4-FFF2-40B4-BE49-F238E27FC236}">
-                <a16:creationId xmlns:a16="http://schemas.microsoft.com/office/drawing/2014/main" id="{45638279-A908-4119-9FFC-A60972395329}"/>
+                <a16:creationId xmlns:a16="http://schemas.microsoft.com/office/drawing/2014/main" id="{8A14C54C-B13F-4419-98E0-DF1EDF0C4116}"/>
               </a:ext>
             </a:extLst>
           </p:cNvPr>
@@ -12765,7 +12765,7 @@
             <a:defPPr>
               <a:defRPr sz="2400" b="1">
                 <a:solidFill>
-                  <a:srgbClr val="BD9A78"/>
+                  <a:srgbClr val="C6A27F"/>
                 </a:solidFill>
                 <a:latin typeface="Arial"/>
                 <a:ea typeface="Arial"/>
@@ -12777,7 +12777,7 @@
             <a:pPr>
               <a:defRPr sz="2400" b="1">
                 <a:solidFill>
-                  <a:srgbClr val="BD9A78"/>
+                  <a:srgbClr val="C6A27F"/>
                 </a:solidFill>
                 <a:latin typeface="Arial"/>
                 <a:ea typeface="Arial"/>
@@ -12787,7 +12787,7 @@
             <a:r>
               <a:rPr sz="2400" b="1">
                 <a:solidFill>
-                  <a:srgbClr val="BD9A78"/>
+                  <a:srgbClr val="C6A27F"/>
                 </a:solidFill>
                 <a:latin typeface="Arial"/>
                 <a:ea typeface="Arial"/>
@@ -12803,7 +12803,7 @@
           <p:cNvPr id="6" name="">
             <a:extLst xmlns:a="http://schemas.openxmlformats.org/drawingml/2006/main">
               <a:ext uri="{FF2B5EF4-FFF2-40B4-BE49-F238E27FC236}">
-                <a16:creationId xmlns:a16="http://schemas.microsoft.com/office/drawing/2014/main" id="{ACC37B9F-3230-417E-9B08-342433270905}"/>
+                <a16:creationId xmlns:a16="http://schemas.microsoft.com/office/drawing/2014/main" id="{6D992D7F-EC3B-4651-B910-5B8251E8C625}"/>
               </a:ext>
             </a:extLst>
           </p:cNvPr>
@@ -12831,7 +12831,7 @@
             <a:defPPr>
               <a:defRPr sz="2400" b="0">
                 <a:solidFill>
-                  <a:srgbClr val="F3EEE8"/>
+                  <a:srgbClr val="F1EEE8"/>
                 </a:solidFill>
                 <a:latin typeface="Arial"/>
                 <a:ea typeface="Arial"/>
@@ -12843,7 +12843,7 @@
             <a:pPr>
               <a:defRPr sz="2400" b="0">
                 <a:solidFill>
-                  <a:srgbClr val="F3EEE8"/>
+                  <a:srgbClr val="F1EEE8"/>
                 </a:solidFill>
                 <a:latin typeface="Arial"/>
                 <a:ea typeface="Arial"/>
@@ -12853,7 +12853,7 @@
             <a:r>
               <a:rPr sz="2400" b="0">
                 <a:solidFill>
-                  <a:srgbClr val="F3EEE8"/>
+                  <a:srgbClr val="F1EEE8"/>
                 </a:solidFill>
                 <a:latin typeface="Arial"/>
                 <a:ea typeface="Arial"/>
@@ -12869,7 +12869,7 @@
           <p:cNvPr id="7" name="">
             <a:extLst xmlns:a="http://schemas.openxmlformats.org/drawingml/2006/main">
               <a:ext uri="{FF2B5EF4-FFF2-40B4-BE49-F238E27FC236}">
-                <a16:creationId xmlns:a16="http://schemas.microsoft.com/office/drawing/2014/main" id="{D0B04163-2819-4CD2-8700-4E6417390A6B}"/>
+                <a16:creationId xmlns:a16="http://schemas.microsoft.com/office/drawing/2014/main" id="{39B7FCF7-C1DF-4282-B661-12B7BE29FE08}"/>
               </a:ext>
             </a:extLst>
           </p:cNvPr>
@@ -12897,7 +12897,7 @@
             <a:defPPr>
               <a:defRPr sz="2400" b="1">
                 <a:solidFill>
-                  <a:srgbClr val="BD9A78"/>
+                  <a:srgbClr val="C6A27F"/>
                 </a:solidFill>
                 <a:latin typeface="Arial"/>
                 <a:ea typeface="Arial"/>
@@ -12909,7 +12909,7 @@
             <a:pPr>
               <a:defRPr sz="2400" b="1">
                 <a:solidFill>
-                  <a:srgbClr val="BD9A78"/>
+                  <a:srgbClr val="C6A27F"/>
                 </a:solidFill>
                 <a:latin typeface="Arial"/>
                 <a:ea typeface="Arial"/>
@@ -12919,7 +12919,7 @@
             <a:r>
               <a:rPr sz="2400" b="1">
                 <a:solidFill>
-                  <a:srgbClr val="BD9A78"/>
+                  <a:srgbClr val="C6A27F"/>
                 </a:solidFill>
                 <a:latin typeface="Arial"/>
                 <a:ea typeface="Arial"/>
@@ -12935,7 +12935,7 @@
           <p:cNvPr id="8" name="">
             <a:extLst xmlns:a="http://schemas.openxmlformats.org/drawingml/2006/main">
               <a:ext uri="{FF2B5EF4-FFF2-40B4-BE49-F238E27FC236}">
-                <a16:creationId xmlns:a16="http://schemas.microsoft.com/office/drawing/2014/main" id="{5F63D2A8-809B-469C-A7DE-A793C45DFD0D}"/>
+                <a16:creationId xmlns:a16="http://schemas.microsoft.com/office/drawing/2014/main" id="{458A5804-D6AA-457F-9907-B6866E326C92}"/>
               </a:ext>
             </a:extLst>
           </p:cNvPr>
@@ -12963,7 +12963,7 @@
             <a:defPPr>
               <a:defRPr sz="2400" b="0">
                 <a:solidFill>
-                  <a:srgbClr val="F3EEE8"/>
+                  <a:srgbClr val="F1EEE8"/>
                 </a:solidFill>
                 <a:latin typeface="Arial"/>
                 <a:ea typeface="Arial"/>
@@ -12975,7 +12975,7 @@
             <a:pPr>
               <a:defRPr sz="2400" b="0">
                 <a:solidFill>
-                  <a:srgbClr val="F3EEE8"/>
+                  <a:srgbClr val="F1EEE8"/>
                 </a:solidFill>
                 <a:latin typeface="Arial"/>
                 <a:ea typeface="Arial"/>
@@ -12985,7 +12985,7 @@
             <a:r>
               <a:rPr sz="2400" b="0">
                 <a:solidFill>
-                  <a:srgbClr val="F3EEE8"/>
+                  <a:srgbClr val="F1EEE8"/>
                 </a:solidFill>
                 <a:latin typeface="Arial"/>
                 <a:ea typeface="Arial"/>
@@ -12998,7 +12998,7 @@
             <a:pPr>
               <a:defRPr sz="2400" b="0">
                 <a:solidFill>
-                  <a:srgbClr val="F3EEE8"/>
+                  <a:srgbClr val="F1EEE8"/>
                 </a:solidFill>
                 <a:latin typeface="Arial"/>
                 <a:ea typeface="Arial"/>
@@ -13008,7 +13008,7 @@
             <a:r>
               <a:rPr sz="2400" b="0">
                 <a:solidFill>
-                  <a:srgbClr val="F3EEE8"/>
+                  <a:srgbClr val="F1EEE8"/>
                 </a:solidFill>
                 <a:latin typeface="Arial"/>
                 <a:ea typeface="Arial"/>
@@ -13024,7 +13024,7 @@
           <p:cNvPr id="9" name="">
             <a:extLst xmlns:a="http://schemas.openxmlformats.org/drawingml/2006/main">
               <a:ext uri="{FF2B5EF4-FFF2-40B4-BE49-F238E27FC236}">
-                <a16:creationId xmlns:a16="http://schemas.microsoft.com/office/drawing/2014/main" id="{62DB42AA-FC85-4A57-A7B1-1EDBD575FF05}"/>
+                <a16:creationId xmlns:a16="http://schemas.microsoft.com/office/drawing/2014/main" id="{A1B5AC93-DA4F-4F8E-B80A-A211FC795466}"/>
               </a:ext>
             </a:extLst>
           </p:cNvPr>
@@ -13052,7 +13052,7 @@
             <a:defPPr>
               <a:defRPr sz="1875" b="0">
                 <a:solidFill>
-                  <a:srgbClr val="93A4AA"/>
+                  <a:srgbClr val="A9B8BC"/>
                 </a:solidFill>
                 <a:latin typeface="Arial"/>
                 <a:ea typeface="Arial"/>
@@ -13064,7 +13064,7 @@
             <a:pPr>
               <a:defRPr sz="1875" b="0">
                 <a:solidFill>
-                  <a:srgbClr val="93A4AA"/>
+                  <a:srgbClr val="A9B8BC"/>
                 </a:solidFill>
                 <a:latin typeface="Arial"/>
                 <a:ea typeface="Arial"/>
@@ -13074,7 +13074,7 @@
             <a:r>
               <a:rPr sz="1875" b="0">
                 <a:solidFill>
-                  <a:srgbClr val="93A4AA"/>
+                  <a:srgbClr val="A9B8BC"/>
                 </a:solidFill>
                 <a:latin typeface="Arial"/>
                 <a:ea typeface="Arial"/>
@@ -13090,7 +13090,7 @@
           <p:cNvPr id="10" name="">
             <a:extLst xmlns:a="http://schemas.openxmlformats.org/drawingml/2006/main">
               <a:ext uri="{FF2B5EF4-FFF2-40B4-BE49-F238E27FC236}">
-                <a16:creationId xmlns:a16="http://schemas.microsoft.com/office/drawing/2014/main" id="{DB1E10EE-3808-4DEF-B6E3-55411560C9FB}"/>
+                <a16:creationId xmlns:a16="http://schemas.microsoft.com/office/drawing/2014/main" id="{9D9B54FA-D389-4B35-8BBB-57A45CA3838F}"/>
               </a:ext>
             </a:extLst>
           </p:cNvPr>
@@ -13118,7 +13118,7 @@
             <a:defPPr>
               <a:defRPr sz="1425" b="0">
                 <a:solidFill>
-                  <a:srgbClr val="93A4AA"/>
+                  <a:srgbClr val="A9B8BC"/>
                 </a:solidFill>
                 <a:latin typeface="Arial"/>
                 <a:ea typeface="Arial"/>
@@ -13130,7 +13130,7 @@
             <a:pPr>
               <a:defRPr sz="1425" b="0">
                 <a:solidFill>
-                  <a:srgbClr val="93A4AA"/>
+                  <a:srgbClr val="A9B8BC"/>
                 </a:solidFill>
                 <a:latin typeface="Arial"/>
                 <a:ea typeface="Arial"/>
@@ -13140,7 +13140,7 @@
             <a:r>
               <a:rPr sz="1425" b="0">
                 <a:solidFill>
-                  <a:srgbClr val="93A4AA"/>
+                  <a:srgbClr val="A9B8BC"/>
                 </a:solidFill>
                 <a:latin typeface="Arial"/>
                 <a:ea typeface="Arial"/>
@@ -13154,7 +13154,7 @@
     </p:spTree>
     <p:extLst>
       <p:ext uri="{BB962C8B-B14F-4D97-AF65-F5344CB8AC3E}">
-        <p14:creationId xmlns:p14="http://schemas.microsoft.com/office/powerpoint/2010/main" val="2008291372"/>
+        <p14:creationId xmlns:p14="http://schemas.microsoft.com/office/powerpoint/2010/main" val="588697497"/>
       </p:ext>
     </p:extLst>
   </p:cSld>
@@ -13167,7 +13167,7 @@
     <p:bg>
       <p:bgPr>
         <a:solidFill xmlns:a="http://schemas.openxmlformats.org/drawingml/2006/main">
-          <a:srgbClr val="202433"/>
+          <a:srgbClr val="222636"/>
         </a:solidFill>
       </p:bgPr>
     </p:bg>
@@ -13185,7 +13185,7 @@
           <p:cNvPr id="13" name="">
             <a:extLst xmlns:a="http://schemas.openxmlformats.org/drawingml/2006/main">
               <a:ext uri="{FF2B5EF4-FFF2-40B4-BE49-F238E27FC236}">
-                <a16:creationId xmlns:a16="http://schemas.microsoft.com/office/drawing/2014/main" id="{74506781-6B44-4DCE-A3D4-A9AE77776282}"/>
+                <a16:creationId xmlns:a16="http://schemas.microsoft.com/office/drawing/2014/main" id="{22FA515D-B1A0-4B43-98FD-35059194A05F}"/>
               </a:ext>
             </a:extLst>
           </p:cNvPr>
@@ -13213,7 +13213,7 @@
             <a:defPPr>
               <a:defRPr sz="4350" b="1">
                 <a:solidFill>
-                  <a:srgbClr val="BD9A78"/>
+                  <a:srgbClr val="C6A27F"/>
                 </a:solidFill>
                 <a:latin typeface="Arial"/>
                 <a:ea typeface="Arial"/>
@@ -13225,7 +13225,7 @@
             <a:pPr>
               <a:defRPr sz="4350" b="1">
                 <a:solidFill>
-                  <a:srgbClr val="BD9A78"/>
+                  <a:srgbClr val="C6A27F"/>
                 </a:solidFill>
                 <a:latin typeface="Arial"/>
                 <a:ea typeface="Arial"/>
@@ -13235,7 +13235,7 @@
             <a:r>
               <a:rPr sz="4350" b="1">
                 <a:solidFill>
-                  <a:srgbClr val="BD9A78"/>
+                  <a:srgbClr val="C6A27F"/>
                 </a:solidFill>
                 <a:latin typeface="Arial"/>
                 <a:ea typeface="Arial"/>
@@ -13251,7 +13251,7 @@
           <p:cNvPr id="2" name="">
             <a:extLst xmlns:a="http://schemas.openxmlformats.org/drawingml/2006/main">
               <a:ext uri="{FF2B5EF4-FFF2-40B4-BE49-F238E27FC236}">
-                <a16:creationId xmlns:a16="http://schemas.microsoft.com/office/drawing/2014/main" id="{9EFDA815-7788-4933-BA22-9070C1A79F9F}"/>
+                <a16:creationId xmlns:a16="http://schemas.microsoft.com/office/drawing/2014/main" id="{11245088-E925-4EC0-9DF6-409D15FF8258}"/>
               </a:ext>
             </a:extLst>
           </p:cNvPr>
@@ -13279,7 +13279,7 @@
             <a:defPPr>
               <a:defRPr sz="2700" b="0">
                 <a:solidFill>
-                  <a:srgbClr val="F3EEE8"/>
+                  <a:srgbClr val="F1EEE8"/>
                 </a:solidFill>
                 <a:latin typeface="Arial"/>
                 <a:ea typeface="Arial"/>
@@ -13291,7 +13291,7 @@
             <a:pPr>
               <a:defRPr sz="2700" b="0">
                 <a:solidFill>
-                  <a:srgbClr val="F3EEE8"/>
+                  <a:srgbClr val="F1EEE8"/>
                 </a:solidFill>
                 <a:latin typeface="Arial"/>
                 <a:ea typeface="Arial"/>
@@ -13301,7 +13301,7 @@
             <a:r>
               <a:rPr sz="2700" b="0">
                 <a:solidFill>
-                  <a:srgbClr val="F3EEE8"/>
+                  <a:srgbClr val="F1EEE8"/>
                 </a:solidFill>
                 <a:latin typeface="Arial"/>
                 <a:ea typeface="Arial"/>
@@ -13317,7 +13317,7 @@
           <p:cNvPr id="3" name="">
             <a:extLst xmlns:a="http://schemas.openxmlformats.org/drawingml/2006/main">
               <a:ext uri="{FF2B5EF4-FFF2-40B4-BE49-F238E27FC236}">
-                <a16:creationId xmlns:a16="http://schemas.microsoft.com/office/drawing/2014/main" id="{D8FE4A20-CA87-4499-96C0-1D93944B4764}"/>
+                <a16:creationId xmlns:a16="http://schemas.microsoft.com/office/drawing/2014/main" id="{D012E264-AD8E-44D3-804C-6D9FFB83B62A}"/>
               </a:ext>
             </a:extLst>
           </p:cNvPr>
@@ -13345,7 +13345,7 @@
             <a:defPPr>
               <a:defRPr sz="2400" b="1">
                 <a:solidFill>
-                  <a:srgbClr val="BD9A78"/>
+                  <a:srgbClr val="C6A27F"/>
                 </a:solidFill>
                 <a:latin typeface="Arial"/>
                 <a:ea typeface="Arial"/>
@@ -13357,7 +13357,7 @@
             <a:pPr>
               <a:defRPr sz="2400" b="1">
                 <a:solidFill>
-                  <a:srgbClr val="BD9A78"/>
+                  <a:srgbClr val="C6A27F"/>
                 </a:solidFill>
                 <a:latin typeface="Arial"/>
                 <a:ea typeface="Arial"/>
@@ -13367,7 +13367,7 @@
             <a:r>
               <a:rPr sz="2400" b="1">
                 <a:solidFill>
-                  <a:srgbClr val="BD9A78"/>
+                  <a:srgbClr val="C6A27F"/>
                 </a:solidFill>
                 <a:latin typeface="Arial"/>
                 <a:ea typeface="Arial"/>
@@ -13383,7 +13383,7 @@
           <p:cNvPr id="4" name="">
             <a:extLst xmlns:a="http://schemas.openxmlformats.org/drawingml/2006/main">
               <a:ext uri="{FF2B5EF4-FFF2-40B4-BE49-F238E27FC236}">
-                <a16:creationId xmlns:a16="http://schemas.microsoft.com/office/drawing/2014/main" id="{9470E346-3DAE-4615-A530-8161F3297E30}"/>
+                <a16:creationId xmlns:a16="http://schemas.microsoft.com/office/drawing/2014/main" id="{D108B7C0-07A4-4270-969A-F1ED92B0BE40}"/>
               </a:ext>
             </a:extLst>
           </p:cNvPr>
@@ -13411,7 +13411,7 @@
             <a:defPPr>
               <a:defRPr sz="2400" b="0">
                 <a:solidFill>
-                  <a:srgbClr val="F3EEE8"/>
+                  <a:srgbClr val="F1EEE8"/>
                 </a:solidFill>
                 <a:latin typeface="Arial"/>
                 <a:ea typeface="Arial"/>
@@ -13423,7 +13423,7 @@
             <a:pPr>
               <a:defRPr sz="2400" b="0">
                 <a:solidFill>
-                  <a:srgbClr val="F3EEE8"/>
+                  <a:srgbClr val="F1EEE8"/>
                 </a:solidFill>
                 <a:latin typeface="Arial"/>
                 <a:ea typeface="Arial"/>
@@ -13433,7 +13433,7 @@
             <a:r>
               <a:rPr sz="2400" b="0">
                 <a:solidFill>
-                  <a:srgbClr val="F3EEE8"/>
+                  <a:srgbClr val="F1EEE8"/>
                 </a:solidFill>
                 <a:latin typeface="Arial"/>
                 <a:ea typeface="Arial"/>
@@ -13449,7 +13449,7 @@
           <p:cNvPr id="5" name="">
             <a:extLst xmlns:a="http://schemas.openxmlformats.org/drawingml/2006/main">
               <a:ext uri="{FF2B5EF4-FFF2-40B4-BE49-F238E27FC236}">
-                <a16:creationId xmlns:a16="http://schemas.microsoft.com/office/drawing/2014/main" id="{401195C4-6B32-46F4-B3A5-B949BAC139CA}"/>
+                <a16:creationId xmlns:a16="http://schemas.microsoft.com/office/drawing/2014/main" id="{CEA1F5A5-A472-41B3-BBE7-1D80E4B22148}"/>
               </a:ext>
             </a:extLst>
           </p:cNvPr>
@@ -13477,7 +13477,7 @@
             <a:defPPr>
               <a:defRPr sz="2400" b="1">
                 <a:solidFill>
-                  <a:srgbClr val="BD9A78"/>
+                  <a:srgbClr val="C6A27F"/>
                 </a:solidFill>
                 <a:latin typeface="Arial"/>
                 <a:ea typeface="Arial"/>
@@ -13489,7 +13489,7 @@
             <a:pPr>
               <a:defRPr sz="2400" b="1">
                 <a:solidFill>
-                  <a:srgbClr val="BD9A78"/>
+                  <a:srgbClr val="C6A27F"/>
                 </a:solidFill>
                 <a:latin typeface="Arial"/>
                 <a:ea typeface="Arial"/>
@@ -13499,7 +13499,7 @@
             <a:r>
               <a:rPr sz="2400" b="1">
                 <a:solidFill>
-                  <a:srgbClr val="BD9A78"/>
+                  <a:srgbClr val="C6A27F"/>
                 </a:solidFill>
                 <a:latin typeface="Arial"/>
                 <a:ea typeface="Arial"/>
@@ -13515,7 +13515,7 @@
           <p:cNvPr id="6" name="">
             <a:extLst xmlns:a="http://schemas.openxmlformats.org/drawingml/2006/main">
               <a:ext uri="{FF2B5EF4-FFF2-40B4-BE49-F238E27FC236}">
-                <a16:creationId xmlns:a16="http://schemas.microsoft.com/office/drawing/2014/main" id="{CC37082B-4134-4F21-942B-812B40CF6C1B}"/>
+                <a16:creationId xmlns:a16="http://schemas.microsoft.com/office/drawing/2014/main" id="{6A729EDC-E1D7-4172-A52C-B569705BA250}"/>
               </a:ext>
             </a:extLst>
           </p:cNvPr>
@@ -13543,7 +13543,7 @@
             <a:defPPr>
               <a:defRPr sz="2400" b="0">
                 <a:solidFill>
-                  <a:srgbClr val="F3EEE8"/>
+                  <a:srgbClr val="F1EEE8"/>
                 </a:solidFill>
                 <a:latin typeface="Arial"/>
                 <a:ea typeface="Arial"/>
@@ -13555,7 +13555,7 @@
             <a:pPr>
               <a:defRPr sz="2400" b="0">
                 <a:solidFill>
-                  <a:srgbClr val="F3EEE8"/>
+                  <a:srgbClr val="F1EEE8"/>
                 </a:solidFill>
                 <a:latin typeface="Arial"/>
                 <a:ea typeface="Arial"/>
@@ -13565,7 +13565,7 @@
             <a:r>
               <a:rPr sz="2400" b="0">
                 <a:solidFill>
-                  <a:srgbClr val="F3EEE8"/>
+                  <a:srgbClr val="F1EEE8"/>
                 </a:solidFill>
                 <a:latin typeface="Arial"/>
                 <a:ea typeface="Arial"/>
@@ -13581,7 +13581,7 @@
           <p:cNvPr id="7" name="">
             <a:extLst xmlns:a="http://schemas.openxmlformats.org/drawingml/2006/main">
               <a:ext uri="{FF2B5EF4-FFF2-40B4-BE49-F238E27FC236}">
-                <a16:creationId xmlns:a16="http://schemas.microsoft.com/office/drawing/2014/main" id="{3474AFE7-9713-412C-9717-C4C30EAEA812}"/>
+                <a16:creationId xmlns:a16="http://schemas.microsoft.com/office/drawing/2014/main" id="{2779462B-7E57-4D9E-B35D-B2A884182BAF}"/>
               </a:ext>
             </a:extLst>
           </p:cNvPr>
@@ -13609,7 +13609,7 @@
             <a:defPPr>
               <a:defRPr sz="2400" b="1">
                 <a:solidFill>
-                  <a:srgbClr val="BD9A78"/>
+                  <a:srgbClr val="C6A27F"/>
                 </a:solidFill>
                 <a:latin typeface="Arial"/>
                 <a:ea typeface="Arial"/>
@@ -13621,7 +13621,7 @@
             <a:pPr>
               <a:defRPr sz="2400" b="1">
                 <a:solidFill>
-                  <a:srgbClr val="BD9A78"/>
+                  <a:srgbClr val="C6A27F"/>
                 </a:solidFill>
                 <a:latin typeface="Arial"/>
                 <a:ea typeface="Arial"/>
@@ -13631,7 +13631,7 @@
             <a:r>
               <a:rPr sz="2400" b="1">
                 <a:solidFill>
-                  <a:srgbClr val="BD9A78"/>
+                  <a:srgbClr val="C6A27F"/>
                 </a:solidFill>
                 <a:latin typeface="Arial"/>
                 <a:ea typeface="Arial"/>
@@ -13647,7 +13647,7 @@
           <p:cNvPr id="8" name="">
             <a:extLst xmlns:a="http://schemas.openxmlformats.org/drawingml/2006/main">
               <a:ext uri="{FF2B5EF4-FFF2-40B4-BE49-F238E27FC236}">
-                <a16:creationId xmlns:a16="http://schemas.microsoft.com/office/drawing/2014/main" id="{5890BF17-B985-4C80-8FDC-E31B8F6E7B12}"/>
+                <a16:creationId xmlns:a16="http://schemas.microsoft.com/office/drawing/2014/main" id="{2E8358C0-0452-480B-B86E-6ED568ECFB4E}"/>
               </a:ext>
             </a:extLst>
           </p:cNvPr>
@@ -13675,7 +13675,7 @@
             <a:defPPr>
               <a:defRPr sz="2400" b="0">
                 <a:solidFill>
-                  <a:srgbClr val="F3EEE8"/>
+                  <a:srgbClr val="F1EEE8"/>
                 </a:solidFill>
                 <a:latin typeface="Arial"/>
                 <a:ea typeface="Arial"/>
@@ -13687,7 +13687,7 @@
             <a:pPr>
               <a:defRPr sz="2400" b="0">
                 <a:solidFill>
-                  <a:srgbClr val="F3EEE8"/>
+                  <a:srgbClr val="F1EEE8"/>
                 </a:solidFill>
                 <a:latin typeface="Arial"/>
                 <a:ea typeface="Arial"/>
@@ -13697,7 +13697,7 @@
             <a:r>
               <a:rPr sz="2400" b="0">
                 <a:solidFill>
-                  <a:srgbClr val="F3EEE8"/>
+                  <a:srgbClr val="F1EEE8"/>
                 </a:solidFill>
                 <a:latin typeface="Arial"/>
                 <a:ea typeface="Arial"/>
@@ -13710,7 +13710,7 @@
             <a:pPr>
               <a:defRPr sz="2400" b="0">
                 <a:solidFill>
-                  <a:srgbClr val="F3EEE8"/>
+                  <a:srgbClr val="F1EEE8"/>
                 </a:solidFill>
                 <a:latin typeface="Arial"/>
                 <a:ea typeface="Arial"/>
@@ -13720,7 +13720,7 @@
             <a:r>
               <a:rPr sz="2400" b="0">
                 <a:solidFill>
-                  <a:srgbClr val="F3EEE8"/>
+                  <a:srgbClr val="F1EEE8"/>
                 </a:solidFill>
                 <a:latin typeface="Arial"/>
                 <a:ea typeface="Arial"/>
@@ -13736,7 +13736,7 @@
           <p:cNvPr id="9" name="">
             <a:extLst xmlns:a="http://schemas.openxmlformats.org/drawingml/2006/main">
               <a:ext uri="{FF2B5EF4-FFF2-40B4-BE49-F238E27FC236}">
-                <a16:creationId xmlns:a16="http://schemas.microsoft.com/office/drawing/2014/main" id="{A75DD450-D1BA-4C63-8189-6D30539F14AB}"/>
+                <a16:creationId xmlns:a16="http://schemas.microsoft.com/office/drawing/2014/main" id="{E07CA7E5-E9FA-4EA5-89C3-DB534A1DE695}"/>
               </a:ext>
             </a:extLst>
           </p:cNvPr>
@@ -13764,7 +13764,7 @@
             <a:defPPr>
               <a:defRPr sz="2400" b="1">
                 <a:solidFill>
-                  <a:srgbClr val="BD9A78"/>
+                  <a:srgbClr val="C6A27F"/>
                 </a:solidFill>
                 <a:latin typeface="Arial"/>
                 <a:ea typeface="Arial"/>
@@ -13776,7 +13776,7 @@
             <a:pPr>
               <a:defRPr sz="2400" b="1">
                 <a:solidFill>
-                  <a:srgbClr val="BD9A78"/>
+                  <a:srgbClr val="C6A27F"/>
                 </a:solidFill>
                 <a:latin typeface="Arial"/>
                 <a:ea typeface="Arial"/>
@@ -13786,7 +13786,7 @@
             <a:r>
               <a:rPr sz="2400" b="1">
                 <a:solidFill>
-                  <a:srgbClr val="BD9A78"/>
+                  <a:srgbClr val="C6A27F"/>
                 </a:solidFill>
                 <a:latin typeface="Arial"/>
                 <a:ea typeface="Arial"/>
@@ -13802,7 +13802,7 @@
           <p:cNvPr id="10" name="">
             <a:extLst xmlns:a="http://schemas.openxmlformats.org/drawingml/2006/main">
               <a:ext uri="{FF2B5EF4-FFF2-40B4-BE49-F238E27FC236}">
-                <a16:creationId xmlns:a16="http://schemas.microsoft.com/office/drawing/2014/main" id="{ADBDDF2F-0992-430B-A762-5778E6EFB053}"/>
+                <a16:creationId xmlns:a16="http://schemas.microsoft.com/office/drawing/2014/main" id="{38E15E49-AF66-4D25-9470-661954F415A8}"/>
               </a:ext>
             </a:extLst>
           </p:cNvPr>
@@ -13830,7 +13830,7 @@
             <a:defPPr>
               <a:defRPr sz="2400" b="0">
                 <a:solidFill>
-                  <a:srgbClr val="F3EEE8"/>
+                  <a:srgbClr val="F1EEE8"/>
                 </a:solidFill>
                 <a:latin typeface="Arial"/>
                 <a:ea typeface="Arial"/>
@@ -13842,7 +13842,7 @@
             <a:pPr>
               <a:defRPr sz="2400" b="0">
                 <a:solidFill>
-                  <a:srgbClr val="F3EEE8"/>
+                  <a:srgbClr val="F1EEE8"/>
                 </a:solidFill>
                 <a:latin typeface="Arial"/>
                 <a:ea typeface="Arial"/>
@@ -13852,7 +13852,7 @@
             <a:r>
               <a:rPr sz="2400" b="0">
                 <a:solidFill>
-                  <a:srgbClr val="F3EEE8"/>
+                  <a:srgbClr val="F1EEE8"/>
                 </a:solidFill>
                 <a:latin typeface="Arial"/>
                 <a:ea typeface="Arial"/>
@@ -13865,7 +13865,7 @@
             <a:pPr>
               <a:defRPr sz="2400" b="0">
                 <a:solidFill>
-                  <a:srgbClr val="F3EEE8"/>
+                  <a:srgbClr val="F1EEE8"/>
                 </a:solidFill>
                 <a:latin typeface="Arial"/>
                 <a:ea typeface="Arial"/>
@@ -13875,7 +13875,7 @@
             <a:r>
               <a:rPr sz="2400" b="0">
                 <a:solidFill>
-                  <a:srgbClr val="F3EEE8"/>
+                  <a:srgbClr val="F1EEE8"/>
                 </a:solidFill>
                 <a:latin typeface="Arial"/>
                 <a:ea typeface="Arial"/>
@@ -13891,7 +13891,7 @@
           <p:cNvPr id="11" name="">
             <a:extLst xmlns:a="http://schemas.openxmlformats.org/drawingml/2006/main">
               <a:ext uri="{FF2B5EF4-FFF2-40B4-BE49-F238E27FC236}">
-                <a16:creationId xmlns:a16="http://schemas.microsoft.com/office/drawing/2014/main" id="{3D325285-5043-4BDD-87B6-E0FCB24E5ABF}"/>
+                <a16:creationId xmlns:a16="http://schemas.microsoft.com/office/drawing/2014/main" id="{0724B6E5-FD3F-47C8-9877-38B0F9DCD610}"/>
               </a:ext>
             </a:extLst>
           </p:cNvPr>
@@ -13919,7 +13919,7 @@
             <a:defPPr>
               <a:defRPr sz="1875" b="0">
                 <a:solidFill>
-                  <a:srgbClr val="93A4AA"/>
+                  <a:srgbClr val="A9B8BC"/>
                 </a:solidFill>
                 <a:latin typeface="Arial"/>
                 <a:ea typeface="Arial"/>
@@ -13931,7 +13931,7 @@
             <a:pPr>
               <a:defRPr sz="1875" b="0">
                 <a:solidFill>
-                  <a:srgbClr val="93A4AA"/>
+                  <a:srgbClr val="A9B8BC"/>
                 </a:solidFill>
                 <a:latin typeface="Arial"/>
                 <a:ea typeface="Arial"/>
@@ -13941,7 +13941,7 @@
             <a:r>
               <a:rPr sz="1875" b="0">
                 <a:solidFill>
-                  <a:srgbClr val="93A4AA"/>
+                  <a:srgbClr val="A9B8BC"/>
                 </a:solidFill>
                 <a:latin typeface="Arial"/>
                 <a:ea typeface="Arial"/>
@@ -13957,7 +13957,7 @@
           <p:cNvPr id="12" name="">
             <a:extLst xmlns:a="http://schemas.openxmlformats.org/drawingml/2006/main">
               <a:ext uri="{FF2B5EF4-FFF2-40B4-BE49-F238E27FC236}">
-                <a16:creationId xmlns:a16="http://schemas.microsoft.com/office/drawing/2014/main" id="{B7F7FDDD-1D8C-4A29-AAB0-CE12AC39016C}"/>
+                <a16:creationId xmlns:a16="http://schemas.microsoft.com/office/drawing/2014/main" id="{A79A83EE-CB21-45E1-85F6-AA8ABD099250}"/>
               </a:ext>
             </a:extLst>
           </p:cNvPr>
@@ -13985,7 +13985,7 @@
             <a:defPPr>
               <a:defRPr sz="1425" b="0">
                 <a:solidFill>
-                  <a:srgbClr val="93A4AA"/>
+                  <a:srgbClr val="A9B8BC"/>
                 </a:solidFill>
                 <a:latin typeface="Arial"/>
                 <a:ea typeface="Arial"/>
@@ -13997,7 +13997,7 @@
             <a:pPr>
               <a:defRPr sz="1425" b="0">
                 <a:solidFill>
-                  <a:srgbClr val="93A4AA"/>
+                  <a:srgbClr val="A9B8BC"/>
                 </a:solidFill>
                 <a:latin typeface="Arial"/>
                 <a:ea typeface="Arial"/>
@@ -14007,7 +14007,7 @@
             <a:r>
               <a:rPr sz="1425" b="0">
                 <a:solidFill>
-                  <a:srgbClr val="93A4AA"/>
+                  <a:srgbClr val="A9B8BC"/>
                 </a:solidFill>
                 <a:latin typeface="Arial"/>
                 <a:ea typeface="Arial"/>
@@ -14021,7 +14021,7 @@
     </p:spTree>
     <p:extLst>
       <p:ext uri="{BB962C8B-B14F-4D97-AF65-F5344CB8AC3E}">
-        <p14:creationId xmlns:p14="http://schemas.microsoft.com/office/powerpoint/2010/main" val="706386968"/>
+        <p14:creationId xmlns:p14="http://schemas.microsoft.com/office/powerpoint/2010/main" val="1086078302"/>
       </p:ext>
     </p:extLst>
   </p:cSld>
@@ -14034,7 +14034,7 @@
     <p:bg>
       <p:bgPr>
         <a:solidFill xmlns:a="http://schemas.openxmlformats.org/drawingml/2006/main">
-          <a:srgbClr val="202433"/>
+          <a:srgbClr val="222636"/>
         </a:solidFill>
       </p:bgPr>
     </p:bg>
@@ -14052,7 +14052,7 @@
           <p:cNvPr id="10" name="">
             <a:extLst xmlns:a="http://schemas.openxmlformats.org/drawingml/2006/main">
               <a:ext uri="{FF2B5EF4-FFF2-40B4-BE49-F238E27FC236}">
-                <a16:creationId xmlns:a16="http://schemas.microsoft.com/office/drawing/2014/main" id="{AAAAB43F-F498-433E-9430-073769DEC430}"/>
+                <a16:creationId xmlns:a16="http://schemas.microsoft.com/office/drawing/2014/main" id="{BB0DB1D7-5182-4003-A7C7-68E73E52BAC6}"/>
               </a:ext>
             </a:extLst>
           </p:cNvPr>
@@ -14080,7 +14080,7 @@
             <a:defPPr>
               <a:defRPr sz="4350" b="1">
                 <a:solidFill>
-                  <a:srgbClr val="BD9A78"/>
+                  <a:srgbClr val="C6A27F"/>
                 </a:solidFill>
                 <a:latin typeface="Arial"/>
                 <a:ea typeface="Arial"/>
@@ -14092,7 +14092,7 @@
             <a:pPr>
               <a:defRPr sz="4350" b="1">
                 <a:solidFill>
-                  <a:srgbClr val="BD9A78"/>
+                  <a:srgbClr val="C6A27F"/>
                 </a:solidFill>
                 <a:latin typeface="Arial"/>
                 <a:ea typeface="Arial"/>
@@ -14102,7 +14102,7 @@
             <a:r>
               <a:rPr sz="4350" b="1">
                 <a:solidFill>
-                  <a:srgbClr val="BD9A78"/>
+                  <a:srgbClr val="C6A27F"/>
                 </a:solidFill>
                 <a:latin typeface="Arial"/>
                 <a:ea typeface="Arial"/>
@@ -14118,7 +14118,7 @@
           <p:cNvPr id="2" name="">
             <a:extLst xmlns:a="http://schemas.openxmlformats.org/drawingml/2006/main">
               <a:ext uri="{FF2B5EF4-FFF2-40B4-BE49-F238E27FC236}">
-                <a16:creationId xmlns:a16="http://schemas.microsoft.com/office/drawing/2014/main" id="{0A388763-1646-4872-BEB7-ED2BC409C9DA}"/>
+                <a16:creationId xmlns:a16="http://schemas.microsoft.com/office/drawing/2014/main" id="{2095F95A-275C-4AD9-8280-9D9D8E35A463}"/>
               </a:ext>
             </a:extLst>
           </p:cNvPr>
@@ -14146,7 +14146,7 @@
             <a:defPPr>
               <a:defRPr sz="2400" b="1">
                 <a:solidFill>
-                  <a:srgbClr val="BD9A78"/>
+                  <a:srgbClr val="C6A27F"/>
                 </a:solidFill>
                 <a:latin typeface="Arial"/>
                 <a:ea typeface="Arial"/>
@@ -14158,7 +14158,7 @@
             <a:pPr>
               <a:defRPr sz="2400" b="1">
                 <a:solidFill>
-                  <a:srgbClr val="BD9A78"/>
+                  <a:srgbClr val="C6A27F"/>
                 </a:solidFill>
                 <a:latin typeface="Arial"/>
                 <a:ea typeface="Arial"/>
@@ -14168,7 +14168,7 @@
             <a:r>
               <a:rPr sz="2400" b="1">
                 <a:solidFill>
-                  <a:srgbClr val="BD9A78"/>
+                  <a:srgbClr val="C6A27F"/>
                 </a:solidFill>
                 <a:latin typeface="Arial"/>
                 <a:ea typeface="Arial"/>
@@ -14184,7 +14184,7 @@
           <p:cNvPr id="3" name="">
             <a:extLst xmlns:a="http://schemas.openxmlformats.org/drawingml/2006/main">
               <a:ext uri="{FF2B5EF4-FFF2-40B4-BE49-F238E27FC236}">
-                <a16:creationId xmlns:a16="http://schemas.microsoft.com/office/drawing/2014/main" id="{EF745F9D-D918-4E0F-942E-622866B87355}"/>
+                <a16:creationId xmlns:a16="http://schemas.microsoft.com/office/drawing/2014/main" id="{E9D9329A-9B6E-4E2C-BED9-05048DBD8CBD}"/>
               </a:ext>
             </a:extLst>
           </p:cNvPr>
@@ -14212,7 +14212,7 @@
             <a:defPPr>
               <a:defRPr sz="2400" b="0">
                 <a:solidFill>
-                  <a:srgbClr val="F3EEE8"/>
+                  <a:srgbClr val="F1EEE8"/>
                 </a:solidFill>
                 <a:latin typeface="Arial"/>
                 <a:ea typeface="Arial"/>
@@ -14224,7 +14224,7 @@
             <a:pPr>
               <a:defRPr sz="2400" b="0">
                 <a:solidFill>
-                  <a:srgbClr val="F3EEE8"/>
+                  <a:srgbClr val="F1EEE8"/>
                 </a:solidFill>
                 <a:latin typeface="Arial"/>
                 <a:ea typeface="Arial"/>
@@ -14234,7 +14234,7 @@
             <a:r>
               <a:rPr sz="2400" b="0">
                 <a:solidFill>
-                  <a:srgbClr val="F3EEE8"/>
+                  <a:srgbClr val="F1EEE8"/>
                 </a:solidFill>
                 <a:latin typeface="Arial"/>
                 <a:ea typeface="Arial"/>
@@ -14247,7 +14247,7 @@
             <a:pPr>
               <a:defRPr sz="2400" b="0">
                 <a:solidFill>
-                  <a:srgbClr val="F3EEE8"/>
+                  <a:srgbClr val="F1EEE8"/>
                 </a:solidFill>
                 <a:latin typeface="Arial"/>
                 <a:ea typeface="Arial"/>
@@ -14257,7 +14257,7 @@
             <a:r>
               <a:rPr sz="2400" b="0">
                 <a:solidFill>
-                  <a:srgbClr val="F3EEE8"/>
+                  <a:srgbClr val="F1EEE8"/>
                 </a:solidFill>
                 <a:latin typeface="Arial"/>
                 <a:ea typeface="Arial"/>
@@ -14273,7 +14273,7 @@
           <p:cNvPr id="4" name="">
             <a:extLst xmlns:a="http://schemas.openxmlformats.org/drawingml/2006/main">
               <a:ext uri="{FF2B5EF4-FFF2-40B4-BE49-F238E27FC236}">
-                <a16:creationId xmlns:a16="http://schemas.microsoft.com/office/drawing/2014/main" id="{14616CC7-13CC-4C1A-AFCC-F7B86FA70A6F}"/>
+                <a16:creationId xmlns:a16="http://schemas.microsoft.com/office/drawing/2014/main" id="{1342328B-A08C-4E32-B8D8-476F0536ED68}"/>
               </a:ext>
             </a:extLst>
           </p:cNvPr>
@@ -14301,7 +14301,7 @@
             <a:defPPr>
               <a:defRPr sz="2400" b="1">
                 <a:solidFill>
-                  <a:srgbClr val="BD9A78"/>
+                  <a:srgbClr val="C6A27F"/>
                 </a:solidFill>
                 <a:latin typeface="Arial"/>
                 <a:ea typeface="Arial"/>
@@ -14313,7 +14313,7 @@
             <a:pPr>
               <a:defRPr sz="2400" b="1">
                 <a:solidFill>
-                  <a:srgbClr val="BD9A78"/>
+                  <a:srgbClr val="C6A27F"/>
                 </a:solidFill>
                 <a:latin typeface="Arial"/>
                 <a:ea typeface="Arial"/>
@@ -14323,7 +14323,7 @@
             <a:r>
               <a:rPr sz="2400" b="1">
                 <a:solidFill>
-                  <a:srgbClr val="BD9A78"/>
+                  <a:srgbClr val="C6A27F"/>
                 </a:solidFill>
                 <a:latin typeface="Arial"/>
                 <a:ea typeface="Arial"/>
@@ -14339,7 +14339,7 @@
           <p:cNvPr id="5" name="">
             <a:extLst xmlns:a="http://schemas.openxmlformats.org/drawingml/2006/main">
               <a:ext uri="{FF2B5EF4-FFF2-40B4-BE49-F238E27FC236}">
-                <a16:creationId xmlns:a16="http://schemas.microsoft.com/office/drawing/2014/main" id="{74F09D2A-EAD7-4753-9A2D-76833A10CAFE}"/>
+                <a16:creationId xmlns:a16="http://schemas.microsoft.com/office/drawing/2014/main" id="{7171BAD6-7028-4B1C-9FB3-F79CE2849AF5}"/>
               </a:ext>
             </a:extLst>
           </p:cNvPr>
@@ -14367,7 +14367,7 @@
             <a:defPPr>
               <a:defRPr sz="2400" b="0">
                 <a:solidFill>
-                  <a:srgbClr val="F3EEE8"/>
+                  <a:srgbClr val="F1EEE8"/>
                 </a:solidFill>
                 <a:latin typeface="Arial"/>
                 <a:ea typeface="Arial"/>
@@ -14379,7 +14379,7 @@
             <a:pPr>
               <a:defRPr sz="2400" b="0">
                 <a:solidFill>
-                  <a:srgbClr val="F3EEE8"/>
+                  <a:srgbClr val="F1EEE8"/>
                 </a:solidFill>
                 <a:latin typeface="Arial"/>
                 <a:ea typeface="Arial"/>
@@ -14389,7 +14389,7 @@
             <a:r>
               <a:rPr sz="2400" b="0">
                 <a:solidFill>
-                  <a:srgbClr val="F3EEE8"/>
+                  <a:srgbClr val="F1EEE8"/>
                 </a:solidFill>
                 <a:latin typeface="Arial"/>
                 <a:ea typeface="Arial"/>
@@ -14405,7 +14405,7 @@
           <p:cNvPr id="6" name="">
             <a:extLst xmlns:a="http://schemas.openxmlformats.org/drawingml/2006/main">
               <a:ext uri="{FF2B5EF4-FFF2-40B4-BE49-F238E27FC236}">
-                <a16:creationId xmlns:a16="http://schemas.microsoft.com/office/drawing/2014/main" id="{7A07FB28-7D4A-4F49-8F13-8D43F3B4185A}"/>
+                <a16:creationId xmlns:a16="http://schemas.microsoft.com/office/drawing/2014/main" id="{8A9C5F53-A63A-49D2-9096-EBCDB68816E2}"/>
               </a:ext>
             </a:extLst>
           </p:cNvPr>
@@ -14433,7 +14433,7 @@
             <a:defPPr>
               <a:defRPr sz="2400" b="1">
                 <a:solidFill>
-                  <a:srgbClr val="BD9A78"/>
+                  <a:srgbClr val="C6A27F"/>
                 </a:solidFill>
                 <a:latin typeface="Arial"/>
                 <a:ea typeface="Arial"/>
@@ -14445,7 +14445,7 @@
             <a:pPr>
               <a:defRPr sz="2400" b="1">
                 <a:solidFill>
-                  <a:srgbClr val="BD9A78"/>
+                  <a:srgbClr val="C6A27F"/>
                 </a:solidFill>
                 <a:latin typeface="Arial"/>
                 <a:ea typeface="Arial"/>
@@ -14455,7 +14455,7 @@
             <a:r>
               <a:rPr sz="2400" b="1">
                 <a:solidFill>
-                  <a:srgbClr val="BD9A78"/>
+                  <a:srgbClr val="C6A27F"/>
                 </a:solidFill>
                 <a:latin typeface="Arial"/>
                 <a:ea typeface="Arial"/>
@@ -14471,7 +14471,7 @@
           <p:cNvPr id="7" name="">
             <a:extLst xmlns:a="http://schemas.openxmlformats.org/drawingml/2006/main">
               <a:ext uri="{FF2B5EF4-FFF2-40B4-BE49-F238E27FC236}">
-                <a16:creationId xmlns:a16="http://schemas.microsoft.com/office/drawing/2014/main" id="{EFB05FFB-EBAC-42D6-A83C-7E409D3A794F}"/>
+                <a16:creationId xmlns:a16="http://schemas.microsoft.com/office/drawing/2014/main" id="{A8B246AF-E4FC-4DA1-8E6D-0C363B795D2B}"/>
               </a:ext>
             </a:extLst>
           </p:cNvPr>
@@ -14499,7 +14499,7 @@
             <a:defPPr>
               <a:defRPr sz="2400" b="0">
                 <a:solidFill>
-                  <a:srgbClr val="F3EEE8"/>
+                  <a:srgbClr val="F1EEE8"/>
                 </a:solidFill>
                 <a:latin typeface="Arial"/>
                 <a:ea typeface="Arial"/>
@@ -14511,7 +14511,7 @@
             <a:pPr>
               <a:defRPr sz="2400" b="0">
                 <a:solidFill>
-                  <a:srgbClr val="F3EEE8"/>
+                  <a:srgbClr val="F1EEE8"/>
                 </a:solidFill>
                 <a:latin typeface="Arial"/>
                 <a:ea typeface="Arial"/>
@@ -14521,7 +14521,7 @@
             <a:r>
               <a:rPr sz="2400" b="0">
                 <a:solidFill>
-                  <a:srgbClr val="F3EEE8"/>
+                  <a:srgbClr val="F1EEE8"/>
                 </a:solidFill>
                 <a:latin typeface="Arial"/>
                 <a:ea typeface="Arial"/>
@@ -14534,7 +14534,7 @@
             <a:pPr>
               <a:defRPr sz="2400" b="0">
                 <a:solidFill>
-                  <a:srgbClr val="F3EEE8"/>
+                  <a:srgbClr val="F1EEE8"/>
                 </a:solidFill>
                 <a:latin typeface="Arial"/>
                 <a:ea typeface="Arial"/>
@@ -14544,7 +14544,7 @@
             <a:r>
               <a:rPr sz="2400" b="0">
                 <a:solidFill>
-                  <a:srgbClr val="F3EEE8"/>
+                  <a:srgbClr val="F1EEE8"/>
                 </a:solidFill>
                 <a:latin typeface="Arial"/>
                 <a:ea typeface="Arial"/>
@@ -14560,7 +14560,7 @@
           <p:cNvPr id="8" name="">
             <a:extLst xmlns:a="http://schemas.openxmlformats.org/drawingml/2006/main">
               <a:ext uri="{FF2B5EF4-FFF2-40B4-BE49-F238E27FC236}">
-                <a16:creationId xmlns:a16="http://schemas.microsoft.com/office/drawing/2014/main" id="{483CFB31-0DEB-4362-AF81-E39D3A9F6B9B}"/>
+                <a16:creationId xmlns:a16="http://schemas.microsoft.com/office/drawing/2014/main" id="{D22E1803-9AC1-43A0-AACF-404D3662D656}"/>
               </a:ext>
             </a:extLst>
           </p:cNvPr>
@@ -14588,7 +14588,7 @@
             <a:defPPr>
               <a:defRPr sz="1875" b="0">
                 <a:solidFill>
-                  <a:srgbClr val="93A4AA"/>
+                  <a:srgbClr val="A9B8BC"/>
                 </a:solidFill>
                 <a:latin typeface="Arial"/>
                 <a:ea typeface="Arial"/>
@@ -14600,7 +14600,7 @@
             <a:pPr>
               <a:defRPr sz="1875" b="0">
                 <a:solidFill>
-                  <a:srgbClr val="93A4AA"/>
+                  <a:srgbClr val="A9B8BC"/>
                 </a:solidFill>
                 <a:latin typeface="Arial"/>
                 <a:ea typeface="Arial"/>
@@ -14610,7 +14610,7 @@
             <a:r>
               <a:rPr sz="1875" b="0">
                 <a:solidFill>
-                  <a:srgbClr val="93A4AA"/>
+                  <a:srgbClr val="A9B8BC"/>
                 </a:solidFill>
                 <a:latin typeface="Arial"/>
                 <a:ea typeface="Arial"/>
@@ -14626,7 +14626,7 @@
           <p:cNvPr id="9" name="">
             <a:extLst xmlns:a="http://schemas.openxmlformats.org/drawingml/2006/main">
               <a:ext uri="{FF2B5EF4-FFF2-40B4-BE49-F238E27FC236}">
-                <a16:creationId xmlns:a16="http://schemas.microsoft.com/office/drawing/2014/main" id="{FCBF5481-5970-4B73-AEA5-B7F5C9FD9DE8}"/>
+                <a16:creationId xmlns:a16="http://schemas.microsoft.com/office/drawing/2014/main" id="{6C34CF9B-1897-4273-B95A-3D271CC785B8}"/>
               </a:ext>
             </a:extLst>
           </p:cNvPr>
@@ -14654,7 +14654,7 @@
             <a:defPPr>
               <a:defRPr sz="1425" b="0">
                 <a:solidFill>
-                  <a:srgbClr val="93A4AA"/>
+                  <a:srgbClr val="A9B8BC"/>
                 </a:solidFill>
                 <a:latin typeface="Arial"/>
                 <a:ea typeface="Arial"/>
@@ -14666,7 +14666,7 @@
             <a:pPr>
               <a:defRPr sz="1425" b="0">
                 <a:solidFill>
-                  <a:srgbClr val="93A4AA"/>
+                  <a:srgbClr val="A9B8BC"/>
                 </a:solidFill>
                 <a:latin typeface="Arial"/>
                 <a:ea typeface="Arial"/>
@@ -14676,7 +14676,7 @@
             <a:r>
               <a:rPr sz="1425" b="0">
                 <a:solidFill>
-                  <a:srgbClr val="93A4AA"/>
+                  <a:srgbClr val="A9B8BC"/>
                 </a:solidFill>
                 <a:latin typeface="Arial"/>
                 <a:ea typeface="Arial"/>
@@ -14690,7 +14690,7 @@
     </p:spTree>
     <p:extLst>
       <p:ext uri="{BB962C8B-B14F-4D97-AF65-F5344CB8AC3E}">
-        <p14:creationId xmlns:p14="http://schemas.microsoft.com/office/powerpoint/2010/main" val="1580407558"/>
+        <p14:creationId xmlns:p14="http://schemas.microsoft.com/office/powerpoint/2010/main" val="10905286"/>
       </p:ext>
     </p:extLst>
   </p:cSld>
@@ -14703,7 +14703,7 @@
     <p:bg>
       <p:bgPr>
         <a:solidFill xmlns:a="http://schemas.openxmlformats.org/drawingml/2006/main">
-          <a:srgbClr val="202433"/>
+          <a:srgbClr val="222636"/>
         </a:solidFill>
       </p:bgPr>
     </p:bg>
@@ -14721,7 +14721,7 @@
           <p:cNvPr id="11" name="">
             <a:extLst xmlns:a="http://schemas.openxmlformats.org/drawingml/2006/main">
               <a:ext uri="{FF2B5EF4-FFF2-40B4-BE49-F238E27FC236}">
-                <a16:creationId xmlns:a16="http://schemas.microsoft.com/office/drawing/2014/main" id="{797E9458-D003-400B-B24C-38DC0B435656}"/>
+                <a16:creationId xmlns:a16="http://schemas.microsoft.com/office/drawing/2014/main" id="{C18A95C0-6DAC-4DC8-AFB3-CA1600D6B0FE}"/>
               </a:ext>
             </a:extLst>
           </p:cNvPr>
@@ -14749,7 +14749,7 @@
             <a:defPPr>
               <a:defRPr sz="4350" b="1">
                 <a:solidFill>
-                  <a:srgbClr val="BD9A78"/>
+                  <a:srgbClr val="C6A27F"/>
                 </a:solidFill>
                 <a:latin typeface="Arial"/>
                 <a:ea typeface="Arial"/>
@@ -14761,7 +14761,7 @@
             <a:pPr>
               <a:defRPr sz="4350" b="1">
                 <a:solidFill>
-                  <a:srgbClr val="BD9A78"/>
+                  <a:srgbClr val="C6A27F"/>
                 </a:solidFill>
                 <a:latin typeface="Arial"/>
                 <a:ea typeface="Arial"/>
@@ -14771,7 +14771,7 @@
             <a:r>
               <a:rPr sz="4350" b="1">
                 <a:solidFill>
-                  <a:srgbClr val="BD9A78"/>
+                  <a:srgbClr val="C6A27F"/>
                 </a:solidFill>
                 <a:latin typeface="Arial"/>
                 <a:ea typeface="Arial"/>
@@ -14787,7 +14787,7 @@
           <p:cNvPr id="2" name="">
             <a:extLst xmlns:a="http://schemas.openxmlformats.org/drawingml/2006/main">
               <a:ext uri="{FF2B5EF4-FFF2-40B4-BE49-F238E27FC236}">
-                <a16:creationId xmlns:a16="http://schemas.microsoft.com/office/drawing/2014/main" id="{C6014F1A-7150-4D47-BFD1-93AD08CD6588}"/>
+                <a16:creationId xmlns:a16="http://schemas.microsoft.com/office/drawing/2014/main" id="{6CEFDA7A-1F16-4B36-B52C-D460FC4CE7CA}"/>
               </a:ext>
             </a:extLst>
           </p:cNvPr>
@@ -14815,7 +14815,7 @@
             <a:defPPr>
               <a:defRPr sz="2400" b="1">
                 <a:solidFill>
-                  <a:srgbClr val="BD9A78"/>
+                  <a:srgbClr val="C6A27F"/>
                 </a:solidFill>
                 <a:latin typeface="Arial"/>
                 <a:ea typeface="Arial"/>
@@ -14827,7 +14827,7 @@
             <a:pPr>
               <a:defRPr sz="2400" b="1">
                 <a:solidFill>
-                  <a:srgbClr val="BD9A78"/>
+                  <a:srgbClr val="C6A27F"/>
                 </a:solidFill>
                 <a:latin typeface="Arial"/>
                 <a:ea typeface="Arial"/>
@@ -14837,7 +14837,7 @@
             <a:r>
               <a:rPr sz="2400" b="1">
                 <a:solidFill>
-                  <a:srgbClr val="BD9A78"/>
+                  <a:srgbClr val="C6A27F"/>
                 </a:solidFill>
                 <a:latin typeface="Arial"/>
                 <a:ea typeface="Arial"/>
@@ -14853,7 +14853,7 @@
           <p:cNvPr id="3" name="">
             <a:extLst xmlns:a="http://schemas.openxmlformats.org/drawingml/2006/main">
               <a:ext uri="{FF2B5EF4-FFF2-40B4-BE49-F238E27FC236}">
-                <a16:creationId xmlns:a16="http://schemas.microsoft.com/office/drawing/2014/main" id="{2A6CFF81-AD5C-4102-99DB-F4BEA3F97D32}"/>
+                <a16:creationId xmlns:a16="http://schemas.microsoft.com/office/drawing/2014/main" id="{29137FBB-BF00-491E-AA0A-75B2B21822D1}"/>
               </a:ext>
             </a:extLst>
           </p:cNvPr>
@@ -14881,7 +14881,7 @@
             <a:defPPr>
               <a:defRPr sz="2400" b="0">
                 <a:solidFill>
-                  <a:srgbClr val="F3EEE8"/>
+                  <a:srgbClr val="F1EEE8"/>
                 </a:solidFill>
                 <a:latin typeface="Arial"/>
                 <a:ea typeface="Arial"/>
@@ -14893,7 +14893,7 @@
             <a:pPr>
               <a:defRPr sz="2400" b="0">
                 <a:solidFill>
-                  <a:srgbClr val="F3EEE8"/>
+                  <a:srgbClr val="F1EEE8"/>
                 </a:solidFill>
                 <a:latin typeface="Arial"/>
                 <a:ea typeface="Arial"/>
@@ -14903,7 +14903,7 @@
             <a:r>
               <a:rPr sz="2400" b="0">
                 <a:solidFill>
-                  <a:srgbClr val="F3EEE8"/>
+                  <a:srgbClr val="F1EEE8"/>
                 </a:solidFill>
                 <a:latin typeface="Arial"/>
                 <a:ea typeface="Arial"/>
@@ -14919,7 +14919,7 @@
           <p:cNvPr id="4" name="">
             <a:extLst xmlns:a="http://schemas.openxmlformats.org/drawingml/2006/main">
               <a:ext uri="{FF2B5EF4-FFF2-40B4-BE49-F238E27FC236}">
-                <a16:creationId xmlns:a16="http://schemas.microsoft.com/office/drawing/2014/main" id="{8B1EEAFE-829A-4BD7-AAA0-5A3F47338FFF}"/>
+                <a16:creationId xmlns:a16="http://schemas.microsoft.com/office/drawing/2014/main" id="{B7FD9505-8900-4EA0-A288-FD553ADEE6B8}"/>
               </a:ext>
             </a:extLst>
           </p:cNvPr>
@@ -14947,7 +14947,7 @@
             <a:defPPr>
               <a:defRPr sz="2400" b="1">
                 <a:solidFill>
-                  <a:srgbClr val="BD9A78"/>
+                  <a:srgbClr val="C6A27F"/>
                 </a:solidFill>
                 <a:latin typeface="Arial"/>
                 <a:ea typeface="Arial"/>
@@ -14959,7 +14959,7 @@
             <a:pPr>
               <a:defRPr sz="2400" b="1">
                 <a:solidFill>
-                  <a:srgbClr val="BD9A78"/>
+                  <a:srgbClr val="C6A27F"/>
                 </a:solidFill>
                 <a:latin typeface="Arial"/>
                 <a:ea typeface="Arial"/>
@@ -14969,7 +14969,7 @@
             <a:r>
               <a:rPr sz="2400" b="1">
                 <a:solidFill>
-                  <a:srgbClr val="BD9A78"/>
+                  <a:srgbClr val="C6A27F"/>
                 </a:solidFill>
                 <a:latin typeface="Arial"/>
                 <a:ea typeface="Arial"/>
@@ -14985,7 +14985,7 @@
           <p:cNvPr id="5" name="">
             <a:extLst xmlns:a="http://schemas.openxmlformats.org/drawingml/2006/main">
               <a:ext uri="{FF2B5EF4-FFF2-40B4-BE49-F238E27FC236}">
-                <a16:creationId xmlns:a16="http://schemas.microsoft.com/office/drawing/2014/main" id="{9DF4BE6C-9218-4FF7-869F-E43C945D9048}"/>
+                <a16:creationId xmlns:a16="http://schemas.microsoft.com/office/drawing/2014/main" id="{0B416379-F767-4A04-9176-E53D1E3AEB3E}"/>
               </a:ext>
             </a:extLst>
           </p:cNvPr>
@@ -15013,7 +15013,7 @@
             <a:defPPr>
               <a:defRPr sz="2400" b="0">
                 <a:solidFill>
-                  <a:srgbClr val="F3EEE8"/>
+                  <a:srgbClr val="F1EEE8"/>
                 </a:solidFill>
                 <a:latin typeface="Arial"/>
                 <a:ea typeface="Arial"/>
@@ -15025,7 +15025,7 @@
             <a:pPr>
               <a:defRPr sz="2400" b="0">
                 <a:solidFill>
-                  <a:srgbClr val="F3EEE8"/>
+                  <a:srgbClr val="F1EEE8"/>
                 </a:solidFill>
                 <a:latin typeface="Arial"/>
                 <a:ea typeface="Arial"/>
@@ -15035,7 +15035,7 @@
             <a:r>
               <a:rPr sz="2400" b="0">
                 <a:solidFill>
-                  <a:srgbClr val="F3EEE8"/>
+                  <a:srgbClr val="F1EEE8"/>
                 </a:solidFill>
                 <a:latin typeface="Arial"/>
                 <a:ea typeface="Arial"/>
@@ -15051,7 +15051,7 @@
           <p:cNvPr id="6" name="">
             <a:extLst xmlns:a="http://schemas.openxmlformats.org/drawingml/2006/main">
               <a:ext uri="{FF2B5EF4-FFF2-40B4-BE49-F238E27FC236}">
-                <a16:creationId xmlns:a16="http://schemas.microsoft.com/office/drawing/2014/main" id="{32CD7153-5B32-4DC0-8150-614B82A72E6B}"/>
+                <a16:creationId xmlns:a16="http://schemas.microsoft.com/office/drawing/2014/main" id="{E8F5D9FE-FBF1-4CB8-8AF6-31619E17C5C1}"/>
               </a:ext>
             </a:extLst>
           </p:cNvPr>
@@ -15079,7 +15079,7 @@
             <a:defPPr>
               <a:defRPr sz="2400" b="1">
                 <a:solidFill>
-                  <a:srgbClr val="BD9A78"/>
+                  <a:srgbClr val="C6A27F"/>
                 </a:solidFill>
                 <a:latin typeface="Arial"/>
                 <a:ea typeface="Arial"/>
@@ -15091,7 +15091,7 @@
             <a:pPr>
               <a:defRPr sz="2400" b="1">
                 <a:solidFill>
-                  <a:srgbClr val="BD9A78"/>
+                  <a:srgbClr val="C6A27F"/>
                 </a:solidFill>
                 <a:latin typeface="Arial"/>
                 <a:ea typeface="Arial"/>
@@ -15101,7 +15101,7 @@
             <a:r>
               <a:rPr sz="2400" b="1">
                 <a:solidFill>
-                  <a:srgbClr val="BD9A78"/>
+                  <a:srgbClr val="C6A27F"/>
                 </a:solidFill>
                 <a:latin typeface="Arial"/>
                 <a:ea typeface="Arial"/>
@@ -15117,7 +15117,7 @@
           <p:cNvPr id="7" name="">
             <a:extLst xmlns:a="http://schemas.openxmlformats.org/drawingml/2006/main">
               <a:ext uri="{FF2B5EF4-FFF2-40B4-BE49-F238E27FC236}">
-                <a16:creationId xmlns:a16="http://schemas.microsoft.com/office/drawing/2014/main" id="{2334AE6B-C348-4EC8-9604-2847C24E0671}"/>
+                <a16:creationId xmlns:a16="http://schemas.microsoft.com/office/drawing/2014/main" id="{AEB3DF4C-9B71-4E5B-B7DA-FE347E2466F8}"/>
               </a:ext>
             </a:extLst>
           </p:cNvPr>
@@ -15145,7 +15145,7 @@
             <a:defPPr>
               <a:defRPr sz="2400" b="0">
                 <a:solidFill>
-                  <a:srgbClr val="F3EEE8"/>
+                  <a:srgbClr val="F1EEE8"/>
                 </a:solidFill>
                 <a:latin typeface="Arial"/>
                 <a:ea typeface="Arial"/>
@@ -15157,7 +15157,7 @@
             <a:pPr>
               <a:defRPr sz="2400" b="0">
                 <a:solidFill>
-                  <a:srgbClr val="F3EEE8"/>
+                  <a:srgbClr val="F1EEE8"/>
                 </a:solidFill>
                 <a:latin typeface="Arial"/>
                 <a:ea typeface="Arial"/>
@@ -15167,7 +15167,7 @@
             <a:r>
               <a:rPr sz="2400" b="0">
                 <a:solidFill>
-                  <a:srgbClr val="F3EEE8"/>
+                  <a:srgbClr val="F1EEE8"/>
                 </a:solidFill>
                 <a:latin typeface="Arial"/>
                 <a:ea typeface="Arial"/>
@@ -15183,7 +15183,7 @@
           <p:cNvPr id="8" name="">
             <a:extLst xmlns:a="http://schemas.openxmlformats.org/drawingml/2006/main">
               <a:ext uri="{FF2B5EF4-FFF2-40B4-BE49-F238E27FC236}">
-                <a16:creationId xmlns:a16="http://schemas.microsoft.com/office/drawing/2014/main" id="{EAA3539C-7C34-497E-B260-99A972CC6AEF}"/>
+                <a16:creationId xmlns:a16="http://schemas.microsoft.com/office/drawing/2014/main" id="{1B3B93EB-45C8-4F5D-8A01-AC654060A588}"/>
               </a:ext>
             </a:extLst>
           </p:cNvPr>
@@ -15211,7 +15211,7 @@
             <a:defPPr>
               <a:defRPr sz="2400" b="1">
                 <a:solidFill>
-                  <a:srgbClr val="BD9A78"/>
+                  <a:srgbClr val="C6A27F"/>
                 </a:solidFill>
                 <a:latin typeface="Arial"/>
                 <a:ea typeface="Arial"/>
@@ -15223,7 +15223,7 @@
             <a:pPr>
               <a:defRPr sz="2400" b="1">
                 <a:solidFill>
-                  <a:srgbClr val="BD9A78"/>
+                  <a:srgbClr val="C6A27F"/>
                 </a:solidFill>
                 <a:latin typeface="Arial"/>
                 <a:ea typeface="Arial"/>
@@ -15233,7 +15233,7 @@
             <a:r>
               <a:rPr sz="2400" b="1">
                 <a:solidFill>
-                  <a:srgbClr val="BD9A78"/>
+                  <a:srgbClr val="C6A27F"/>
                 </a:solidFill>
                 <a:latin typeface="Arial"/>
                 <a:ea typeface="Arial"/>
@@ -15249,7 +15249,7 @@
           <p:cNvPr id="9" name="">
             <a:extLst xmlns:a="http://schemas.openxmlformats.org/drawingml/2006/main">
               <a:ext uri="{FF2B5EF4-FFF2-40B4-BE49-F238E27FC236}">
-                <a16:creationId xmlns:a16="http://schemas.microsoft.com/office/drawing/2014/main" id="{FD751DBE-952E-403F-BA01-E9119DEC792A}"/>
+                <a16:creationId xmlns:a16="http://schemas.microsoft.com/office/drawing/2014/main" id="{938D9F85-9B33-48D4-A6D6-BF3A0E2DC73F}"/>
               </a:ext>
             </a:extLst>
           </p:cNvPr>
@@ -15277,7 +15277,7 @@
             <a:defPPr>
               <a:defRPr sz="2400" b="0">
                 <a:solidFill>
-                  <a:srgbClr val="F3EEE8"/>
+                  <a:srgbClr val="F1EEE8"/>
                 </a:solidFill>
                 <a:latin typeface="Arial"/>
                 <a:ea typeface="Arial"/>
@@ -15289,7 +15289,7 @@
             <a:pPr>
               <a:defRPr sz="2400" b="0">
                 <a:solidFill>
-                  <a:srgbClr val="F3EEE8"/>
+                  <a:srgbClr val="F1EEE8"/>
                 </a:solidFill>
                 <a:latin typeface="Arial"/>
                 <a:ea typeface="Arial"/>
@@ -15299,7 +15299,7 @@
             <a:r>
               <a:rPr sz="2400" b="0">
                 <a:solidFill>
-                  <a:srgbClr val="F3EEE8"/>
+                  <a:srgbClr val="F1EEE8"/>
                 </a:solidFill>
                 <a:latin typeface="Arial"/>
                 <a:ea typeface="Arial"/>
@@ -15312,7 +15312,7 @@
             <a:pPr>
               <a:defRPr sz="2400" b="0">
                 <a:solidFill>
-                  <a:srgbClr val="F3EEE8"/>
+                  <a:srgbClr val="F1EEE8"/>
                 </a:solidFill>
                 <a:latin typeface="Arial"/>
                 <a:ea typeface="Arial"/>
@@ -15322,7 +15322,7 @@
             <a:r>
               <a:rPr sz="2400" b="0">
                 <a:solidFill>
-                  <a:srgbClr val="F3EEE8"/>
+                  <a:srgbClr val="F1EEE8"/>
                 </a:solidFill>
                 <a:latin typeface="Arial"/>
                 <a:ea typeface="Arial"/>
@@ -15338,7 +15338,7 @@
           <p:cNvPr id="10" name="">
             <a:extLst xmlns:a="http://schemas.openxmlformats.org/drawingml/2006/main">
               <a:ext uri="{FF2B5EF4-FFF2-40B4-BE49-F238E27FC236}">
-                <a16:creationId xmlns:a16="http://schemas.microsoft.com/office/drawing/2014/main" id="{759A19C1-E5E7-44E8-A106-25995FA977D6}"/>
+                <a16:creationId xmlns:a16="http://schemas.microsoft.com/office/drawing/2014/main" id="{B329D7D1-BD19-4090-B9AF-72E9E6C41230}"/>
               </a:ext>
             </a:extLst>
           </p:cNvPr>
@@ -15366,7 +15366,7 @@
             <a:defPPr>
               <a:defRPr sz="1425" b="0">
                 <a:solidFill>
-                  <a:srgbClr val="93A4AA"/>
+                  <a:srgbClr val="A9B8BC"/>
                 </a:solidFill>
                 <a:latin typeface="Arial"/>
                 <a:ea typeface="Arial"/>
@@ -15378,7 +15378,7 @@
             <a:pPr>
               <a:defRPr sz="1425" b="0">
                 <a:solidFill>
-                  <a:srgbClr val="93A4AA"/>
+                  <a:srgbClr val="A9B8BC"/>
                 </a:solidFill>
                 <a:latin typeface="Arial"/>
                 <a:ea typeface="Arial"/>
@@ -15388,7 +15388,7 @@
             <a:r>
               <a:rPr sz="1425" b="0">
                 <a:solidFill>
-                  <a:srgbClr val="93A4AA"/>
+                  <a:srgbClr val="A9B8BC"/>
                 </a:solidFill>
                 <a:latin typeface="Arial"/>
                 <a:ea typeface="Arial"/>
@@ -15402,7 +15402,7 @@
     </p:spTree>
     <p:extLst>
       <p:ext uri="{BB962C8B-B14F-4D97-AF65-F5344CB8AC3E}">
-        <p14:creationId xmlns:p14="http://schemas.microsoft.com/office/powerpoint/2010/main" val="716820156"/>
+        <p14:creationId xmlns:p14="http://schemas.microsoft.com/office/powerpoint/2010/main" val="4882560"/>
       </p:ext>
     </p:extLst>
   </p:cSld>
@@ -15415,7 +15415,7 @@
     <p:bg>
       <p:bgPr>
         <a:solidFill xmlns:a="http://schemas.openxmlformats.org/drawingml/2006/main">
-          <a:srgbClr val="202433"/>
+          <a:srgbClr val="222636"/>
         </a:solidFill>
       </p:bgPr>
     </p:bg>
@@ -15433,7 +15433,7 @@
           <p:cNvPr id="12" name="">
             <a:extLst xmlns:a="http://schemas.openxmlformats.org/drawingml/2006/main">
               <a:ext uri="{FF2B5EF4-FFF2-40B4-BE49-F238E27FC236}">
-                <a16:creationId xmlns:a16="http://schemas.microsoft.com/office/drawing/2014/main" id="{802FA758-362D-479C-BBCA-714D62BA03F2}"/>
+                <a16:creationId xmlns:a16="http://schemas.microsoft.com/office/drawing/2014/main" id="{390C0D3E-8E85-442E-AFDE-E8C72696BE47}"/>
               </a:ext>
             </a:extLst>
           </p:cNvPr>
@@ -15461,7 +15461,7 @@
             <a:defPPr>
               <a:defRPr sz="4350" b="1">
                 <a:solidFill>
-                  <a:srgbClr val="BD9A78"/>
+                  <a:srgbClr val="C6A27F"/>
                 </a:solidFill>
                 <a:latin typeface="Arial"/>
                 <a:ea typeface="Arial"/>
@@ -15473,7 +15473,7 @@
             <a:pPr>
               <a:defRPr sz="4350" b="1">
                 <a:solidFill>
-                  <a:srgbClr val="BD9A78"/>
+                  <a:srgbClr val="C6A27F"/>
                 </a:solidFill>
                 <a:latin typeface="Arial"/>
                 <a:ea typeface="Arial"/>
@@ -15483,7 +15483,7 @@
             <a:r>
               <a:rPr sz="4350" b="1">
                 <a:solidFill>
-                  <a:srgbClr val="BD9A78"/>
+                  <a:srgbClr val="C6A27F"/>
                 </a:solidFill>
                 <a:latin typeface="Arial"/>
                 <a:ea typeface="Arial"/>
@@ -15499,7 +15499,7 @@
           <p:cNvPr id="2" name="">
             <a:extLst xmlns:a="http://schemas.openxmlformats.org/drawingml/2006/main">
               <a:ext uri="{FF2B5EF4-FFF2-40B4-BE49-F238E27FC236}">
-                <a16:creationId xmlns:a16="http://schemas.microsoft.com/office/drawing/2014/main" id="{83AAB2C8-86DF-49F0-BB64-7C686178C92A}"/>
+                <a16:creationId xmlns:a16="http://schemas.microsoft.com/office/drawing/2014/main" id="{A67153D8-59E3-4B99-A84B-BE53BA92FFB2}"/>
               </a:ext>
             </a:extLst>
           </p:cNvPr>
@@ -15527,7 +15527,7 @@
             <a:defPPr>
               <a:defRPr sz="2700" b="0">
                 <a:solidFill>
-                  <a:srgbClr val="F3EEE8"/>
+                  <a:srgbClr val="F1EEE8"/>
                 </a:solidFill>
                 <a:latin typeface="Arial"/>
                 <a:ea typeface="Arial"/>
@@ -15539,7 +15539,7 @@
             <a:pPr>
               <a:defRPr sz="2700" b="0">
                 <a:solidFill>
-                  <a:srgbClr val="F3EEE8"/>
+                  <a:srgbClr val="F1EEE8"/>
                 </a:solidFill>
                 <a:latin typeface="Arial"/>
                 <a:ea typeface="Arial"/>
@@ -15549,7 +15549,7 @@
             <a:r>
               <a:rPr sz="2700" b="0">
                 <a:solidFill>
-                  <a:srgbClr val="F3EEE8"/>
+                  <a:srgbClr val="F1EEE8"/>
                 </a:solidFill>
                 <a:latin typeface="Arial"/>
                 <a:ea typeface="Arial"/>
@@ -15565,7 +15565,7 @@
           <p:cNvPr id="3" name="">
             <a:extLst xmlns:a="http://schemas.openxmlformats.org/drawingml/2006/main">
               <a:ext uri="{FF2B5EF4-FFF2-40B4-BE49-F238E27FC236}">
-                <a16:creationId xmlns:a16="http://schemas.microsoft.com/office/drawing/2014/main" id="{3CD4070C-800C-448A-835D-42418FC81F23}"/>
+                <a16:creationId xmlns:a16="http://schemas.microsoft.com/office/drawing/2014/main" id="{AB31B698-D034-4D49-BB9B-D3F97DE8F407}"/>
               </a:ext>
             </a:extLst>
           </p:cNvPr>
@@ -15593,7 +15593,7 @@
             <a:defPPr>
               <a:defRPr sz="2400" b="1">
                 <a:solidFill>
-                  <a:srgbClr val="BD9A78"/>
+                  <a:srgbClr val="C6A27F"/>
                 </a:solidFill>
                 <a:latin typeface="Arial"/>
                 <a:ea typeface="Arial"/>
@@ -15605,7 +15605,7 @@
             <a:pPr>
               <a:defRPr sz="2400" b="1">
                 <a:solidFill>
-                  <a:srgbClr val="BD9A78"/>
+                  <a:srgbClr val="C6A27F"/>
                 </a:solidFill>
                 <a:latin typeface="Arial"/>
                 <a:ea typeface="Arial"/>
@@ -15615,7 +15615,7 @@
             <a:r>
               <a:rPr sz="2400" b="1">
                 <a:solidFill>
-                  <a:srgbClr val="BD9A78"/>
+                  <a:srgbClr val="C6A27F"/>
                 </a:solidFill>
                 <a:latin typeface="Arial"/>
                 <a:ea typeface="Arial"/>
@@ -15631,7 +15631,7 @@
           <p:cNvPr id="4" name="">
             <a:extLst xmlns:a="http://schemas.openxmlformats.org/drawingml/2006/main">
               <a:ext uri="{FF2B5EF4-FFF2-40B4-BE49-F238E27FC236}">
-                <a16:creationId xmlns:a16="http://schemas.microsoft.com/office/drawing/2014/main" id="{AF4F9AD7-9E5E-42EA-8003-C9165647EDB5}"/>
+                <a16:creationId xmlns:a16="http://schemas.microsoft.com/office/drawing/2014/main" id="{1196256C-F507-40DD-BF27-88290771BB24}"/>
               </a:ext>
             </a:extLst>
           </p:cNvPr>
@@ -15659,7 +15659,7 @@
             <a:defPPr>
               <a:defRPr sz="2400" b="0">
                 <a:solidFill>
-                  <a:srgbClr val="F3EEE8"/>
+                  <a:srgbClr val="F1EEE8"/>
                 </a:solidFill>
                 <a:latin typeface="Arial"/>
                 <a:ea typeface="Arial"/>
@@ -15671,7 +15671,7 @@
             <a:pPr>
               <a:defRPr sz="2400" b="0">
                 <a:solidFill>
-                  <a:srgbClr val="F3EEE8"/>
+                  <a:srgbClr val="F1EEE8"/>
                 </a:solidFill>
                 <a:latin typeface="Arial"/>
                 <a:ea typeface="Arial"/>
@@ -15681,7 +15681,7 @@
             <a:r>
               <a:rPr sz="2400" b="0">
                 <a:solidFill>
-                  <a:srgbClr val="F3EEE8"/>
+                  <a:srgbClr val="F1EEE8"/>
                 </a:solidFill>
                 <a:latin typeface="Arial"/>
                 <a:ea typeface="Arial"/>
@@ -15694,7 +15694,7 @@
             <a:pPr>
               <a:defRPr sz="2400" b="0">
                 <a:solidFill>
-                  <a:srgbClr val="F3EEE8"/>
+                  <a:srgbClr val="F1EEE8"/>
                 </a:solidFill>
                 <a:latin typeface="Arial"/>
                 <a:ea typeface="Arial"/>
@@ -15704,7 +15704,7 @@
             <a:r>
               <a:rPr sz="2400" b="0">
                 <a:solidFill>
-                  <a:srgbClr val="F3EEE8"/>
+                  <a:srgbClr val="F1EEE8"/>
                 </a:solidFill>
                 <a:latin typeface="Arial"/>
                 <a:ea typeface="Arial"/>
@@ -15720,7 +15720,7 @@
           <p:cNvPr id="5" name="">
             <a:extLst xmlns:a="http://schemas.openxmlformats.org/drawingml/2006/main">
               <a:ext uri="{FF2B5EF4-FFF2-40B4-BE49-F238E27FC236}">
-                <a16:creationId xmlns:a16="http://schemas.microsoft.com/office/drawing/2014/main" id="{67D05DEE-4A8A-4D8A-B5E8-A922FFFB751F}"/>
+                <a16:creationId xmlns:a16="http://schemas.microsoft.com/office/drawing/2014/main" id="{CECE42D1-564C-40FE-8C51-0A696153978E}"/>
               </a:ext>
             </a:extLst>
           </p:cNvPr>
@@ -15748,7 +15748,7 @@
             <a:defPPr>
               <a:defRPr sz="2400" b="1">
                 <a:solidFill>
-                  <a:srgbClr val="BD9A78"/>
+                  <a:srgbClr val="C6A27F"/>
                 </a:solidFill>
                 <a:latin typeface="Arial"/>
                 <a:ea typeface="Arial"/>
@@ -15760,7 +15760,7 @@
             <a:pPr>
               <a:defRPr sz="2400" b="1">
                 <a:solidFill>
-                  <a:srgbClr val="BD9A78"/>
+                  <a:srgbClr val="C6A27F"/>
                 </a:solidFill>
                 <a:latin typeface="Arial"/>
                 <a:ea typeface="Arial"/>
@@ -15770,7 +15770,7 @@
             <a:r>
               <a:rPr sz="2400" b="1">
                 <a:solidFill>
-                  <a:srgbClr val="BD9A78"/>
+                  <a:srgbClr val="C6A27F"/>
                 </a:solidFill>
                 <a:latin typeface="Arial"/>
                 <a:ea typeface="Arial"/>
@@ -15786,7 +15786,7 @@
           <p:cNvPr id="6" name="">
             <a:extLst xmlns:a="http://schemas.openxmlformats.org/drawingml/2006/main">
               <a:ext uri="{FF2B5EF4-FFF2-40B4-BE49-F238E27FC236}">
-                <a16:creationId xmlns:a16="http://schemas.microsoft.com/office/drawing/2014/main" id="{32DCEED8-24CB-4443-A33D-877E227B45F5}"/>
+                <a16:creationId xmlns:a16="http://schemas.microsoft.com/office/drawing/2014/main" id="{FACDA621-8978-44A1-92FF-EDA315EAB0C7}"/>
               </a:ext>
             </a:extLst>
           </p:cNvPr>
@@ -15814,7 +15814,7 @@
             <a:defPPr>
               <a:defRPr sz="2400" b="0">
                 <a:solidFill>
-                  <a:srgbClr val="F3EEE8"/>
+                  <a:srgbClr val="F1EEE8"/>
                 </a:solidFill>
                 <a:latin typeface="Arial"/>
                 <a:ea typeface="Arial"/>
@@ -15826,7 +15826,7 @@
             <a:pPr>
               <a:defRPr sz="2400" b="0">
                 <a:solidFill>
-                  <a:srgbClr val="F3EEE8"/>
+                  <a:srgbClr val="F1EEE8"/>
                 </a:solidFill>
                 <a:latin typeface="Arial"/>
                 <a:ea typeface="Arial"/>
@@ -15836,7 +15836,7 @@
             <a:r>
               <a:rPr sz="2400" b="0">
                 <a:solidFill>
-                  <a:srgbClr val="F3EEE8"/>
+                  <a:srgbClr val="F1EEE8"/>
                 </a:solidFill>
                 <a:latin typeface="Arial"/>
                 <a:ea typeface="Arial"/>
@@ -15852,7 +15852,7 @@
           <p:cNvPr id="7" name="">
             <a:extLst xmlns:a="http://schemas.openxmlformats.org/drawingml/2006/main">
               <a:ext uri="{FF2B5EF4-FFF2-40B4-BE49-F238E27FC236}">
-                <a16:creationId xmlns:a16="http://schemas.microsoft.com/office/drawing/2014/main" id="{E486D545-F753-42F1-BD24-159ED52FFBF5}"/>
+                <a16:creationId xmlns:a16="http://schemas.microsoft.com/office/drawing/2014/main" id="{3987E0B2-B57C-4901-98B2-DEF98F4EA8DE}"/>
               </a:ext>
             </a:extLst>
           </p:cNvPr>
@@ -15880,7 +15880,7 @@
             <a:defPPr>
               <a:defRPr sz="2400" b="1">
                 <a:solidFill>
-                  <a:srgbClr val="BD9A78"/>
+                  <a:srgbClr val="C6A27F"/>
                 </a:solidFill>
                 <a:latin typeface="Arial"/>
                 <a:ea typeface="Arial"/>
@@ -15892,7 +15892,7 @@
             <a:pPr>
               <a:defRPr sz="2400" b="1">
                 <a:solidFill>
-                  <a:srgbClr val="BD9A78"/>
+                  <a:srgbClr val="C6A27F"/>
                 </a:solidFill>
                 <a:latin typeface="Arial"/>
                 <a:ea typeface="Arial"/>
@@ -15902,7 +15902,7 @@
             <a:r>
               <a:rPr sz="2400" b="1">
                 <a:solidFill>
-                  <a:srgbClr val="BD9A78"/>
+                  <a:srgbClr val="C6A27F"/>
                 </a:solidFill>
                 <a:latin typeface="Arial"/>
                 <a:ea typeface="Arial"/>
@@ -15918,7 +15918,7 @@
           <p:cNvPr id="8" name="">
             <a:extLst xmlns:a="http://schemas.openxmlformats.org/drawingml/2006/main">
               <a:ext uri="{FF2B5EF4-FFF2-40B4-BE49-F238E27FC236}">
-                <a16:creationId xmlns:a16="http://schemas.microsoft.com/office/drawing/2014/main" id="{B83FD2DB-2630-407E-A066-96BDA7361130}"/>
+                <a16:creationId xmlns:a16="http://schemas.microsoft.com/office/drawing/2014/main" id="{C520D829-C2C2-447E-B55B-34D980E56FE2}"/>
               </a:ext>
             </a:extLst>
           </p:cNvPr>
@@ -15946,7 +15946,7 @@
             <a:defPPr>
               <a:defRPr sz="2400" b="0">
                 <a:solidFill>
-                  <a:srgbClr val="F3EEE8"/>
+                  <a:srgbClr val="F1EEE8"/>
                 </a:solidFill>
                 <a:latin typeface="Arial"/>
                 <a:ea typeface="Arial"/>
@@ -15958,7 +15958,7 @@
             <a:pPr>
               <a:defRPr sz="2400" b="0">
                 <a:solidFill>
-                  <a:srgbClr val="F3EEE8"/>
+                  <a:srgbClr val="F1EEE8"/>
                 </a:solidFill>
                 <a:latin typeface="Arial"/>
                 <a:ea typeface="Arial"/>
@@ -15968,7 +15968,7 @@
             <a:r>
               <a:rPr sz="2400" b="0">
                 <a:solidFill>
-                  <a:srgbClr val="F3EEE8"/>
+                  <a:srgbClr val="F1EEE8"/>
                 </a:solidFill>
                 <a:latin typeface="Arial"/>
                 <a:ea typeface="Arial"/>
@@ -15984,7 +15984,7 @@
           <p:cNvPr id="9" name="">
             <a:extLst xmlns:a="http://schemas.openxmlformats.org/drawingml/2006/main">
               <a:ext uri="{FF2B5EF4-FFF2-40B4-BE49-F238E27FC236}">
-                <a16:creationId xmlns:a16="http://schemas.microsoft.com/office/drawing/2014/main" id="{57B13969-E15C-4140-A861-508EBC4EA1AE}"/>
+                <a16:creationId xmlns:a16="http://schemas.microsoft.com/office/drawing/2014/main" id="{9B3027F8-32A2-4E7D-9513-E33B6955ED93}"/>
               </a:ext>
             </a:extLst>
           </p:cNvPr>
@@ -16012,7 +16012,7 @@
             <a:defPPr>
               <a:defRPr sz="2400" b="1">
                 <a:solidFill>
-                  <a:srgbClr val="BD9A78"/>
+                  <a:srgbClr val="C6A27F"/>
                 </a:solidFill>
                 <a:latin typeface="Arial"/>
                 <a:ea typeface="Arial"/>
@@ -16024,7 +16024,7 @@
             <a:pPr>
               <a:defRPr sz="2400" b="1">
                 <a:solidFill>
-                  <a:srgbClr val="BD9A78"/>
+                  <a:srgbClr val="C6A27F"/>
                 </a:solidFill>
                 <a:latin typeface="Arial"/>
                 <a:ea typeface="Arial"/>
@@ -16034,7 +16034,7 @@
             <a:r>
               <a:rPr sz="2400" b="1">
                 <a:solidFill>
-                  <a:srgbClr val="BD9A78"/>
+                  <a:srgbClr val="C6A27F"/>
                 </a:solidFill>
                 <a:latin typeface="Arial"/>
                 <a:ea typeface="Arial"/>
@@ -16050,7 +16050,7 @@
           <p:cNvPr id="10" name="">
             <a:extLst xmlns:a="http://schemas.openxmlformats.org/drawingml/2006/main">
               <a:ext uri="{FF2B5EF4-FFF2-40B4-BE49-F238E27FC236}">
-                <a16:creationId xmlns:a16="http://schemas.microsoft.com/office/drawing/2014/main" id="{3F81516C-0276-4DEC-ABA3-69C5E6561959}"/>
+                <a16:creationId xmlns:a16="http://schemas.microsoft.com/office/drawing/2014/main" id="{6625301E-1D58-40D8-9EDF-8BA682D45F83}"/>
               </a:ext>
             </a:extLst>
           </p:cNvPr>
@@ -16078,7 +16078,7 @@
             <a:defPPr>
               <a:defRPr sz="2400" b="0">
                 <a:solidFill>
-                  <a:srgbClr val="F3EEE8"/>
+                  <a:srgbClr val="F1EEE8"/>
                 </a:solidFill>
                 <a:latin typeface="Arial"/>
                 <a:ea typeface="Arial"/>
@@ -16090,7 +16090,7 @@
             <a:pPr>
               <a:defRPr sz="2400" b="0">
                 <a:solidFill>
-                  <a:srgbClr val="F3EEE8"/>
+                  <a:srgbClr val="F1EEE8"/>
                 </a:solidFill>
                 <a:latin typeface="Arial"/>
                 <a:ea typeface="Arial"/>
@@ -16100,7 +16100,7 @@
             <a:r>
               <a:rPr sz="2400" b="0">
                 <a:solidFill>
-                  <a:srgbClr val="F3EEE8"/>
+                  <a:srgbClr val="F1EEE8"/>
                 </a:solidFill>
                 <a:latin typeface="Arial"/>
                 <a:ea typeface="Arial"/>
@@ -16113,7 +16113,7 @@
             <a:pPr>
               <a:defRPr sz="2400" b="0">
                 <a:solidFill>
-                  <a:srgbClr val="F3EEE8"/>
+                  <a:srgbClr val="F1EEE8"/>
                 </a:solidFill>
                 <a:latin typeface="Arial"/>
                 <a:ea typeface="Arial"/>
@@ -16123,7 +16123,7 @@
             <a:r>
               <a:rPr sz="2400" b="0">
                 <a:solidFill>
-                  <a:srgbClr val="F3EEE8"/>
+                  <a:srgbClr val="F1EEE8"/>
                 </a:solidFill>
                 <a:latin typeface="Arial"/>
                 <a:ea typeface="Arial"/>
@@ -16139,7 +16139,7 @@
           <p:cNvPr id="11" name="">
             <a:extLst xmlns:a="http://schemas.openxmlformats.org/drawingml/2006/main">
               <a:ext uri="{FF2B5EF4-FFF2-40B4-BE49-F238E27FC236}">
-                <a16:creationId xmlns:a16="http://schemas.microsoft.com/office/drawing/2014/main" id="{0F9CFE25-3D20-4FF4-9284-2BA04DD92650}"/>
+                <a16:creationId xmlns:a16="http://schemas.microsoft.com/office/drawing/2014/main" id="{0EEF37CC-8B81-40CD-806E-CCCCDD893003}"/>
               </a:ext>
             </a:extLst>
           </p:cNvPr>
@@ -16167,7 +16167,7 @@
             <a:defPPr>
               <a:defRPr sz="1425" b="0">
                 <a:solidFill>
-                  <a:srgbClr val="93A4AA"/>
+                  <a:srgbClr val="A9B8BC"/>
                 </a:solidFill>
                 <a:latin typeface="Arial"/>
                 <a:ea typeface="Arial"/>
@@ -16179,7 +16179,7 @@
             <a:pPr>
               <a:defRPr sz="1425" b="0">
                 <a:solidFill>
-                  <a:srgbClr val="93A4AA"/>
+                  <a:srgbClr val="A9B8BC"/>
                 </a:solidFill>
                 <a:latin typeface="Arial"/>
                 <a:ea typeface="Arial"/>
@@ -16189,7 +16189,7 @@
             <a:r>
               <a:rPr sz="1425" b="0">
                 <a:solidFill>
-                  <a:srgbClr val="93A4AA"/>
+                  <a:srgbClr val="A9B8BC"/>
                 </a:solidFill>
                 <a:latin typeface="Arial"/>
                 <a:ea typeface="Arial"/>
@@ -16203,7 +16203,7 @@
     </p:spTree>
     <p:extLst>
       <p:ext uri="{BB962C8B-B14F-4D97-AF65-F5344CB8AC3E}">
-        <p14:creationId xmlns:p14="http://schemas.microsoft.com/office/powerpoint/2010/main" val="2057103643"/>
+        <p14:creationId xmlns:p14="http://schemas.microsoft.com/office/powerpoint/2010/main" val="1662649543"/>
       </p:ext>
     </p:extLst>
   </p:cSld>
